--- a/jurimetria/aulas/aula_01/slides/aula1_bloco2_jurimetria.pptx
+++ b/jurimetria/aulas/aula_01/slides/aula1_bloco2_jurimetria.pptx
@@ -299,7 +299,7 @@
       </p15:sldGuideLst>
     </p:ext>
     <p:ext uri="GoogleSlidesCustomDataVersion2">
-      <go:slidesCustomData xmlns:go="http://customooxmlschemas.google.com/" r:id="rId49" roundtripDataSignature="AMtx7mhKbLG4NuOx191qdy9AQ7jxCtH+2g=="/>
+      <go:slidesCustomData xmlns:go="http://customooxmlschemas.google.com/" r:id="rId49" roundtripDataSignature="AMtx7mh2Fz07P5LPd2CzsvJ5cw+vLz7GvQ=="/>
     </p:ext>
   </p:extLst>
 </p:presentation>
@@ -7021,14 +7021,10 @@
               <a:buNone/>
             </a:pPr>
             <a:r>
-              <a:rPr b="1" i="0" lang="en-US" sz="2000" u="none" cap="none" strike="noStrike">
+              <a:rPr i="0" lang="en-US" sz="2000" u="none" cap="none" strike="noStrike">
                 <a:solidFill>
                   <a:srgbClr val="E8A317"/>
                 </a:solidFill>
-                <a:latin typeface="Arial"/>
-                <a:ea typeface="Arial"/>
-                <a:cs typeface="Arial"/>
-                <a:sym typeface="Arial"/>
               </a:rPr>
               <a:t>Aula 1 – Bloco 2</a:t>
             </a:r>
@@ -7140,7 +7136,7 @@
         <p:spPr>
           <a:xfrm>
             <a:off x="750000" y="500000"/>
-            <a:ext cx="5950000" cy="900000"/>
+            <a:ext cx="7150200" cy="900000"/>
           </a:xfrm>
           <a:prstGeom prst="rect">
             <a:avLst/>
@@ -7198,7 +7194,7 @@
         <p:spPr>
           <a:xfrm>
             <a:off x="750000" y="1330000"/>
-            <a:ext cx="5950000" cy="400000"/>
+            <a:ext cx="7150200" cy="399900"/>
           </a:xfrm>
           <a:prstGeom prst="rect">
             <a:avLst/>
@@ -7256,7 +7252,7 @@
         <p:spPr>
           <a:xfrm>
             <a:off x="750000" y="1700000"/>
-            <a:ext cx="2850000" cy="1229100"/>
+            <a:ext cx="3424800" cy="1229100"/>
           </a:xfrm>
           <a:prstGeom prst="roundRect">
             <a:avLst>
@@ -7317,8 +7313,8 @@
         </p:nvSpPr>
         <p:spPr>
           <a:xfrm>
-            <a:off x="900000" y="1859778"/>
-            <a:ext cx="2550000" cy="368700"/>
+            <a:off x="930258" y="1859778"/>
+            <a:ext cx="3064500" cy="368700"/>
           </a:xfrm>
           <a:prstGeom prst="rect">
             <a:avLst/>
@@ -7375,8 +7371,8 @@
         </p:nvSpPr>
         <p:spPr>
           <a:xfrm>
-            <a:off x="900000" y="2289949"/>
-            <a:ext cx="2550000" cy="589800"/>
+            <a:off x="930258" y="2289949"/>
+            <a:ext cx="3064500" cy="589800"/>
           </a:xfrm>
           <a:prstGeom prst="rect">
             <a:avLst/>
@@ -7433,8 +7429,8 @@
         </p:nvSpPr>
         <p:spPr>
           <a:xfrm>
-            <a:off x="3750000" y="1700000"/>
-            <a:ext cx="2850000" cy="1229100"/>
+            <a:off x="4355168" y="1700000"/>
+            <a:ext cx="3424800" cy="1229100"/>
           </a:xfrm>
           <a:prstGeom prst="roundRect">
             <a:avLst>
@@ -7495,8 +7491,8 @@
         </p:nvSpPr>
         <p:spPr>
           <a:xfrm>
-            <a:off x="3900000" y="1859778"/>
-            <a:ext cx="2550000" cy="368700"/>
+            <a:off x="4535426" y="1859778"/>
+            <a:ext cx="3064500" cy="368700"/>
           </a:xfrm>
           <a:prstGeom prst="rect">
             <a:avLst/>
@@ -7553,8 +7549,8 @@
         </p:nvSpPr>
         <p:spPr>
           <a:xfrm>
-            <a:off x="3900000" y="2289949"/>
-            <a:ext cx="2550000" cy="589800"/>
+            <a:off x="4535426" y="2289949"/>
+            <a:ext cx="3064500" cy="589800"/>
           </a:xfrm>
           <a:prstGeom prst="rect">
             <a:avLst/>
@@ -7612,7 +7608,7 @@
         <p:spPr>
           <a:xfrm>
             <a:off x="750000" y="3051965"/>
-            <a:ext cx="2850000" cy="1229100"/>
+            <a:ext cx="3424800" cy="1229100"/>
           </a:xfrm>
           <a:prstGeom prst="roundRect">
             <a:avLst>
@@ -7673,8 +7669,8 @@
         </p:nvSpPr>
         <p:spPr>
           <a:xfrm>
-            <a:off x="900000" y="3211743"/>
-            <a:ext cx="2550000" cy="368700"/>
+            <a:off x="930258" y="3211743"/>
+            <a:ext cx="3064500" cy="368700"/>
           </a:xfrm>
           <a:prstGeom prst="rect">
             <a:avLst/>
@@ -7731,8 +7727,8 @@
         </p:nvSpPr>
         <p:spPr>
           <a:xfrm>
-            <a:off x="900000" y="3641914"/>
-            <a:ext cx="2550000" cy="589800"/>
+            <a:off x="930258" y="3641914"/>
+            <a:ext cx="3064500" cy="589800"/>
           </a:xfrm>
           <a:prstGeom prst="rect">
             <a:avLst/>
@@ -7789,8 +7785,8 @@
         </p:nvSpPr>
         <p:spPr>
           <a:xfrm>
-            <a:off x="3750000" y="3051965"/>
-            <a:ext cx="2850000" cy="1229100"/>
+            <a:off x="4355168" y="3051965"/>
+            <a:ext cx="3424800" cy="1229100"/>
           </a:xfrm>
           <a:prstGeom prst="roundRect">
             <a:avLst>
@@ -7851,8 +7847,8 @@
         </p:nvSpPr>
         <p:spPr>
           <a:xfrm>
-            <a:off x="3900000" y="3211743"/>
-            <a:ext cx="2550000" cy="368700"/>
+            <a:off x="4535426" y="3211743"/>
+            <a:ext cx="3064500" cy="368700"/>
           </a:xfrm>
           <a:prstGeom prst="rect">
             <a:avLst/>
@@ -7909,8 +7905,8 @@
         </p:nvSpPr>
         <p:spPr>
           <a:xfrm>
-            <a:off x="3900000" y="3641914"/>
-            <a:ext cx="2550000" cy="589800"/>
+            <a:off x="4535426" y="3641914"/>
+            <a:ext cx="3064500" cy="589800"/>
           </a:xfrm>
           <a:prstGeom prst="rect">
             <a:avLst/>
@@ -7968,7 +7964,7 @@
         <p:spPr>
           <a:xfrm>
             <a:off x="750000" y="4400000"/>
-            <a:ext cx="5950000" cy="250000"/>
+            <a:ext cx="7150200" cy="249900"/>
           </a:xfrm>
           <a:prstGeom prst="rect">
             <a:avLst/>
@@ -8025,8 +8021,8 @@
         </p:nvSpPr>
         <p:spPr>
           <a:xfrm>
-            <a:off x="750005" y="905100"/>
-            <a:ext cx="1500000" cy="54900"/>
+            <a:off x="750006" y="905100"/>
+            <a:ext cx="1802700" cy="54900"/>
           </a:xfrm>
           <a:prstGeom prst="rect">
             <a:avLst/>
@@ -8387,7 +8383,7 @@
         <p:spPr>
           <a:xfrm>
             <a:off x="750000" y="500000"/>
-            <a:ext cx="5950000" cy="900000"/>
+            <a:ext cx="7128600" cy="900000"/>
           </a:xfrm>
           <a:prstGeom prst="rect">
             <a:avLst/>
@@ -8445,7 +8441,7 @@
         <p:spPr>
           <a:xfrm>
             <a:off x="750000" y="1330000"/>
-            <a:ext cx="5950000" cy="400000"/>
+            <a:ext cx="7128600" cy="399900"/>
           </a:xfrm>
           <a:prstGeom prst="rect">
             <a:avLst/>
@@ -8503,7 +8499,7 @@
         <p:spPr>
           <a:xfrm>
             <a:off x="750000" y="1750000"/>
-            <a:ext cx="5950000" cy="550000"/>
+            <a:ext cx="7128600" cy="549900"/>
           </a:xfrm>
           <a:prstGeom prst="roundRect">
             <a:avLst>
@@ -8558,8 +8554,8 @@
         </p:nvSpPr>
         <p:spPr>
           <a:xfrm>
-            <a:off x="850000" y="1900000"/>
-            <a:ext cx="600000" cy="350000"/>
+            <a:off x="869806" y="1900000"/>
+            <a:ext cx="718800" cy="350100"/>
           </a:xfrm>
           <a:prstGeom prst="rect">
             <a:avLst/>
@@ -8616,8 +8612,8 @@
         </p:nvSpPr>
         <p:spPr>
           <a:xfrm>
-            <a:off x="1500000" y="1830000"/>
-            <a:ext cx="5100000" cy="300000"/>
+            <a:off x="1648547" y="1830000"/>
+            <a:ext cx="6110100" cy="300000"/>
           </a:xfrm>
           <a:prstGeom prst="rect">
             <a:avLst/>
@@ -8674,8 +8670,8 @@
         </p:nvSpPr>
         <p:spPr>
           <a:xfrm>
-            <a:off x="1500000" y="2100000"/>
-            <a:ext cx="5100000" cy="300000"/>
+            <a:off x="1648547" y="2100000"/>
+            <a:ext cx="6110100" cy="300000"/>
           </a:xfrm>
           <a:prstGeom prst="rect">
             <a:avLst/>
@@ -8733,7 +8729,7 @@
         <p:spPr>
           <a:xfrm>
             <a:off x="750000" y="2350000"/>
-            <a:ext cx="5950000" cy="550000"/>
+            <a:ext cx="7128600" cy="549900"/>
           </a:xfrm>
           <a:prstGeom prst="roundRect">
             <a:avLst>
@@ -8788,8 +8784,8 @@
         </p:nvSpPr>
         <p:spPr>
           <a:xfrm>
-            <a:off x="850000" y="2500000"/>
-            <a:ext cx="600000" cy="350000"/>
+            <a:off x="869806" y="2500000"/>
+            <a:ext cx="718800" cy="350100"/>
           </a:xfrm>
           <a:prstGeom prst="rect">
             <a:avLst/>
@@ -8846,8 +8842,8 @@
         </p:nvSpPr>
         <p:spPr>
           <a:xfrm>
-            <a:off x="1500000" y="2430000"/>
-            <a:ext cx="5100000" cy="300000"/>
+            <a:off x="1648547" y="2430000"/>
+            <a:ext cx="6110100" cy="300000"/>
           </a:xfrm>
           <a:prstGeom prst="rect">
             <a:avLst/>
@@ -8904,8 +8900,8 @@
         </p:nvSpPr>
         <p:spPr>
           <a:xfrm>
-            <a:off x="1500000" y="2700000"/>
-            <a:ext cx="5100000" cy="300000"/>
+            <a:off x="1648547" y="2700000"/>
+            <a:ext cx="6110100" cy="300000"/>
           </a:xfrm>
           <a:prstGeom prst="rect">
             <a:avLst/>
@@ -8963,7 +8959,7 @@
         <p:spPr>
           <a:xfrm>
             <a:off x="750000" y="2950000"/>
-            <a:ext cx="5950000" cy="550000"/>
+            <a:ext cx="7128600" cy="549900"/>
           </a:xfrm>
           <a:prstGeom prst="roundRect">
             <a:avLst>
@@ -9018,8 +9014,8 @@
         </p:nvSpPr>
         <p:spPr>
           <a:xfrm>
-            <a:off x="850000" y="3100000"/>
-            <a:ext cx="600000" cy="350000"/>
+            <a:off x="869806" y="3100000"/>
+            <a:ext cx="718800" cy="350100"/>
           </a:xfrm>
           <a:prstGeom prst="rect">
             <a:avLst/>
@@ -9076,8 +9072,8 @@
         </p:nvSpPr>
         <p:spPr>
           <a:xfrm>
-            <a:off x="1500000" y="3030000"/>
-            <a:ext cx="5100000" cy="300000"/>
+            <a:off x="1648547" y="3030000"/>
+            <a:ext cx="6110100" cy="300000"/>
           </a:xfrm>
           <a:prstGeom prst="rect">
             <a:avLst/>
@@ -9134,8 +9130,8 @@
         </p:nvSpPr>
         <p:spPr>
           <a:xfrm>
-            <a:off x="1500000" y="3300000"/>
-            <a:ext cx="5100000" cy="300000"/>
+            <a:off x="1648547" y="3300000"/>
+            <a:ext cx="6110100" cy="300000"/>
           </a:xfrm>
           <a:prstGeom prst="rect">
             <a:avLst/>
@@ -9193,7 +9189,7 @@
         <p:spPr>
           <a:xfrm>
             <a:off x="750000" y="3550000"/>
-            <a:ext cx="5950000" cy="550000"/>
+            <a:ext cx="7128600" cy="549900"/>
           </a:xfrm>
           <a:prstGeom prst="roundRect">
             <a:avLst>
@@ -9248,8 +9244,8 @@
         </p:nvSpPr>
         <p:spPr>
           <a:xfrm>
-            <a:off x="850000" y="3700000"/>
-            <a:ext cx="600000" cy="350000"/>
+            <a:off x="869806" y="3700000"/>
+            <a:ext cx="718800" cy="350100"/>
           </a:xfrm>
           <a:prstGeom prst="rect">
             <a:avLst/>
@@ -9306,8 +9302,8 @@
         </p:nvSpPr>
         <p:spPr>
           <a:xfrm>
-            <a:off x="1500000" y="3630000"/>
-            <a:ext cx="5100000" cy="300000"/>
+            <a:off x="1648547" y="3630000"/>
+            <a:ext cx="6110100" cy="300000"/>
           </a:xfrm>
           <a:prstGeom prst="rect">
             <a:avLst/>
@@ -9364,8 +9360,8 @@
         </p:nvSpPr>
         <p:spPr>
           <a:xfrm>
-            <a:off x="1500000" y="3900000"/>
-            <a:ext cx="5100000" cy="300000"/>
+            <a:off x="1648547" y="3900000"/>
+            <a:ext cx="6110100" cy="300000"/>
           </a:xfrm>
           <a:prstGeom prst="rect">
             <a:avLst/>
@@ -9422,8 +9418,8 @@
         </p:nvSpPr>
         <p:spPr>
           <a:xfrm>
-            <a:off x="750005" y="905100"/>
-            <a:ext cx="1500000" cy="54900"/>
+            <a:off x="750006" y="905100"/>
+            <a:ext cx="1797000" cy="54900"/>
           </a:xfrm>
           <a:prstGeom prst="rect">
             <a:avLst/>
@@ -9519,7 +9515,7 @@
         <p:spPr>
           <a:xfrm>
             <a:off x="750000" y="500000"/>
-            <a:ext cx="5950000" cy="900000"/>
+            <a:ext cx="7106700" cy="900000"/>
           </a:xfrm>
           <a:prstGeom prst="rect">
             <a:avLst/>
@@ -9577,7 +9573,7 @@
         <p:spPr>
           <a:xfrm>
             <a:off x="750000" y="1228071"/>
-            <a:ext cx="5949900" cy="399900"/>
+            <a:ext cx="7106700" cy="399900"/>
           </a:xfrm>
           <a:prstGeom prst="rect">
             <a:avLst/>
@@ -9643,7 +9639,7 @@
         <p:spPr>
           <a:xfrm>
             <a:off x="750000" y="1648071"/>
-            <a:ext cx="5949900" cy="1500000"/>
+            <a:ext cx="7106700" cy="1500000"/>
           </a:xfrm>
           <a:prstGeom prst="roundRect">
             <a:avLst>
@@ -9704,8 +9700,8 @@
         </p:nvSpPr>
         <p:spPr>
           <a:xfrm>
-            <a:off x="850000" y="1728071"/>
-            <a:ext cx="4500000" cy="300000"/>
+            <a:off x="869441" y="1728071"/>
+            <a:ext cx="5374800" cy="300000"/>
           </a:xfrm>
           <a:prstGeom prst="rect">
             <a:avLst/>
@@ -9762,8 +9758,8 @@
         </p:nvSpPr>
         <p:spPr>
           <a:xfrm>
-            <a:off x="850000" y="1978071"/>
-            <a:ext cx="4500000" cy="300000"/>
+            <a:off x="869441" y="1978071"/>
+            <a:ext cx="5374800" cy="300000"/>
           </a:xfrm>
           <a:prstGeom prst="rect">
             <a:avLst/>
@@ -9820,8 +9816,8 @@
         </p:nvSpPr>
         <p:spPr>
           <a:xfrm>
-            <a:off x="850000" y="2348071"/>
-            <a:ext cx="1749900" cy="399900"/>
+            <a:off x="869441" y="2348071"/>
+            <a:ext cx="2090100" cy="399900"/>
           </a:xfrm>
           <a:prstGeom prst="rect">
             <a:avLst/>
@@ -9878,8 +9874,8 @@
         </p:nvSpPr>
         <p:spPr>
           <a:xfrm>
-            <a:off x="850000" y="2778071"/>
-            <a:ext cx="1749900" cy="300000"/>
+            <a:off x="869441" y="2778071"/>
+            <a:ext cx="2090100" cy="300000"/>
           </a:xfrm>
           <a:prstGeom prst="rect">
             <a:avLst/>
@@ -9936,8 +9932,8 @@
         </p:nvSpPr>
         <p:spPr>
           <a:xfrm>
-            <a:off x="2700000" y="2348071"/>
-            <a:ext cx="1749900" cy="399900"/>
+            <a:off x="3079095" y="2348071"/>
+            <a:ext cx="2090100" cy="399900"/>
           </a:xfrm>
           <a:prstGeom prst="rect">
             <a:avLst/>
@@ -9994,8 +9990,8 @@
         </p:nvSpPr>
         <p:spPr>
           <a:xfrm>
-            <a:off x="2700000" y="2778071"/>
-            <a:ext cx="1749900" cy="300000"/>
+            <a:off x="3079095" y="2778071"/>
+            <a:ext cx="2090100" cy="300000"/>
           </a:xfrm>
           <a:prstGeom prst="rect">
             <a:avLst/>
@@ -10052,8 +10048,8 @@
         </p:nvSpPr>
         <p:spPr>
           <a:xfrm>
-            <a:off x="4550000" y="2348071"/>
-            <a:ext cx="1749900" cy="399900"/>
+            <a:off x="5288749" y="2348071"/>
+            <a:ext cx="2090100" cy="399900"/>
           </a:xfrm>
           <a:prstGeom prst="rect">
             <a:avLst/>
@@ -10110,8 +10106,8 @@
         </p:nvSpPr>
         <p:spPr>
           <a:xfrm>
-            <a:off x="4550000" y="2778071"/>
-            <a:ext cx="1749900" cy="300000"/>
+            <a:off x="5288749" y="2778071"/>
+            <a:ext cx="2090100" cy="300000"/>
           </a:xfrm>
           <a:prstGeom prst="rect">
             <a:avLst/>
@@ -10169,7 +10165,7 @@
         <p:spPr>
           <a:xfrm>
             <a:off x="750000" y="3348071"/>
-            <a:ext cx="5949900" cy="849900"/>
+            <a:ext cx="7106700" cy="849900"/>
           </a:xfrm>
           <a:prstGeom prst="roundRect">
             <a:avLst>
@@ -10224,8 +10220,8 @@
         </p:nvSpPr>
         <p:spPr>
           <a:xfrm>
-            <a:off x="900000" y="3438071"/>
-            <a:ext cx="5649900" cy="750000"/>
+            <a:off x="929161" y="3438071"/>
+            <a:ext cx="6748200" cy="750000"/>
           </a:xfrm>
           <a:prstGeom prst="rect">
             <a:avLst/>
@@ -10295,7 +10291,7 @@
         <p:spPr>
           <a:xfrm>
             <a:off x="750000" y="4400000"/>
-            <a:ext cx="5950000" cy="250000"/>
+            <a:ext cx="7106700" cy="249900"/>
           </a:xfrm>
           <a:prstGeom prst="rect">
             <a:avLst/>
@@ -10352,8 +10348,8 @@
         </p:nvSpPr>
         <p:spPr>
           <a:xfrm>
-            <a:off x="750005" y="905100"/>
-            <a:ext cx="1500000" cy="54900"/>
+            <a:off x="750006" y="905100"/>
+            <a:ext cx="1791600" cy="54900"/>
           </a:xfrm>
           <a:prstGeom prst="rect">
             <a:avLst/>
@@ -10449,7 +10445,7 @@
         <p:spPr>
           <a:xfrm>
             <a:off x="750000" y="500000"/>
-            <a:ext cx="5950000" cy="900000"/>
+            <a:ext cx="7112100" cy="900000"/>
           </a:xfrm>
           <a:prstGeom prst="rect">
             <a:avLst/>
@@ -10506,8 +10502,8 @@
         </p:nvSpPr>
         <p:spPr>
           <a:xfrm>
-            <a:off x="757841" y="1196708"/>
-            <a:ext cx="5949900" cy="399900"/>
+            <a:off x="759372" y="1196708"/>
+            <a:ext cx="7111800" cy="399900"/>
           </a:xfrm>
           <a:prstGeom prst="rect">
             <a:avLst/>
@@ -10564,8 +10560,8 @@
         </p:nvSpPr>
         <p:spPr>
           <a:xfrm>
-            <a:off x="757841" y="1616708"/>
-            <a:ext cx="5949900" cy="380100"/>
+            <a:off x="759372" y="1616708"/>
+            <a:ext cx="7111800" cy="380100"/>
           </a:xfrm>
           <a:prstGeom prst="rect">
             <a:avLst/>
@@ -10618,8 +10614,8 @@
         </p:nvSpPr>
         <p:spPr>
           <a:xfrm>
-            <a:off x="817841" y="1696708"/>
-            <a:ext cx="1080000" cy="240000"/>
+            <a:off x="831089" y="1696708"/>
+            <a:ext cx="1290900" cy="240000"/>
           </a:xfrm>
           <a:prstGeom prst="rect">
             <a:avLst/>
@@ -10676,8 +10672,8 @@
         </p:nvSpPr>
         <p:spPr>
           <a:xfrm>
-            <a:off x="2017841" y="1696708"/>
-            <a:ext cx="579900" cy="240000"/>
+            <a:off x="2265437" y="1696708"/>
+            <a:ext cx="693000" cy="240000"/>
           </a:xfrm>
           <a:prstGeom prst="rect">
             <a:avLst/>
@@ -10734,8 +10730,8 @@
         </p:nvSpPr>
         <p:spPr>
           <a:xfrm>
-            <a:off x="2717841" y="1696708"/>
-            <a:ext cx="879900" cy="240000"/>
+            <a:off x="3102139" y="1696708"/>
+            <a:ext cx="1051800" cy="240000"/>
           </a:xfrm>
           <a:prstGeom prst="rect">
             <a:avLst/>
@@ -10792,8 +10788,8 @@
         </p:nvSpPr>
         <p:spPr>
           <a:xfrm>
-            <a:off x="3713875" y="1676650"/>
-            <a:ext cx="980100" cy="240000"/>
+            <a:off x="4292689" y="1676650"/>
+            <a:ext cx="1171500" cy="240000"/>
           </a:xfrm>
           <a:prstGeom prst="rect">
             <a:avLst/>
@@ -10850,8 +10846,8 @@
         </p:nvSpPr>
         <p:spPr>
           <a:xfrm>
-            <a:off x="4811988" y="1676650"/>
-            <a:ext cx="780000" cy="240000"/>
+            <a:off x="5605251" y="1676650"/>
+            <a:ext cx="932400" cy="240000"/>
           </a:xfrm>
           <a:prstGeom prst="rect">
             <a:avLst/>
@@ -10908,8 +10904,8 @@
         </p:nvSpPr>
         <p:spPr>
           <a:xfrm>
-            <a:off x="5710025" y="1709288"/>
-            <a:ext cx="930000" cy="240000"/>
+            <a:off x="6678666" y="1709288"/>
+            <a:ext cx="1111500" cy="240000"/>
           </a:xfrm>
           <a:prstGeom prst="rect">
             <a:avLst/>
@@ -10966,8 +10962,8 @@
         </p:nvSpPr>
         <p:spPr>
           <a:xfrm>
-            <a:off x="757841" y="1996708"/>
-            <a:ext cx="5949900" cy="300000"/>
+            <a:off x="759372" y="1996708"/>
+            <a:ext cx="7111800" cy="300000"/>
           </a:xfrm>
           <a:prstGeom prst="rect">
             <a:avLst/>
@@ -11020,8 +11016,8 @@
         </p:nvSpPr>
         <p:spPr>
           <a:xfrm>
-            <a:off x="817841" y="2056708"/>
-            <a:ext cx="1080000" cy="180000"/>
+            <a:off x="831089" y="2056708"/>
+            <a:ext cx="1290900" cy="180000"/>
           </a:xfrm>
           <a:prstGeom prst="rect">
             <a:avLst/>
@@ -11078,8 +11074,8 @@
         </p:nvSpPr>
         <p:spPr>
           <a:xfrm>
-            <a:off x="2017841" y="2056708"/>
-            <a:ext cx="579900" cy="180000"/>
+            <a:off x="2265437" y="2056708"/>
+            <a:ext cx="693000" cy="180000"/>
           </a:xfrm>
           <a:prstGeom prst="rect">
             <a:avLst/>
@@ -11136,8 +11132,8 @@
         </p:nvSpPr>
         <p:spPr>
           <a:xfrm>
-            <a:off x="2717841" y="2056708"/>
-            <a:ext cx="879900" cy="180000"/>
+            <a:off x="3102139" y="2056708"/>
+            <a:ext cx="1051800" cy="180000"/>
           </a:xfrm>
           <a:prstGeom prst="rect">
             <a:avLst/>
@@ -11194,8 +11190,8 @@
         </p:nvSpPr>
         <p:spPr>
           <a:xfrm>
-            <a:off x="3710000" y="2056708"/>
-            <a:ext cx="980100" cy="180000"/>
+            <a:off x="4288057" y="2056708"/>
+            <a:ext cx="1171500" cy="180000"/>
           </a:xfrm>
           <a:prstGeom prst="rect">
             <a:avLst/>
@@ -11252,8 +11248,8 @@
         </p:nvSpPr>
         <p:spPr>
           <a:xfrm>
-            <a:off x="4810000" y="2056750"/>
-            <a:ext cx="780000" cy="180000"/>
+            <a:off x="5602875" y="2056750"/>
+            <a:ext cx="932400" cy="180000"/>
           </a:xfrm>
           <a:prstGeom prst="rect">
             <a:avLst/>
@@ -11310,8 +11306,8 @@
         </p:nvSpPr>
         <p:spPr>
           <a:xfrm>
-            <a:off x="5709900" y="2061987"/>
-            <a:ext cx="930000" cy="180000"/>
+            <a:off x="6678516" y="2061987"/>
+            <a:ext cx="1111500" cy="180000"/>
           </a:xfrm>
           <a:prstGeom prst="rect">
             <a:avLst/>
@@ -11368,8 +11364,8 @@
         </p:nvSpPr>
         <p:spPr>
           <a:xfrm>
-            <a:off x="757841" y="2296708"/>
-            <a:ext cx="5949900" cy="300000"/>
+            <a:off x="759372" y="2296708"/>
+            <a:ext cx="7111800" cy="300000"/>
           </a:xfrm>
           <a:prstGeom prst="rect">
             <a:avLst/>
@@ -11422,8 +11418,8 @@
         </p:nvSpPr>
         <p:spPr>
           <a:xfrm>
-            <a:off x="817841" y="2356708"/>
-            <a:ext cx="1080000" cy="180000"/>
+            <a:off x="831089" y="2356708"/>
+            <a:ext cx="1290900" cy="180000"/>
           </a:xfrm>
           <a:prstGeom prst="rect">
             <a:avLst/>
@@ -11480,8 +11476,8 @@
         </p:nvSpPr>
         <p:spPr>
           <a:xfrm>
-            <a:off x="2017841" y="2356708"/>
-            <a:ext cx="579900" cy="180000"/>
+            <a:off x="2265437" y="2356708"/>
+            <a:ext cx="693000" cy="180000"/>
           </a:xfrm>
           <a:prstGeom prst="rect">
             <a:avLst/>
@@ -11538,8 +11534,8 @@
         </p:nvSpPr>
         <p:spPr>
           <a:xfrm>
-            <a:off x="2717841" y="2356708"/>
-            <a:ext cx="879900" cy="180000"/>
+            <a:off x="3102139" y="2356708"/>
+            <a:ext cx="1051800" cy="180000"/>
           </a:xfrm>
           <a:prstGeom prst="rect">
             <a:avLst/>
@@ -11596,8 +11592,8 @@
         </p:nvSpPr>
         <p:spPr>
           <a:xfrm>
-            <a:off x="3713875" y="2356700"/>
-            <a:ext cx="980100" cy="180000"/>
+            <a:off x="4292689" y="2356700"/>
+            <a:ext cx="1171500" cy="180000"/>
           </a:xfrm>
           <a:prstGeom prst="rect">
             <a:avLst/>
@@ -11654,8 +11650,8 @@
         </p:nvSpPr>
         <p:spPr>
           <a:xfrm>
-            <a:off x="4810000" y="2356700"/>
-            <a:ext cx="780000" cy="180000"/>
+            <a:off x="5602875" y="2356700"/>
+            <a:ext cx="932400" cy="180000"/>
           </a:xfrm>
           <a:prstGeom prst="rect">
             <a:avLst/>
@@ -11712,8 +11708,8 @@
         </p:nvSpPr>
         <p:spPr>
           <a:xfrm>
-            <a:off x="5710000" y="2356700"/>
-            <a:ext cx="930000" cy="180000"/>
+            <a:off x="6678636" y="2356700"/>
+            <a:ext cx="1111500" cy="180000"/>
           </a:xfrm>
           <a:prstGeom prst="rect">
             <a:avLst/>
@@ -11770,8 +11766,8 @@
         </p:nvSpPr>
         <p:spPr>
           <a:xfrm>
-            <a:off x="757841" y="2596708"/>
-            <a:ext cx="5949900" cy="300000"/>
+            <a:off x="759372" y="2596708"/>
+            <a:ext cx="7111800" cy="300000"/>
           </a:xfrm>
           <a:prstGeom prst="rect">
             <a:avLst/>
@@ -11824,8 +11820,8 @@
         </p:nvSpPr>
         <p:spPr>
           <a:xfrm>
-            <a:off x="817841" y="2656708"/>
-            <a:ext cx="1080000" cy="180000"/>
+            <a:off x="831089" y="2656708"/>
+            <a:ext cx="1290900" cy="180000"/>
           </a:xfrm>
           <a:prstGeom prst="rect">
             <a:avLst/>
@@ -11882,8 +11878,8 @@
         </p:nvSpPr>
         <p:spPr>
           <a:xfrm>
-            <a:off x="2017841" y="2656708"/>
-            <a:ext cx="579900" cy="180000"/>
+            <a:off x="2265437" y="2656708"/>
+            <a:ext cx="693000" cy="180000"/>
           </a:xfrm>
           <a:prstGeom prst="rect">
             <a:avLst/>
@@ -11940,8 +11936,8 @@
         </p:nvSpPr>
         <p:spPr>
           <a:xfrm>
-            <a:off x="2717841" y="2656708"/>
-            <a:ext cx="879900" cy="180000"/>
+            <a:off x="3102139" y="2656708"/>
+            <a:ext cx="1051800" cy="180000"/>
           </a:xfrm>
           <a:prstGeom prst="rect">
             <a:avLst/>
@@ -11998,8 +11994,8 @@
         </p:nvSpPr>
         <p:spPr>
           <a:xfrm>
-            <a:off x="3713875" y="2656700"/>
-            <a:ext cx="980100" cy="180000"/>
+            <a:off x="4292689" y="2656700"/>
+            <a:ext cx="1171500" cy="180000"/>
           </a:xfrm>
           <a:prstGeom prst="rect">
             <a:avLst/>
@@ -12056,8 +12052,8 @@
         </p:nvSpPr>
         <p:spPr>
           <a:xfrm>
-            <a:off x="4811988" y="2656700"/>
-            <a:ext cx="780000" cy="180000"/>
+            <a:off x="5605251" y="2656700"/>
+            <a:ext cx="932400" cy="180000"/>
           </a:xfrm>
           <a:prstGeom prst="rect">
             <a:avLst/>
@@ -12114,8 +12110,8 @@
         </p:nvSpPr>
         <p:spPr>
           <a:xfrm>
-            <a:off x="5710025" y="2656700"/>
-            <a:ext cx="930000" cy="180000"/>
+            <a:off x="6678666" y="2656700"/>
+            <a:ext cx="1111500" cy="180000"/>
           </a:xfrm>
           <a:prstGeom prst="rect">
             <a:avLst/>
@@ -12172,8 +12168,8 @@
         </p:nvSpPr>
         <p:spPr>
           <a:xfrm>
-            <a:off x="757841" y="2896708"/>
-            <a:ext cx="5949900" cy="300000"/>
+            <a:off x="759372" y="2896708"/>
+            <a:ext cx="7111800" cy="300000"/>
           </a:xfrm>
           <a:prstGeom prst="rect">
             <a:avLst/>
@@ -12226,8 +12222,8 @@
         </p:nvSpPr>
         <p:spPr>
           <a:xfrm>
-            <a:off x="817841" y="2956708"/>
-            <a:ext cx="1080000" cy="180000"/>
+            <a:off x="831089" y="2956708"/>
+            <a:ext cx="1290900" cy="180000"/>
           </a:xfrm>
           <a:prstGeom prst="rect">
             <a:avLst/>
@@ -12284,8 +12280,8 @@
         </p:nvSpPr>
         <p:spPr>
           <a:xfrm>
-            <a:off x="2017841" y="2956708"/>
-            <a:ext cx="579900" cy="180000"/>
+            <a:off x="2265437" y="2956708"/>
+            <a:ext cx="693000" cy="180000"/>
           </a:xfrm>
           <a:prstGeom prst="rect">
             <a:avLst/>
@@ -12342,8 +12338,8 @@
         </p:nvSpPr>
         <p:spPr>
           <a:xfrm>
-            <a:off x="2717841" y="2956708"/>
-            <a:ext cx="879900" cy="180000"/>
+            <a:off x="3102139" y="2956708"/>
+            <a:ext cx="1051800" cy="180000"/>
           </a:xfrm>
           <a:prstGeom prst="rect">
             <a:avLst/>
@@ -12400,8 +12396,8 @@
         </p:nvSpPr>
         <p:spPr>
           <a:xfrm>
-            <a:off x="3713875" y="2969656"/>
-            <a:ext cx="980100" cy="180000"/>
+            <a:off x="4292689" y="2969656"/>
+            <a:ext cx="1171500" cy="180000"/>
           </a:xfrm>
           <a:prstGeom prst="rect">
             <a:avLst/>
@@ -12458,8 +12454,8 @@
         </p:nvSpPr>
         <p:spPr>
           <a:xfrm>
-            <a:off x="4811988" y="2955222"/>
-            <a:ext cx="780000" cy="180000"/>
+            <a:off x="5605251" y="2955222"/>
+            <a:ext cx="932400" cy="180000"/>
           </a:xfrm>
           <a:prstGeom prst="rect">
             <a:avLst/>
@@ -12516,8 +12512,8 @@
         </p:nvSpPr>
         <p:spPr>
           <a:xfrm>
-            <a:off x="5710025" y="2966700"/>
-            <a:ext cx="930000" cy="180000"/>
+            <a:off x="6678666" y="2966700"/>
+            <a:ext cx="1111500" cy="180000"/>
           </a:xfrm>
           <a:prstGeom prst="rect">
             <a:avLst/>
@@ -12574,8 +12570,8 @@
         </p:nvSpPr>
         <p:spPr>
           <a:xfrm>
-            <a:off x="757841" y="3446708"/>
-            <a:ext cx="5949900" cy="750000"/>
+            <a:off x="759372" y="3446708"/>
+            <a:ext cx="7111800" cy="750000"/>
           </a:xfrm>
           <a:prstGeom prst="roundRect">
             <a:avLst>
@@ -12630,8 +12626,8 @@
         </p:nvSpPr>
         <p:spPr>
           <a:xfrm>
-            <a:off x="907841" y="3516708"/>
-            <a:ext cx="5649900" cy="650100"/>
+            <a:off x="938665" y="3516708"/>
+            <a:ext cx="6753300" cy="650100"/>
           </a:xfrm>
           <a:prstGeom prst="rect">
             <a:avLst/>
@@ -12701,7 +12697,7 @@
         <p:spPr>
           <a:xfrm>
             <a:off x="750000" y="4400000"/>
-            <a:ext cx="5950000" cy="250000"/>
+            <a:ext cx="7112100" cy="249900"/>
           </a:xfrm>
           <a:prstGeom prst="rect">
             <a:avLst/>
@@ -12758,8 +12754,8 @@
         </p:nvSpPr>
         <p:spPr>
           <a:xfrm>
-            <a:off x="750005" y="905100"/>
-            <a:ext cx="1500000" cy="54900"/>
+            <a:off x="750006" y="905100"/>
+            <a:ext cx="1792800" cy="54900"/>
           </a:xfrm>
           <a:prstGeom prst="rect">
             <a:avLst/>
@@ -12855,7 +12851,7 @@
         <p:spPr>
           <a:xfrm>
             <a:off x="750000" y="500000"/>
-            <a:ext cx="5950000" cy="900000"/>
+            <a:ext cx="6861900" cy="900000"/>
           </a:xfrm>
           <a:prstGeom prst="rect">
             <a:avLst/>
@@ -12913,7 +12909,7 @@
         <p:spPr>
           <a:xfrm>
             <a:off x="750000" y="1228071"/>
-            <a:ext cx="5949900" cy="399900"/>
+            <a:ext cx="6861900" cy="399900"/>
           </a:xfrm>
           <a:prstGeom prst="rect">
             <a:avLst/>
@@ -12970,8 +12966,8 @@
         </p:nvSpPr>
         <p:spPr>
           <a:xfrm>
-            <a:off x="2800000" y="1768071"/>
-            <a:ext cx="3549900" cy="6000"/>
+            <a:off x="3114196" y="1768071"/>
+            <a:ext cx="4094100" cy="6000"/>
           </a:xfrm>
           <a:prstGeom prst="rect">
             <a:avLst/>
@@ -13024,8 +13020,8 @@
         </p:nvSpPr>
         <p:spPr>
           <a:xfrm>
-            <a:off x="1100000" y="1828071"/>
-            <a:ext cx="1620000" cy="219900"/>
+            <a:off x="1153643" y="1828071"/>
+            <a:ext cx="1868400" cy="219900"/>
           </a:xfrm>
           <a:prstGeom prst="rect">
             <a:avLst/>
@@ -13082,8 +13078,8 @@
         </p:nvSpPr>
         <p:spPr>
           <a:xfrm>
-            <a:off x="2800000" y="1848071"/>
-            <a:ext cx="3301800" cy="170100"/>
+            <a:off x="3114196" y="1848071"/>
+            <a:ext cx="3807900" cy="170100"/>
           </a:xfrm>
           <a:prstGeom prst="rect">
             <a:avLst/>
@@ -13136,8 +13132,8 @@
         </p:nvSpPr>
         <p:spPr>
           <a:xfrm>
-            <a:off x="6151757" y="1828071"/>
-            <a:ext cx="600000" cy="219900"/>
+            <a:off x="6979663" y="1828071"/>
+            <a:ext cx="692100" cy="219900"/>
           </a:xfrm>
           <a:prstGeom prst="rect">
             <a:avLst/>
@@ -13194,8 +13190,8 @@
         </p:nvSpPr>
         <p:spPr>
           <a:xfrm>
-            <a:off x="1100000" y="2108071"/>
-            <a:ext cx="1620000" cy="219900"/>
+            <a:off x="1153643" y="2108071"/>
+            <a:ext cx="1868400" cy="219900"/>
           </a:xfrm>
           <a:prstGeom prst="rect">
             <a:avLst/>
@@ -13252,8 +13248,8 @@
         </p:nvSpPr>
         <p:spPr>
           <a:xfrm>
-            <a:off x="2800000" y="2128071"/>
-            <a:ext cx="1469700" cy="170100"/>
+            <a:off x="3114196" y="2128071"/>
+            <a:ext cx="1695000" cy="170100"/>
           </a:xfrm>
           <a:prstGeom prst="rect">
             <a:avLst/>
@@ -13306,8 +13302,8 @@
         </p:nvSpPr>
         <p:spPr>
           <a:xfrm>
-            <a:off x="4319726" y="2108071"/>
-            <a:ext cx="600000" cy="219900"/>
+            <a:off x="4866844" y="2108071"/>
+            <a:ext cx="692100" cy="219900"/>
           </a:xfrm>
           <a:prstGeom prst="rect">
             <a:avLst/>
@@ -13364,8 +13360,8 @@
         </p:nvSpPr>
         <p:spPr>
           <a:xfrm>
-            <a:off x="1100000" y="2388071"/>
-            <a:ext cx="1620000" cy="219900"/>
+            <a:off x="1153643" y="2388071"/>
+            <a:ext cx="1868400" cy="219900"/>
           </a:xfrm>
           <a:prstGeom prst="rect">
             <a:avLst/>
@@ -13422,8 +13418,8 @@
         </p:nvSpPr>
         <p:spPr>
           <a:xfrm>
-            <a:off x="2800000" y="2408071"/>
-            <a:ext cx="1257900" cy="170100"/>
+            <a:off x="3114196" y="2408071"/>
+            <a:ext cx="1450800" cy="170100"/>
           </a:xfrm>
           <a:prstGeom prst="rect">
             <a:avLst/>
@@ -13476,8 +13472,8 @@
         </p:nvSpPr>
         <p:spPr>
           <a:xfrm>
-            <a:off x="4107812" y="2388071"/>
-            <a:ext cx="600000" cy="219900"/>
+            <a:off x="4622451" y="2388071"/>
+            <a:ext cx="692100" cy="219900"/>
           </a:xfrm>
           <a:prstGeom prst="rect">
             <a:avLst/>
@@ -13534,8 +13530,8 @@
         </p:nvSpPr>
         <p:spPr>
           <a:xfrm>
-            <a:off x="1100000" y="2668071"/>
-            <a:ext cx="1620000" cy="219900"/>
+            <a:off x="1153643" y="2668071"/>
+            <a:ext cx="1868400" cy="219900"/>
           </a:xfrm>
           <a:prstGeom prst="rect">
             <a:avLst/>
@@ -13592,8 +13588,8 @@
         </p:nvSpPr>
         <p:spPr>
           <a:xfrm>
-            <a:off x="2800000" y="2688071"/>
-            <a:ext cx="813600" cy="170100"/>
+            <a:off x="3114196" y="2688071"/>
+            <a:ext cx="938400" cy="170100"/>
           </a:xfrm>
           <a:prstGeom prst="rect">
             <a:avLst/>
@@ -13646,8 +13642,8 @@
         </p:nvSpPr>
         <p:spPr>
           <a:xfrm>
-            <a:off x="3663476" y="2668071"/>
-            <a:ext cx="600000" cy="219900"/>
+            <a:off x="4110013" y="2668071"/>
+            <a:ext cx="692100" cy="219900"/>
           </a:xfrm>
           <a:prstGeom prst="rect">
             <a:avLst/>
@@ -13704,8 +13700,8 @@
         </p:nvSpPr>
         <p:spPr>
           <a:xfrm>
-            <a:off x="1100000" y="2948071"/>
-            <a:ext cx="1620000" cy="219900"/>
+            <a:off x="1153643" y="2948071"/>
+            <a:ext cx="1868400" cy="219900"/>
           </a:xfrm>
           <a:prstGeom prst="rect">
             <a:avLst/>
@@ -13762,8 +13758,8 @@
         </p:nvSpPr>
         <p:spPr>
           <a:xfrm>
-            <a:off x="2800000" y="2968071"/>
-            <a:ext cx="669900" cy="170100"/>
+            <a:off x="3114196" y="2968071"/>
+            <a:ext cx="772500" cy="170100"/>
           </a:xfrm>
           <a:prstGeom prst="rect">
             <a:avLst/>
@@ -13816,8 +13812,8 @@
         </p:nvSpPr>
         <p:spPr>
           <a:xfrm>
-            <a:off x="3519921" y="2948071"/>
-            <a:ext cx="600000" cy="219900"/>
+            <a:off x="3944456" y="2948071"/>
+            <a:ext cx="692100" cy="219900"/>
           </a:xfrm>
           <a:prstGeom prst="rect">
             <a:avLst/>
@@ -13874,8 +13870,8 @@
         </p:nvSpPr>
         <p:spPr>
           <a:xfrm>
-            <a:off x="1100000" y="3228071"/>
-            <a:ext cx="1620000" cy="219900"/>
+            <a:off x="1153643" y="3228071"/>
+            <a:ext cx="1868400" cy="219900"/>
           </a:xfrm>
           <a:prstGeom prst="rect">
             <a:avLst/>
@@ -13932,8 +13928,8 @@
         </p:nvSpPr>
         <p:spPr>
           <a:xfrm>
-            <a:off x="2800000" y="3248071"/>
-            <a:ext cx="3500100" cy="170100"/>
+            <a:off x="3114196" y="3248071"/>
+            <a:ext cx="4036500" cy="170100"/>
           </a:xfrm>
           <a:prstGeom prst="rect">
             <a:avLst/>
@@ -13986,8 +13982,8 @@
         </p:nvSpPr>
         <p:spPr>
           <a:xfrm>
-            <a:off x="6350000" y="3228071"/>
-            <a:ext cx="600000" cy="219900"/>
+            <a:off x="7208290" y="3228071"/>
+            <a:ext cx="692100" cy="219900"/>
           </a:xfrm>
           <a:prstGeom prst="rect">
             <a:avLst/>
@@ -14045,7 +14041,7 @@
         <p:spPr>
           <a:xfrm>
             <a:off x="750000" y="3598071"/>
-            <a:ext cx="5949900" cy="600000"/>
+            <a:ext cx="6861900" cy="600000"/>
           </a:xfrm>
           <a:prstGeom prst="roundRect">
             <a:avLst>
@@ -14100,8 +14096,8 @@
         </p:nvSpPr>
         <p:spPr>
           <a:xfrm>
-            <a:off x="900000" y="3668071"/>
-            <a:ext cx="5649900" cy="480000"/>
+            <a:off x="922990" y="3668071"/>
+            <a:ext cx="6515700" cy="480000"/>
           </a:xfrm>
           <a:prstGeom prst="rect">
             <a:avLst/>
@@ -14171,7 +14167,7 @@
         <p:spPr>
           <a:xfrm>
             <a:off x="750000" y="4400000"/>
-            <a:ext cx="5950000" cy="250000"/>
+            <a:ext cx="6861900" cy="249900"/>
           </a:xfrm>
           <a:prstGeom prst="rect">
             <a:avLst/>
@@ -14228,8 +14224,8 @@
         </p:nvSpPr>
         <p:spPr>
           <a:xfrm>
-            <a:off x="750005" y="905100"/>
-            <a:ext cx="1500000" cy="54900"/>
+            <a:off x="750006" y="905100"/>
+            <a:ext cx="1729800" cy="54900"/>
           </a:xfrm>
           <a:prstGeom prst="rect">
             <a:avLst/>
@@ -14383,7 +14379,7 @@
         <p:spPr>
           <a:xfrm>
             <a:off x="750000" y="1330000"/>
-            <a:ext cx="5949900" cy="399900"/>
+            <a:ext cx="7145400" cy="399900"/>
           </a:xfrm>
           <a:prstGeom prst="rect">
             <a:avLst/>
@@ -14441,7 +14437,7 @@
         <p:spPr>
           <a:xfrm>
             <a:off x="750000" y="1750000"/>
-            <a:ext cx="2900100" cy="2199900"/>
+            <a:ext cx="3482700" cy="2199900"/>
           </a:xfrm>
           <a:prstGeom prst="roundRect">
             <a:avLst>
@@ -14496,8 +14492,8 @@
         </p:nvSpPr>
         <p:spPr>
           <a:xfrm>
-            <a:off x="900000" y="1880000"/>
-            <a:ext cx="2600100" cy="300000"/>
+            <a:off x="930141" y="1880000"/>
+            <a:ext cx="3122700" cy="300000"/>
           </a:xfrm>
           <a:prstGeom prst="rect">
             <a:avLst/>
@@ -14554,8 +14550,8 @@
         </p:nvSpPr>
         <p:spPr>
           <a:xfrm>
-            <a:off x="900000" y="2220000"/>
-            <a:ext cx="2600100" cy="399900"/>
+            <a:off x="930141" y="2220000"/>
+            <a:ext cx="3122700" cy="399900"/>
           </a:xfrm>
           <a:prstGeom prst="rect">
             <a:avLst/>
@@ -14612,8 +14608,8 @@
         </p:nvSpPr>
         <p:spPr>
           <a:xfrm>
-            <a:off x="900000" y="2720000"/>
-            <a:ext cx="2600100" cy="1200000"/>
+            <a:off x="930141" y="2720000"/>
+            <a:ext cx="3122700" cy="1200000"/>
           </a:xfrm>
           <a:prstGeom prst="rect">
             <a:avLst/>
@@ -14734,8 +14730,8 @@
         </p:nvSpPr>
         <p:spPr>
           <a:xfrm>
-            <a:off x="3800000" y="1750000"/>
-            <a:ext cx="2900100" cy="2199900"/>
+            <a:off x="4412860" y="1750000"/>
+            <a:ext cx="3482700" cy="2199900"/>
           </a:xfrm>
           <a:prstGeom prst="roundRect">
             <a:avLst>
@@ -14790,8 +14786,8 @@
         </p:nvSpPr>
         <p:spPr>
           <a:xfrm>
-            <a:off x="3950000" y="1880000"/>
-            <a:ext cx="2600100" cy="300000"/>
+            <a:off x="4593001" y="1880000"/>
+            <a:ext cx="3122700" cy="300000"/>
           </a:xfrm>
           <a:prstGeom prst="rect">
             <a:avLst/>
@@ -14848,8 +14844,8 @@
         </p:nvSpPr>
         <p:spPr>
           <a:xfrm>
-            <a:off x="3950000" y="2220000"/>
-            <a:ext cx="2600100" cy="399900"/>
+            <a:off x="4593001" y="2220000"/>
+            <a:ext cx="3122700" cy="399900"/>
           </a:xfrm>
           <a:prstGeom prst="rect">
             <a:avLst/>
@@ -14906,8 +14902,8 @@
         </p:nvSpPr>
         <p:spPr>
           <a:xfrm>
-            <a:off x="3950000" y="2720000"/>
-            <a:ext cx="2600100" cy="1200000"/>
+            <a:off x="4593001" y="2720000"/>
+            <a:ext cx="3122700" cy="1200000"/>
           </a:xfrm>
           <a:prstGeom prst="rect">
             <a:avLst/>
@@ -15029,7 +15025,7 @@
         <p:spPr>
           <a:xfrm>
             <a:off x="750000" y="4080000"/>
-            <a:ext cx="5949900" cy="380100"/>
+            <a:ext cx="7145400" cy="380100"/>
           </a:xfrm>
           <a:prstGeom prst="roundRect">
             <a:avLst>
@@ -15084,8 +15080,8 @@
         </p:nvSpPr>
         <p:spPr>
           <a:xfrm>
-            <a:off x="900000" y="4090000"/>
-            <a:ext cx="5649900" cy="360000"/>
+            <a:off x="930141" y="4090000"/>
+            <a:ext cx="6785100" cy="360000"/>
           </a:xfrm>
           <a:prstGeom prst="rect">
             <a:avLst/>
@@ -15516,7 +15512,7 @@
         <p:spPr>
           <a:xfrm>
             <a:off x="750000" y="500000"/>
-            <a:ext cx="5950000" cy="900000"/>
+            <a:ext cx="7143000" cy="900000"/>
           </a:xfrm>
           <a:prstGeom prst="rect">
             <a:avLst/>
@@ -15574,7 +15570,7 @@
         <p:spPr>
           <a:xfrm>
             <a:off x="750000" y="1330000"/>
-            <a:ext cx="5950000" cy="400000"/>
+            <a:ext cx="7143000" cy="399900"/>
           </a:xfrm>
           <a:prstGeom prst="rect">
             <a:avLst/>
@@ -15632,7 +15628,7 @@
         <p:spPr>
           <a:xfrm>
             <a:off x="750000" y="1750000"/>
-            <a:ext cx="5950000" cy="1100000"/>
+            <a:ext cx="7143000" cy="1100100"/>
           </a:xfrm>
           <a:prstGeom prst="roundRect">
             <a:avLst>
@@ -15687,8 +15683,8 @@
         </p:nvSpPr>
         <p:spPr>
           <a:xfrm>
-            <a:off x="900000" y="1850000"/>
-            <a:ext cx="5650000" cy="350000"/>
+            <a:off x="930075" y="1850000"/>
+            <a:ext cx="6782700" cy="350100"/>
           </a:xfrm>
           <a:prstGeom prst="rect">
             <a:avLst/>
@@ -15745,8 +15741,8 @@
         </p:nvSpPr>
         <p:spPr>
           <a:xfrm>
-            <a:off x="900000" y="2200000"/>
-            <a:ext cx="5650000" cy="600000"/>
+            <a:off x="930075" y="2200000"/>
+            <a:ext cx="6782700" cy="600000"/>
           </a:xfrm>
           <a:prstGeom prst="rect">
             <a:avLst/>
@@ -15804,7 +15800,7 @@
         <p:spPr>
           <a:xfrm>
             <a:off x="750000" y="3050000"/>
-            <a:ext cx="5950000" cy="300000"/>
+            <a:ext cx="7143000" cy="300000"/>
           </a:xfrm>
           <a:prstGeom prst="rect">
             <a:avLst/>
@@ -15862,7 +15858,7 @@
         <p:spPr>
           <a:xfrm>
             <a:off x="750000" y="3450000"/>
-            <a:ext cx="5950000" cy="1100000"/>
+            <a:ext cx="7143000" cy="1100100"/>
           </a:xfrm>
           <a:prstGeom prst="rect">
             <a:avLst/>
@@ -15984,7 +15980,7 @@
         <p:spPr>
           <a:xfrm>
             <a:off x="750000" y="4400000"/>
-            <a:ext cx="5950000" cy="250000"/>
+            <a:ext cx="7143000" cy="249900"/>
           </a:xfrm>
           <a:prstGeom prst="rect">
             <a:avLst/>
@@ -16041,8 +16037,8 @@
         </p:nvSpPr>
         <p:spPr>
           <a:xfrm>
-            <a:off x="750005" y="905100"/>
-            <a:ext cx="1500000" cy="54900"/>
+            <a:off x="750006" y="905100"/>
+            <a:ext cx="1800600" cy="54900"/>
           </a:xfrm>
           <a:prstGeom prst="rect">
             <a:avLst/>
@@ -16195,8 +16191,8 @@
         </p:nvSpPr>
         <p:spPr>
           <a:xfrm>
-            <a:off x="750000" y="1212390"/>
-            <a:ext cx="5949900" cy="399900"/>
+            <a:off x="750000" y="1212400"/>
+            <a:ext cx="7121700" cy="399900"/>
           </a:xfrm>
           <a:prstGeom prst="rect">
             <a:avLst/>
@@ -16253,8 +16249,8 @@
         </p:nvSpPr>
         <p:spPr>
           <a:xfrm>
-            <a:off x="800000" y="1632390"/>
-            <a:ext cx="480000" cy="480000"/>
+            <a:off x="809848" y="1632399"/>
+            <a:ext cx="574500" cy="480000"/>
           </a:xfrm>
           <a:prstGeom prst="ellipse">
             <a:avLst/>
@@ -16313,8 +16309,8 @@
         </p:nvSpPr>
         <p:spPr>
           <a:xfrm>
-            <a:off x="1400000" y="1682390"/>
-            <a:ext cx="1500000" cy="300000"/>
+            <a:off x="1528021" y="1682399"/>
+            <a:ext cx="1795500" cy="300000"/>
           </a:xfrm>
           <a:prstGeom prst="rect">
             <a:avLst/>
@@ -16371,8 +16367,8 @@
         </p:nvSpPr>
         <p:spPr>
           <a:xfrm>
-            <a:off x="2900000" y="1682390"/>
-            <a:ext cx="3800100" cy="399900"/>
+            <a:off x="3323453" y="1682399"/>
+            <a:ext cx="4548600" cy="399900"/>
           </a:xfrm>
           <a:prstGeom prst="rect">
             <a:avLst/>
@@ -16429,8 +16425,8 @@
         </p:nvSpPr>
         <p:spPr>
           <a:xfrm>
-            <a:off x="800000" y="2162390"/>
-            <a:ext cx="480000" cy="480000"/>
+            <a:off x="809848" y="2162397"/>
+            <a:ext cx="574500" cy="480000"/>
           </a:xfrm>
           <a:prstGeom prst="ellipse">
             <a:avLst/>
@@ -16489,8 +16485,8 @@
         </p:nvSpPr>
         <p:spPr>
           <a:xfrm>
-            <a:off x="1400000" y="2212390"/>
-            <a:ext cx="1500000" cy="300000"/>
+            <a:off x="1528021" y="2212397"/>
+            <a:ext cx="1795500" cy="300000"/>
           </a:xfrm>
           <a:prstGeom prst="rect">
             <a:avLst/>
@@ -16547,8 +16543,8 @@
         </p:nvSpPr>
         <p:spPr>
           <a:xfrm>
-            <a:off x="2900000" y="2212390"/>
-            <a:ext cx="3800100" cy="399900"/>
+            <a:off x="3323453" y="2212397"/>
+            <a:ext cx="4548600" cy="399900"/>
           </a:xfrm>
           <a:prstGeom prst="rect">
             <a:avLst/>
@@ -16605,8 +16601,8 @@
         </p:nvSpPr>
         <p:spPr>
           <a:xfrm>
-            <a:off x="800000" y="2692390"/>
-            <a:ext cx="480000" cy="480000"/>
+            <a:off x="809848" y="2692395"/>
+            <a:ext cx="574500" cy="480000"/>
           </a:xfrm>
           <a:prstGeom prst="ellipse">
             <a:avLst/>
@@ -16665,8 +16661,8 @@
         </p:nvSpPr>
         <p:spPr>
           <a:xfrm>
-            <a:off x="1400000" y="2742390"/>
-            <a:ext cx="1500000" cy="300000"/>
+            <a:off x="1528021" y="2742395"/>
+            <a:ext cx="1795500" cy="300000"/>
           </a:xfrm>
           <a:prstGeom prst="rect">
             <a:avLst/>
@@ -16723,8 +16719,8 @@
         </p:nvSpPr>
         <p:spPr>
           <a:xfrm>
-            <a:off x="2900000" y="2742390"/>
-            <a:ext cx="3800100" cy="399900"/>
+            <a:off x="3323453" y="2742395"/>
+            <a:ext cx="4548600" cy="399900"/>
           </a:xfrm>
           <a:prstGeom prst="rect">
             <a:avLst/>
@@ -16781,8 +16777,8 @@
         </p:nvSpPr>
         <p:spPr>
           <a:xfrm>
-            <a:off x="800000" y="3222390"/>
-            <a:ext cx="480000" cy="480000"/>
+            <a:off x="809848" y="3222394"/>
+            <a:ext cx="574500" cy="480000"/>
           </a:xfrm>
           <a:prstGeom prst="ellipse">
             <a:avLst/>
@@ -16841,8 +16837,8 @@
         </p:nvSpPr>
         <p:spPr>
           <a:xfrm>
-            <a:off x="1400000" y="3272390"/>
-            <a:ext cx="1500000" cy="300000"/>
+            <a:off x="1528021" y="3272394"/>
+            <a:ext cx="1795500" cy="300000"/>
           </a:xfrm>
           <a:prstGeom prst="rect">
             <a:avLst/>
@@ -16899,8 +16895,8 @@
         </p:nvSpPr>
         <p:spPr>
           <a:xfrm>
-            <a:off x="2900000" y="3272390"/>
-            <a:ext cx="3800100" cy="399900"/>
+            <a:off x="3323453" y="3272394"/>
+            <a:ext cx="4548600" cy="399900"/>
           </a:xfrm>
           <a:prstGeom prst="rect">
             <a:avLst/>
@@ -16957,8 +16953,8 @@
         </p:nvSpPr>
         <p:spPr>
           <a:xfrm>
-            <a:off x="800000" y="3752389"/>
-            <a:ext cx="480000" cy="480000"/>
+            <a:off x="809848" y="3752392"/>
+            <a:ext cx="574500" cy="480000"/>
           </a:xfrm>
           <a:prstGeom prst="ellipse">
             <a:avLst/>
@@ -17017,8 +17013,8 @@
         </p:nvSpPr>
         <p:spPr>
           <a:xfrm>
-            <a:off x="1400000" y="3802390"/>
-            <a:ext cx="1500000" cy="300000"/>
+            <a:off x="1528021" y="3802392"/>
+            <a:ext cx="1795500" cy="300000"/>
           </a:xfrm>
           <a:prstGeom prst="rect">
             <a:avLst/>
@@ -17075,8 +17071,8 @@
         </p:nvSpPr>
         <p:spPr>
           <a:xfrm>
-            <a:off x="2900000" y="3802390"/>
-            <a:ext cx="3800100" cy="399900"/>
+            <a:off x="3323453" y="3802392"/>
+            <a:ext cx="4548600" cy="399900"/>
           </a:xfrm>
           <a:prstGeom prst="rect">
             <a:avLst/>
@@ -17133,8 +17129,8 @@
         </p:nvSpPr>
         <p:spPr>
           <a:xfrm>
-            <a:off x="750000" y="4400000"/>
-            <a:ext cx="5950000" cy="250000"/>
+            <a:off x="750000" y="4400001"/>
+            <a:ext cx="7122000" cy="249900"/>
           </a:xfrm>
           <a:prstGeom prst="rect">
             <a:avLst/>
@@ -17191,8 +17187,8 @@
         </p:nvSpPr>
         <p:spPr>
           <a:xfrm>
-            <a:off x="750005" y="905100"/>
-            <a:ext cx="1500000" cy="54900"/>
+            <a:off x="749030" y="953307"/>
+            <a:ext cx="1778400" cy="54300"/>
           </a:xfrm>
           <a:prstGeom prst="rect">
             <a:avLst/>
@@ -17288,7 +17284,7 @@
         <p:spPr>
           <a:xfrm>
             <a:off x="750000" y="500000"/>
-            <a:ext cx="5950000" cy="900000"/>
+            <a:ext cx="7157400" cy="900000"/>
           </a:xfrm>
           <a:prstGeom prst="rect">
             <a:avLst/>
@@ -17346,7 +17342,7 @@
         <p:spPr>
           <a:xfrm>
             <a:off x="750000" y="1330000"/>
-            <a:ext cx="5950000" cy="400000"/>
+            <a:ext cx="7157400" cy="399900"/>
           </a:xfrm>
           <a:prstGeom prst="rect">
             <a:avLst/>
@@ -17404,7 +17400,7 @@
         <p:spPr>
           <a:xfrm>
             <a:off x="750000" y="1750000"/>
-            <a:ext cx="420000" cy="420000"/>
+            <a:ext cx="505200" cy="420000"/>
           </a:xfrm>
           <a:prstGeom prst="ellipse">
             <a:avLst/>
@@ -17442,7 +17438,7 @@
             <a:r>
               <a:rPr b="1" i="0" lang="en-US" sz="1600" u="none" cap="none" strike="noStrike">
                 <a:solidFill>
-                  <a:srgbClr val="E8A317"/>
+                  <a:schemeClr val="lt1"/>
                 </a:solidFill>
                 <a:latin typeface="Arial Black"/>
                 <a:ea typeface="Arial Black"/>
@@ -17451,7 +17447,11 @@
               </a:rPr>
               <a:t>1</a:t>
             </a:r>
-            <a:endParaRPr/>
+            <a:endParaRPr>
+              <a:solidFill>
+                <a:schemeClr val="lt1"/>
+              </a:solidFill>
+            </a:endParaRPr>
           </a:p>
         </p:txBody>
       </p:sp>
@@ -17463,8 +17463,8 @@
         </p:nvSpPr>
         <p:spPr>
           <a:xfrm>
-            <a:off x="1270000" y="1810000"/>
-            <a:ext cx="2400000" cy="400000"/>
+            <a:off x="1375529" y="1810000"/>
+            <a:ext cx="2887200" cy="399900"/>
           </a:xfrm>
           <a:prstGeom prst="rect">
             <a:avLst/>
@@ -17521,8 +17521,8 @@
         </p:nvSpPr>
         <p:spPr>
           <a:xfrm>
-            <a:off x="3750000" y="1750000"/>
-            <a:ext cx="420000" cy="420000"/>
+            <a:off x="4358824" y="1750000"/>
+            <a:ext cx="505200" cy="420000"/>
           </a:xfrm>
           <a:prstGeom prst="ellipse">
             <a:avLst/>
@@ -17560,7 +17560,7 @@
             <a:r>
               <a:rPr b="1" i="0" lang="en-US" sz="1600" u="none" cap="none" strike="noStrike">
                 <a:solidFill>
-                  <a:srgbClr val="E8A317"/>
+                  <a:schemeClr val="lt1"/>
                 </a:solidFill>
                 <a:latin typeface="Arial Black"/>
                 <a:ea typeface="Arial Black"/>
@@ -17569,7 +17569,11 @@
               </a:rPr>
               <a:t>2</a:t>
             </a:r>
-            <a:endParaRPr/>
+            <a:endParaRPr>
+              <a:solidFill>
+                <a:schemeClr val="lt1"/>
+              </a:solidFill>
+            </a:endParaRPr>
           </a:p>
         </p:txBody>
       </p:sp>
@@ -17581,8 +17585,8 @@
         </p:nvSpPr>
         <p:spPr>
           <a:xfrm>
-            <a:off x="4270000" y="1810000"/>
-            <a:ext cx="2400000" cy="400000"/>
+            <a:off x="4984353" y="1810000"/>
+            <a:ext cx="2887200" cy="399900"/>
           </a:xfrm>
           <a:prstGeom prst="rect">
             <a:avLst/>
@@ -17640,7 +17644,7 @@
         <p:spPr>
           <a:xfrm>
             <a:off x="750000" y="2350000"/>
-            <a:ext cx="420000" cy="420000"/>
+            <a:ext cx="505200" cy="420000"/>
           </a:xfrm>
           <a:prstGeom prst="ellipse">
             <a:avLst/>
@@ -17678,7 +17682,7 @@
             <a:r>
               <a:rPr b="1" i="0" lang="en-US" sz="1600" u="none" cap="none" strike="noStrike">
                 <a:solidFill>
-                  <a:srgbClr val="E8A317"/>
+                  <a:schemeClr val="lt1"/>
                 </a:solidFill>
                 <a:latin typeface="Arial Black"/>
                 <a:ea typeface="Arial Black"/>
@@ -17687,7 +17691,11 @@
               </a:rPr>
               <a:t>3</a:t>
             </a:r>
-            <a:endParaRPr/>
+            <a:endParaRPr>
+              <a:solidFill>
+                <a:schemeClr val="lt1"/>
+              </a:solidFill>
+            </a:endParaRPr>
           </a:p>
         </p:txBody>
       </p:sp>
@@ -17699,8 +17707,8 @@
         </p:nvSpPr>
         <p:spPr>
           <a:xfrm>
-            <a:off x="1270000" y="2410000"/>
-            <a:ext cx="2400000" cy="400000"/>
+            <a:off x="1375529" y="2410000"/>
+            <a:ext cx="2887200" cy="399900"/>
           </a:xfrm>
           <a:prstGeom prst="rect">
             <a:avLst/>
@@ -17757,8 +17765,8 @@
         </p:nvSpPr>
         <p:spPr>
           <a:xfrm>
-            <a:off x="3750000" y="2350000"/>
-            <a:ext cx="420000" cy="420000"/>
+            <a:off x="4358824" y="2350000"/>
+            <a:ext cx="505200" cy="420000"/>
           </a:xfrm>
           <a:prstGeom prst="ellipse">
             <a:avLst/>
@@ -17796,7 +17804,7 @@
             <a:r>
               <a:rPr b="1" i="0" lang="en-US" sz="1600" u="none" cap="none" strike="noStrike">
                 <a:solidFill>
-                  <a:srgbClr val="E8A317"/>
+                  <a:schemeClr val="lt1"/>
                 </a:solidFill>
                 <a:latin typeface="Arial Black"/>
                 <a:ea typeface="Arial Black"/>
@@ -17805,7 +17813,11 @@
               </a:rPr>
               <a:t>4</a:t>
             </a:r>
-            <a:endParaRPr/>
+            <a:endParaRPr>
+              <a:solidFill>
+                <a:schemeClr val="lt1"/>
+              </a:solidFill>
+            </a:endParaRPr>
           </a:p>
         </p:txBody>
       </p:sp>
@@ -17817,8 +17829,8 @@
         </p:nvSpPr>
         <p:spPr>
           <a:xfrm>
-            <a:off x="4270000" y="2410000"/>
-            <a:ext cx="2400000" cy="400000"/>
+            <a:off x="4984353" y="2410000"/>
+            <a:ext cx="2887200" cy="399900"/>
           </a:xfrm>
           <a:prstGeom prst="rect">
             <a:avLst/>
@@ -17876,7 +17888,7 @@
         <p:spPr>
           <a:xfrm>
             <a:off x="750000" y="2950000"/>
-            <a:ext cx="420000" cy="420000"/>
+            <a:ext cx="505200" cy="420000"/>
           </a:xfrm>
           <a:prstGeom prst="ellipse">
             <a:avLst/>
@@ -17914,7 +17926,7 @@
             <a:r>
               <a:rPr b="1" i="0" lang="en-US" sz="1600" u="none" cap="none" strike="noStrike">
                 <a:solidFill>
-                  <a:srgbClr val="E8A317"/>
+                  <a:schemeClr val="lt1"/>
                 </a:solidFill>
                 <a:latin typeface="Arial Black"/>
                 <a:ea typeface="Arial Black"/>
@@ -17923,7 +17935,11 @@
               </a:rPr>
               <a:t>5</a:t>
             </a:r>
-            <a:endParaRPr/>
+            <a:endParaRPr>
+              <a:solidFill>
+                <a:schemeClr val="lt1"/>
+              </a:solidFill>
+            </a:endParaRPr>
           </a:p>
         </p:txBody>
       </p:sp>
@@ -17935,8 +17951,8 @@
         </p:nvSpPr>
         <p:spPr>
           <a:xfrm>
-            <a:off x="1270000" y="3010000"/>
-            <a:ext cx="2400000" cy="400000"/>
+            <a:off x="1375529" y="3010000"/>
+            <a:ext cx="2887200" cy="399900"/>
           </a:xfrm>
           <a:prstGeom prst="rect">
             <a:avLst/>
@@ -17993,8 +18009,8 @@
         </p:nvSpPr>
         <p:spPr>
           <a:xfrm>
-            <a:off x="3750000" y="2950000"/>
-            <a:ext cx="420000" cy="420000"/>
+            <a:off x="4358824" y="2950000"/>
+            <a:ext cx="505200" cy="420000"/>
           </a:xfrm>
           <a:prstGeom prst="ellipse">
             <a:avLst/>
@@ -18032,7 +18048,7 @@
             <a:r>
               <a:rPr b="1" i="0" lang="en-US" sz="1600" u="none" cap="none" strike="noStrike">
                 <a:solidFill>
-                  <a:srgbClr val="E8A317"/>
+                  <a:schemeClr val="lt1"/>
                 </a:solidFill>
                 <a:latin typeface="Arial Black"/>
                 <a:ea typeface="Arial Black"/>
@@ -18041,7 +18057,11 @@
               </a:rPr>
               <a:t>6</a:t>
             </a:r>
-            <a:endParaRPr/>
+            <a:endParaRPr>
+              <a:solidFill>
+                <a:schemeClr val="lt1"/>
+              </a:solidFill>
+            </a:endParaRPr>
           </a:p>
         </p:txBody>
       </p:sp>
@@ -18053,8 +18073,8 @@
         </p:nvSpPr>
         <p:spPr>
           <a:xfrm>
-            <a:off x="4270000" y="3010000"/>
-            <a:ext cx="2400000" cy="400000"/>
+            <a:off x="4984353" y="3010000"/>
+            <a:ext cx="2887200" cy="399900"/>
           </a:xfrm>
           <a:prstGeom prst="rect">
             <a:avLst/>
@@ -18112,7 +18132,7 @@
         <p:spPr>
           <a:xfrm>
             <a:off x="750000" y="3550000"/>
-            <a:ext cx="420000" cy="420000"/>
+            <a:ext cx="505200" cy="420000"/>
           </a:xfrm>
           <a:prstGeom prst="ellipse">
             <a:avLst/>
@@ -18150,7 +18170,7 @@
             <a:r>
               <a:rPr b="1" i="0" lang="en-US" sz="1600" u="none" cap="none" strike="noStrike">
                 <a:solidFill>
-                  <a:srgbClr val="E8A317"/>
+                  <a:schemeClr val="lt1"/>
                 </a:solidFill>
                 <a:latin typeface="Arial Black"/>
                 <a:ea typeface="Arial Black"/>
@@ -18159,7 +18179,11 @@
               </a:rPr>
               <a:t>7</a:t>
             </a:r>
-            <a:endParaRPr/>
+            <a:endParaRPr>
+              <a:solidFill>
+                <a:schemeClr val="lt1"/>
+              </a:solidFill>
+            </a:endParaRPr>
           </a:p>
         </p:txBody>
       </p:sp>
@@ -18171,8 +18195,8 @@
         </p:nvSpPr>
         <p:spPr>
           <a:xfrm>
-            <a:off x="1270000" y="3610000"/>
-            <a:ext cx="2400000" cy="400000"/>
+            <a:off x="1375529" y="3610000"/>
+            <a:ext cx="2887200" cy="399900"/>
           </a:xfrm>
           <a:prstGeom prst="rect">
             <a:avLst/>
@@ -18229,8 +18253,8 @@
         </p:nvSpPr>
         <p:spPr>
           <a:xfrm>
-            <a:off x="3750000" y="3550000"/>
-            <a:ext cx="420000" cy="420000"/>
+            <a:off x="4358824" y="3550000"/>
+            <a:ext cx="505200" cy="420000"/>
           </a:xfrm>
           <a:prstGeom prst="ellipse">
             <a:avLst/>
@@ -18268,7 +18292,7 @@
             <a:r>
               <a:rPr b="1" i="0" lang="en-US" sz="1600" u="none" cap="none" strike="noStrike">
                 <a:solidFill>
-                  <a:srgbClr val="E8A317"/>
+                  <a:schemeClr val="lt1"/>
                 </a:solidFill>
                 <a:latin typeface="Arial Black"/>
                 <a:ea typeface="Arial Black"/>
@@ -18277,7 +18301,11 @@
               </a:rPr>
               <a:t>8</a:t>
             </a:r>
-            <a:endParaRPr/>
+            <a:endParaRPr>
+              <a:solidFill>
+                <a:schemeClr val="lt1"/>
+              </a:solidFill>
+            </a:endParaRPr>
           </a:p>
         </p:txBody>
       </p:sp>
@@ -18289,8 +18317,8 @@
         </p:nvSpPr>
         <p:spPr>
           <a:xfrm>
-            <a:off x="4270000" y="3610000"/>
-            <a:ext cx="2400000" cy="400000"/>
+            <a:off x="4984353" y="3610000"/>
+            <a:ext cx="2887200" cy="399900"/>
           </a:xfrm>
           <a:prstGeom prst="rect">
             <a:avLst/>
@@ -18347,8 +18375,8 @@
         </p:nvSpPr>
         <p:spPr>
           <a:xfrm>
-            <a:off x="750005" y="905100"/>
-            <a:ext cx="1500000" cy="54900"/>
+            <a:off x="750006" y="905100"/>
+            <a:ext cx="1804500" cy="54900"/>
           </a:xfrm>
           <a:prstGeom prst="rect">
             <a:avLst/>
@@ -18444,7 +18472,7 @@
         <p:spPr>
           <a:xfrm>
             <a:off x="750000" y="500000"/>
-            <a:ext cx="5950000" cy="900000"/>
+            <a:ext cx="7150200" cy="900000"/>
           </a:xfrm>
           <a:prstGeom prst="rect">
             <a:avLst/>
@@ -18502,7 +18530,7 @@
         <p:spPr>
           <a:xfrm>
             <a:off x="750000" y="1228071"/>
-            <a:ext cx="5949900" cy="427200"/>
+            <a:ext cx="7150200" cy="427200"/>
           </a:xfrm>
           <a:prstGeom prst="rect">
             <a:avLst/>
@@ -18560,7 +18588,7 @@
         <p:spPr>
           <a:xfrm>
             <a:off x="750000" y="1676775"/>
-            <a:ext cx="2850000" cy="1068300"/>
+            <a:ext cx="3424800" cy="1068300"/>
           </a:xfrm>
           <a:prstGeom prst="roundRect">
             <a:avLst>
@@ -18621,8 +18649,8 @@
         </p:nvSpPr>
         <p:spPr>
           <a:xfrm>
-            <a:off x="900000" y="1815660"/>
-            <a:ext cx="2550000" cy="320400"/>
+            <a:off x="930258" y="1815660"/>
+            <a:ext cx="3064500" cy="320400"/>
           </a:xfrm>
           <a:prstGeom prst="rect">
             <a:avLst/>
@@ -18679,8 +18707,8 @@
         </p:nvSpPr>
         <p:spPr>
           <a:xfrm>
-            <a:off x="900000" y="2168213"/>
-            <a:ext cx="2550000" cy="555600"/>
+            <a:off x="930258" y="2168213"/>
+            <a:ext cx="3064500" cy="555600"/>
           </a:xfrm>
           <a:prstGeom prst="rect">
             <a:avLst/>
@@ -18737,8 +18765,8 @@
         </p:nvSpPr>
         <p:spPr>
           <a:xfrm>
-            <a:off x="3750000" y="1676775"/>
-            <a:ext cx="2850000" cy="1068300"/>
+            <a:off x="4355168" y="1676775"/>
+            <a:ext cx="3424800" cy="1068300"/>
           </a:xfrm>
           <a:prstGeom prst="roundRect">
             <a:avLst>
@@ -18799,8 +18827,8 @@
         </p:nvSpPr>
         <p:spPr>
           <a:xfrm>
-            <a:off x="3900000" y="1815660"/>
-            <a:ext cx="2550000" cy="320400"/>
+            <a:off x="4535426" y="1815660"/>
+            <a:ext cx="3064500" cy="320400"/>
           </a:xfrm>
           <a:prstGeom prst="rect">
             <a:avLst/>
@@ -18857,8 +18885,8 @@
         </p:nvSpPr>
         <p:spPr>
           <a:xfrm>
-            <a:off x="3900000" y="2168213"/>
-            <a:ext cx="2550000" cy="555600"/>
+            <a:off x="4535426" y="2168213"/>
+            <a:ext cx="3064500" cy="555600"/>
           </a:xfrm>
           <a:prstGeom prst="rect">
             <a:avLst/>
@@ -18916,7 +18944,7 @@
         <p:spPr>
           <a:xfrm>
             <a:off x="750000" y="2851953"/>
-            <a:ext cx="2850000" cy="1068300"/>
+            <a:ext cx="3424800" cy="1068300"/>
           </a:xfrm>
           <a:prstGeom prst="roundRect">
             <a:avLst>
@@ -18977,8 +19005,8 @@
         </p:nvSpPr>
         <p:spPr>
           <a:xfrm>
-            <a:off x="900000" y="2990837"/>
-            <a:ext cx="2550000" cy="320400"/>
+            <a:off x="930258" y="2990837"/>
+            <a:ext cx="3064500" cy="320400"/>
           </a:xfrm>
           <a:prstGeom prst="rect">
             <a:avLst/>
@@ -19035,8 +19063,8 @@
         </p:nvSpPr>
         <p:spPr>
           <a:xfrm>
-            <a:off x="900000" y="3343391"/>
-            <a:ext cx="2550000" cy="555600"/>
+            <a:off x="930258" y="3343391"/>
+            <a:ext cx="3064500" cy="555600"/>
           </a:xfrm>
           <a:prstGeom prst="rect">
             <a:avLst/>
@@ -19093,8 +19121,8 @@
         </p:nvSpPr>
         <p:spPr>
           <a:xfrm>
-            <a:off x="3750000" y="2851953"/>
-            <a:ext cx="2850000" cy="1068300"/>
+            <a:off x="4355168" y="2851953"/>
+            <a:ext cx="3424800" cy="1068300"/>
           </a:xfrm>
           <a:prstGeom prst="roundRect">
             <a:avLst>
@@ -19155,8 +19183,8 @@
         </p:nvSpPr>
         <p:spPr>
           <a:xfrm>
-            <a:off x="3900000" y="2990837"/>
-            <a:ext cx="2550000" cy="320400"/>
+            <a:off x="4535426" y="2990837"/>
+            <a:ext cx="3064500" cy="320400"/>
           </a:xfrm>
           <a:prstGeom prst="rect">
             <a:avLst/>
@@ -19213,8 +19241,8 @@
         </p:nvSpPr>
         <p:spPr>
           <a:xfrm>
-            <a:off x="3900000" y="3343391"/>
-            <a:ext cx="2550000" cy="555600"/>
+            <a:off x="4535426" y="3343391"/>
+            <a:ext cx="3064500" cy="555600"/>
           </a:xfrm>
           <a:prstGeom prst="rect">
             <a:avLst/>
@@ -19272,7 +19300,7 @@
         <p:spPr>
           <a:xfrm>
             <a:off x="750000" y="4400000"/>
-            <a:ext cx="5950000" cy="250000"/>
+            <a:ext cx="7150200" cy="249900"/>
           </a:xfrm>
           <a:prstGeom prst="rect">
             <a:avLst/>
@@ -19329,8 +19357,8 @@
         </p:nvSpPr>
         <p:spPr>
           <a:xfrm>
-            <a:off x="750005" y="905100"/>
-            <a:ext cx="1500000" cy="54900"/>
+            <a:off x="750006" y="905100"/>
+            <a:ext cx="1802700" cy="54900"/>
           </a:xfrm>
           <a:prstGeom prst="rect">
             <a:avLst/>
@@ -19691,7 +19719,7 @@
         <p:spPr>
           <a:xfrm>
             <a:off x="750000" y="500000"/>
-            <a:ext cx="5950000" cy="900000"/>
+            <a:ext cx="7172100" cy="900000"/>
           </a:xfrm>
           <a:prstGeom prst="rect">
             <a:avLst/>
@@ -19749,7 +19777,7 @@
         <p:spPr>
           <a:xfrm>
             <a:off x="750000" y="1330000"/>
-            <a:ext cx="5950000" cy="400000"/>
+            <a:ext cx="7172100" cy="399900"/>
           </a:xfrm>
           <a:prstGeom prst="rect">
             <a:avLst/>
@@ -19807,7 +19835,7 @@
         <p:spPr>
           <a:xfrm>
             <a:off x="750000" y="1800000"/>
-            <a:ext cx="2500000" cy="1800000"/>
+            <a:ext cx="3013500" cy="1800000"/>
           </a:xfrm>
           <a:prstGeom prst="roundRect">
             <a:avLst>
@@ -19862,8 +19890,8 @@
         </p:nvSpPr>
         <p:spPr>
           <a:xfrm>
-            <a:off x="850000" y="1930000"/>
-            <a:ext cx="2300000" cy="300000"/>
+            <a:off x="870540" y="1930000"/>
+            <a:ext cx="2772600" cy="300000"/>
           </a:xfrm>
           <a:prstGeom prst="rect">
             <a:avLst/>
@@ -19920,8 +19948,8 @@
         </p:nvSpPr>
         <p:spPr>
           <a:xfrm>
-            <a:off x="850000" y="2280000"/>
-            <a:ext cx="2300000" cy="900000"/>
+            <a:off x="870540" y="2280000"/>
+            <a:ext cx="2772600" cy="900000"/>
           </a:xfrm>
           <a:prstGeom prst="rect">
             <a:avLst/>
@@ -19978,8 +20006,8 @@
         </p:nvSpPr>
         <p:spPr>
           <a:xfrm>
-            <a:off x="850000" y="3250000"/>
-            <a:ext cx="2300000" cy="300000"/>
+            <a:off x="870540" y="3250000"/>
+            <a:ext cx="2772600" cy="300000"/>
           </a:xfrm>
           <a:prstGeom prst="rect">
             <a:avLst/>
@@ -20036,8 +20064,8 @@
         </p:nvSpPr>
         <p:spPr>
           <a:xfrm>
-            <a:off x="3225000" y="2280000"/>
-            <a:ext cx="900000" cy="399900"/>
+            <a:off x="3733361" y="2280000"/>
+            <a:ext cx="1084800" cy="399900"/>
           </a:xfrm>
           <a:prstGeom prst="rect">
             <a:avLst/>
@@ -20094,8 +20122,8 @@
         </p:nvSpPr>
         <p:spPr>
           <a:xfrm>
-            <a:off x="4200000" y="1800000"/>
-            <a:ext cx="2500000" cy="1800000"/>
+            <a:off x="4908625" y="1800000"/>
+            <a:ext cx="3013500" cy="1800000"/>
           </a:xfrm>
           <a:prstGeom prst="roundRect">
             <a:avLst>
@@ -20150,8 +20178,8 @@
         </p:nvSpPr>
         <p:spPr>
           <a:xfrm>
-            <a:off x="4300000" y="1930000"/>
-            <a:ext cx="2300000" cy="300000"/>
+            <a:off x="5029164" y="1930000"/>
+            <a:ext cx="2772600" cy="300000"/>
           </a:xfrm>
           <a:prstGeom prst="rect">
             <a:avLst/>
@@ -20208,8 +20236,8 @@
         </p:nvSpPr>
         <p:spPr>
           <a:xfrm>
-            <a:off x="4300000" y="2280000"/>
-            <a:ext cx="2300000" cy="900000"/>
+            <a:off x="5029164" y="2280000"/>
+            <a:ext cx="2772600" cy="900000"/>
           </a:xfrm>
           <a:prstGeom prst="rect">
             <a:avLst/>
@@ -20266,8 +20294,8 @@
         </p:nvSpPr>
         <p:spPr>
           <a:xfrm>
-            <a:off x="4300000" y="3250000"/>
-            <a:ext cx="2300000" cy="300000"/>
+            <a:off x="5029164" y="3250000"/>
+            <a:ext cx="2772600" cy="300000"/>
           </a:xfrm>
           <a:prstGeom prst="rect">
             <a:avLst/>
@@ -20325,7 +20353,7 @@
         <p:spPr>
           <a:xfrm>
             <a:off x="750000" y="3800000"/>
-            <a:ext cx="5950000" cy="400000"/>
+            <a:ext cx="7172100" cy="399900"/>
           </a:xfrm>
           <a:prstGeom prst="rect">
             <a:avLst/>
@@ -20382,8 +20410,8 @@
         </p:nvSpPr>
         <p:spPr>
           <a:xfrm>
-            <a:off x="750005" y="905100"/>
-            <a:ext cx="1500000" cy="54900"/>
+            <a:off x="750006" y="905100"/>
+            <a:ext cx="1808100" cy="54900"/>
           </a:xfrm>
           <a:prstGeom prst="rect">
             <a:avLst/>
@@ -20479,7 +20507,7 @@
         <p:spPr>
           <a:xfrm>
             <a:off x="750000" y="500000"/>
-            <a:ext cx="5950000" cy="900000"/>
+            <a:ext cx="7150200" cy="900000"/>
           </a:xfrm>
           <a:prstGeom prst="rect">
             <a:avLst/>
@@ -20537,7 +20565,7 @@
         <p:spPr>
           <a:xfrm>
             <a:off x="750000" y="1282956"/>
-            <a:ext cx="5949900" cy="399900"/>
+            <a:ext cx="7149900" cy="399900"/>
           </a:xfrm>
           <a:prstGeom prst="rect">
             <a:avLst/>
@@ -20594,8 +20622,8 @@
         </p:nvSpPr>
         <p:spPr>
           <a:xfrm>
-            <a:off x="790000" y="1732956"/>
-            <a:ext cx="159900" cy="159900"/>
+            <a:off x="798068" y="1732956"/>
+            <a:ext cx="192300" cy="159900"/>
           </a:xfrm>
           <a:prstGeom prst="ellipse">
             <a:avLst/>
@@ -20648,8 +20676,8 @@
         </p:nvSpPr>
         <p:spPr>
           <a:xfrm>
-            <a:off x="1060000" y="1702956"/>
-            <a:ext cx="1700100" cy="300000"/>
+            <a:off x="1122528" y="1702956"/>
+            <a:ext cx="2043000" cy="300000"/>
           </a:xfrm>
           <a:prstGeom prst="rect">
             <a:avLst/>
@@ -20706,8 +20734,8 @@
         </p:nvSpPr>
         <p:spPr>
           <a:xfrm>
-            <a:off x="2900000" y="1702956"/>
-            <a:ext cx="3800100" cy="500100"/>
+            <a:off x="3333660" y="1702956"/>
+            <a:ext cx="4566600" cy="500100"/>
           </a:xfrm>
           <a:prstGeom prst="rect">
             <a:avLst/>
@@ -20764,8 +20792,8 @@
         </p:nvSpPr>
         <p:spPr>
           <a:xfrm>
-            <a:off x="790000" y="2232956"/>
-            <a:ext cx="159900" cy="159900"/>
+            <a:off x="798068" y="2232956"/>
+            <a:ext cx="192300" cy="159900"/>
           </a:xfrm>
           <a:prstGeom prst="ellipse">
             <a:avLst/>
@@ -20818,8 +20846,8 @@
         </p:nvSpPr>
         <p:spPr>
           <a:xfrm>
-            <a:off x="1060000" y="2202956"/>
-            <a:ext cx="1700100" cy="300000"/>
+            <a:off x="1122528" y="2202956"/>
+            <a:ext cx="2043000" cy="300000"/>
           </a:xfrm>
           <a:prstGeom prst="rect">
             <a:avLst/>
@@ -20876,8 +20904,8 @@
         </p:nvSpPr>
         <p:spPr>
           <a:xfrm>
-            <a:off x="2900000" y="2202956"/>
-            <a:ext cx="3800100" cy="500100"/>
+            <a:off x="3333660" y="2202956"/>
+            <a:ext cx="4566600" cy="500100"/>
           </a:xfrm>
           <a:prstGeom prst="rect">
             <a:avLst/>
@@ -20934,8 +20962,8 @@
         </p:nvSpPr>
         <p:spPr>
           <a:xfrm>
-            <a:off x="790000" y="2732956"/>
-            <a:ext cx="159900" cy="159900"/>
+            <a:off x="798068" y="2732956"/>
+            <a:ext cx="192300" cy="159900"/>
           </a:xfrm>
           <a:prstGeom prst="ellipse">
             <a:avLst/>
@@ -20988,8 +21016,8 @@
         </p:nvSpPr>
         <p:spPr>
           <a:xfrm>
-            <a:off x="1060000" y="2702956"/>
-            <a:ext cx="1700100" cy="300000"/>
+            <a:off x="1122528" y="2702956"/>
+            <a:ext cx="2043000" cy="300000"/>
           </a:xfrm>
           <a:prstGeom prst="rect">
             <a:avLst/>
@@ -21046,8 +21074,8 @@
         </p:nvSpPr>
         <p:spPr>
           <a:xfrm>
-            <a:off x="2900000" y="2702956"/>
-            <a:ext cx="3800100" cy="500100"/>
+            <a:off x="3333660" y="2702956"/>
+            <a:ext cx="4566600" cy="500100"/>
           </a:xfrm>
           <a:prstGeom prst="rect">
             <a:avLst/>
@@ -21104,8 +21132,8 @@
         </p:nvSpPr>
         <p:spPr>
           <a:xfrm>
-            <a:off x="790000" y="3232956"/>
-            <a:ext cx="159900" cy="159900"/>
+            <a:off x="798068" y="3232956"/>
+            <a:ext cx="192300" cy="159900"/>
           </a:xfrm>
           <a:prstGeom prst="ellipse">
             <a:avLst/>
@@ -21158,8 +21186,8 @@
         </p:nvSpPr>
         <p:spPr>
           <a:xfrm>
-            <a:off x="1060000" y="3202956"/>
-            <a:ext cx="1700100" cy="300000"/>
+            <a:off x="1122528" y="3202956"/>
+            <a:ext cx="2043000" cy="300000"/>
           </a:xfrm>
           <a:prstGeom prst="rect">
             <a:avLst/>
@@ -21216,8 +21244,8 @@
         </p:nvSpPr>
         <p:spPr>
           <a:xfrm>
-            <a:off x="2900000" y="3202956"/>
-            <a:ext cx="3800100" cy="500100"/>
+            <a:off x="3333660" y="3202956"/>
+            <a:ext cx="4566600" cy="500100"/>
           </a:xfrm>
           <a:prstGeom prst="rect">
             <a:avLst/>
@@ -21274,8 +21302,8 @@
         </p:nvSpPr>
         <p:spPr>
           <a:xfrm>
-            <a:off x="790000" y="3732956"/>
-            <a:ext cx="159900" cy="159900"/>
+            <a:off x="798068" y="3732956"/>
+            <a:ext cx="192300" cy="159900"/>
           </a:xfrm>
           <a:prstGeom prst="ellipse">
             <a:avLst/>
@@ -21328,8 +21356,8 @@
         </p:nvSpPr>
         <p:spPr>
           <a:xfrm>
-            <a:off x="1060000" y="3702956"/>
-            <a:ext cx="1700100" cy="300000"/>
+            <a:off x="1122528" y="3702956"/>
+            <a:ext cx="2043000" cy="300000"/>
           </a:xfrm>
           <a:prstGeom prst="rect">
             <a:avLst/>
@@ -21386,8 +21414,8 @@
         </p:nvSpPr>
         <p:spPr>
           <a:xfrm>
-            <a:off x="2900000" y="3702956"/>
-            <a:ext cx="3800100" cy="500100"/>
+            <a:off x="3333660" y="3702956"/>
+            <a:ext cx="4566600" cy="500100"/>
           </a:xfrm>
           <a:prstGeom prst="rect">
             <a:avLst/>
@@ -21445,7 +21473,7 @@
         <p:spPr>
           <a:xfrm>
             <a:off x="750000" y="4400000"/>
-            <a:ext cx="5950000" cy="250000"/>
+            <a:ext cx="7150200" cy="249900"/>
           </a:xfrm>
           <a:prstGeom prst="rect">
             <a:avLst/>
@@ -21502,8 +21530,8 @@
         </p:nvSpPr>
         <p:spPr>
           <a:xfrm>
-            <a:off x="750005" y="905100"/>
-            <a:ext cx="1500000" cy="54900"/>
+            <a:off x="750006" y="905100"/>
+            <a:ext cx="1802700" cy="54900"/>
           </a:xfrm>
           <a:prstGeom prst="rect">
             <a:avLst/>
@@ -21599,7 +21627,7 @@
         <p:spPr>
           <a:xfrm>
             <a:off x="750000" y="500000"/>
-            <a:ext cx="5950000" cy="900000"/>
+            <a:ext cx="7164900" cy="900000"/>
           </a:xfrm>
           <a:prstGeom prst="rect">
             <a:avLst/>
@@ -21656,8 +21684,8 @@
         </p:nvSpPr>
         <p:spPr>
           <a:xfrm>
-            <a:off x="750000" y="1220230"/>
-            <a:ext cx="5949900" cy="399900"/>
+            <a:off x="750000" y="1220229"/>
+            <a:ext cx="7164600" cy="399900"/>
           </a:xfrm>
           <a:prstGeom prst="rect">
             <a:avLst/>
@@ -21714,8 +21742,8 @@
         </p:nvSpPr>
         <p:spPr>
           <a:xfrm>
-            <a:off x="750000" y="1640230"/>
-            <a:ext cx="5949900" cy="650100"/>
+            <a:off x="750000" y="1640229"/>
+            <a:ext cx="7164600" cy="650100"/>
           </a:xfrm>
           <a:prstGeom prst="roundRect">
             <a:avLst>
@@ -21770,8 +21798,8 @@
         </p:nvSpPr>
         <p:spPr>
           <a:xfrm>
-            <a:off x="850000" y="1720230"/>
-            <a:ext cx="2400000" cy="300000"/>
+            <a:off x="870416" y="1720229"/>
+            <a:ext cx="2889900" cy="300000"/>
           </a:xfrm>
           <a:prstGeom prst="rect">
             <a:avLst/>
@@ -21828,8 +21856,8 @@
         </p:nvSpPr>
         <p:spPr>
           <a:xfrm>
-            <a:off x="850000" y="1960230"/>
-            <a:ext cx="2400000" cy="320100"/>
+            <a:off x="870416" y="1960228"/>
+            <a:ext cx="2889900" cy="320100"/>
           </a:xfrm>
           <a:prstGeom prst="rect">
             <a:avLst/>
@@ -21886,8 +21914,8 @@
         </p:nvSpPr>
         <p:spPr>
           <a:xfrm>
-            <a:off x="3350000" y="1720230"/>
-            <a:ext cx="3300000" cy="300000"/>
+            <a:off x="3880815" y="1720229"/>
+            <a:ext cx="3973800" cy="300000"/>
           </a:xfrm>
           <a:prstGeom prst="rect">
             <a:avLst/>
@@ -21944,8 +21972,8 @@
         </p:nvSpPr>
         <p:spPr>
           <a:xfrm>
-            <a:off x="3350000" y="1960230"/>
-            <a:ext cx="3300000" cy="380100"/>
+            <a:off x="3880815" y="1960228"/>
+            <a:ext cx="3973800" cy="380100"/>
           </a:xfrm>
           <a:prstGeom prst="rect">
             <a:avLst/>
@@ -22002,8 +22030,8 @@
         </p:nvSpPr>
         <p:spPr>
           <a:xfrm>
-            <a:off x="750000" y="2340230"/>
-            <a:ext cx="5949900" cy="650100"/>
+            <a:off x="750000" y="2340228"/>
+            <a:ext cx="7164600" cy="650100"/>
           </a:xfrm>
           <a:prstGeom prst="roundRect">
             <a:avLst>
@@ -22058,8 +22086,8 @@
         </p:nvSpPr>
         <p:spPr>
           <a:xfrm>
-            <a:off x="850000" y="2420230"/>
-            <a:ext cx="2400000" cy="300000"/>
+            <a:off x="870416" y="2420228"/>
+            <a:ext cx="2889900" cy="300000"/>
           </a:xfrm>
           <a:prstGeom prst="rect">
             <a:avLst/>
@@ -22116,8 +22144,8 @@
         </p:nvSpPr>
         <p:spPr>
           <a:xfrm>
-            <a:off x="850000" y="2660230"/>
-            <a:ext cx="2400000" cy="320100"/>
+            <a:off x="870416" y="2660227"/>
+            <a:ext cx="2889900" cy="320100"/>
           </a:xfrm>
           <a:prstGeom prst="rect">
             <a:avLst/>
@@ -22174,8 +22202,8 @@
         </p:nvSpPr>
         <p:spPr>
           <a:xfrm>
-            <a:off x="3350000" y="2420230"/>
-            <a:ext cx="3300000" cy="300000"/>
+            <a:off x="3880815" y="2420228"/>
+            <a:ext cx="3973800" cy="300000"/>
           </a:xfrm>
           <a:prstGeom prst="rect">
             <a:avLst/>
@@ -22232,8 +22260,8 @@
         </p:nvSpPr>
         <p:spPr>
           <a:xfrm>
-            <a:off x="3350000" y="2660230"/>
-            <a:ext cx="3300000" cy="380100"/>
+            <a:off x="3880815" y="2660227"/>
+            <a:ext cx="3973800" cy="380100"/>
           </a:xfrm>
           <a:prstGeom prst="rect">
             <a:avLst/>
@@ -22290,8 +22318,8 @@
         </p:nvSpPr>
         <p:spPr>
           <a:xfrm>
-            <a:off x="750000" y="3040230"/>
-            <a:ext cx="5949900" cy="650100"/>
+            <a:off x="750000" y="3040227"/>
+            <a:ext cx="7164600" cy="650100"/>
           </a:xfrm>
           <a:prstGeom prst="roundRect">
             <a:avLst>
@@ -22346,8 +22374,8 @@
         </p:nvSpPr>
         <p:spPr>
           <a:xfrm>
-            <a:off x="850000" y="3120230"/>
-            <a:ext cx="2400000" cy="300000"/>
+            <a:off x="870416" y="3120227"/>
+            <a:ext cx="2889900" cy="300000"/>
           </a:xfrm>
           <a:prstGeom prst="rect">
             <a:avLst/>
@@ -22404,8 +22432,8 @@
         </p:nvSpPr>
         <p:spPr>
           <a:xfrm>
-            <a:off x="850000" y="3360230"/>
-            <a:ext cx="2400000" cy="320100"/>
+            <a:off x="870416" y="3360226"/>
+            <a:ext cx="2889900" cy="320100"/>
           </a:xfrm>
           <a:prstGeom prst="rect">
             <a:avLst/>
@@ -22462,8 +22490,8 @@
         </p:nvSpPr>
         <p:spPr>
           <a:xfrm>
-            <a:off x="3350000" y="3120230"/>
-            <a:ext cx="3300000" cy="300000"/>
+            <a:off x="3880815" y="3120227"/>
+            <a:ext cx="3973800" cy="300000"/>
           </a:xfrm>
           <a:prstGeom prst="rect">
             <a:avLst/>
@@ -22520,8 +22548,8 @@
         </p:nvSpPr>
         <p:spPr>
           <a:xfrm>
-            <a:off x="3350000" y="3360230"/>
-            <a:ext cx="3300000" cy="380100"/>
+            <a:off x="3880815" y="3360226"/>
+            <a:ext cx="3973800" cy="380100"/>
           </a:xfrm>
           <a:prstGeom prst="rect">
             <a:avLst/>
@@ -22578,8 +22606,8 @@
         </p:nvSpPr>
         <p:spPr>
           <a:xfrm>
-            <a:off x="750000" y="3740230"/>
-            <a:ext cx="5949900" cy="650100"/>
+            <a:off x="750000" y="3740226"/>
+            <a:ext cx="7164600" cy="650100"/>
           </a:xfrm>
           <a:prstGeom prst="roundRect">
             <a:avLst>
@@ -22634,8 +22662,8 @@
         </p:nvSpPr>
         <p:spPr>
           <a:xfrm>
-            <a:off x="850000" y="3820230"/>
-            <a:ext cx="2400000" cy="300000"/>
+            <a:off x="870416" y="3820226"/>
+            <a:ext cx="2889900" cy="300000"/>
           </a:xfrm>
           <a:prstGeom prst="rect">
             <a:avLst/>
@@ -22692,8 +22720,8 @@
         </p:nvSpPr>
         <p:spPr>
           <a:xfrm>
-            <a:off x="850000" y="4060230"/>
-            <a:ext cx="2400000" cy="320100"/>
+            <a:off x="870416" y="4060226"/>
+            <a:ext cx="2889900" cy="320100"/>
           </a:xfrm>
           <a:prstGeom prst="rect">
             <a:avLst/>
@@ -22750,8 +22778,8 @@
         </p:nvSpPr>
         <p:spPr>
           <a:xfrm>
-            <a:off x="3350000" y="3820230"/>
-            <a:ext cx="3300000" cy="300000"/>
+            <a:off x="3880815" y="3820226"/>
+            <a:ext cx="3973800" cy="300000"/>
           </a:xfrm>
           <a:prstGeom prst="rect">
             <a:avLst/>
@@ -22808,8 +22836,8 @@
         </p:nvSpPr>
         <p:spPr>
           <a:xfrm>
-            <a:off x="3350000" y="4060230"/>
-            <a:ext cx="3300000" cy="380100"/>
+            <a:off x="3880815" y="4060226"/>
+            <a:ext cx="3973800" cy="380100"/>
           </a:xfrm>
           <a:prstGeom prst="rect">
             <a:avLst/>
@@ -22866,8 +22894,8 @@
         </p:nvSpPr>
         <p:spPr>
           <a:xfrm>
-            <a:off x="750005" y="905100"/>
-            <a:ext cx="1500000" cy="54900"/>
+            <a:off x="750006" y="905099"/>
+            <a:ext cx="1806300" cy="54900"/>
           </a:xfrm>
           <a:prstGeom prst="rect">
             <a:avLst/>
@@ -22963,7 +22991,7 @@
         <p:spPr>
           <a:xfrm>
             <a:off x="750000" y="500000"/>
-            <a:ext cx="5950000" cy="900000"/>
+            <a:ext cx="7105200" cy="900000"/>
           </a:xfrm>
           <a:prstGeom prst="rect">
             <a:avLst/>
@@ -23020,8 +23048,8 @@
         </p:nvSpPr>
         <p:spPr>
           <a:xfrm>
-            <a:off x="750000" y="1282956"/>
-            <a:ext cx="5949900" cy="399900"/>
+            <a:off x="750000" y="1282955"/>
+            <a:ext cx="7104900" cy="399900"/>
           </a:xfrm>
           <a:prstGeom prst="rect">
             <a:avLst/>
@@ -23078,8 +23106,8 @@
         </p:nvSpPr>
         <p:spPr>
           <a:xfrm>
-            <a:off x="750000" y="1702956"/>
-            <a:ext cx="5949900" cy="750000"/>
+            <a:off x="750000" y="1702954"/>
+            <a:ext cx="7104900" cy="750000"/>
           </a:xfrm>
           <a:prstGeom prst="roundRect">
             <a:avLst>
@@ -23134,8 +23162,8 @@
         </p:nvSpPr>
         <p:spPr>
           <a:xfrm>
-            <a:off x="900000" y="1772956"/>
-            <a:ext cx="5649900" cy="620100"/>
+            <a:off x="929122" y="1772954"/>
+            <a:ext cx="6746700" cy="620100"/>
           </a:xfrm>
           <a:prstGeom prst="rect">
             <a:avLst/>
@@ -23204,8 +23232,8 @@
         </p:nvSpPr>
         <p:spPr>
           <a:xfrm>
-            <a:off x="750000" y="2702956"/>
-            <a:ext cx="1899900" cy="1299900"/>
+            <a:off x="750000" y="2702952"/>
+            <a:ext cx="2268900" cy="1299900"/>
           </a:xfrm>
           <a:prstGeom prst="roundRect">
             <a:avLst>
@@ -23260,8 +23288,8 @@
         </p:nvSpPr>
         <p:spPr>
           <a:xfrm>
-            <a:off x="1500000" y="2852956"/>
-            <a:ext cx="399900" cy="399900"/>
+            <a:off x="1645609" y="2852952"/>
+            <a:ext cx="477600" cy="399900"/>
           </a:xfrm>
           <a:prstGeom prst="ellipse">
             <a:avLst/>
@@ -23320,8 +23348,8 @@
         </p:nvSpPr>
         <p:spPr>
           <a:xfrm>
-            <a:off x="750000" y="3322956"/>
-            <a:ext cx="1899900" cy="300000"/>
+            <a:off x="750000" y="3322951"/>
+            <a:ext cx="2268900" cy="300000"/>
           </a:xfrm>
           <a:prstGeom prst="rect">
             <a:avLst/>
@@ -23378,8 +23406,8 @@
         </p:nvSpPr>
         <p:spPr>
           <a:xfrm>
-            <a:off x="850000" y="3622956"/>
-            <a:ext cx="1700100" cy="399900"/>
+            <a:off x="869414" y="3622951"/>
+            <a:ext cx="2030100" cy="399900"/>
           </a:xfrm>
           <a:prstGeom prst="rect">
             <a:avLst/>
@@ -23436,8 +23464,8 @@
         </p:nvSpPr>
         <p:spPr>
           <a:xfrm>
-            <a:off x="2800000" y="2702956"/>
-            <a:ext cx="1899900" cy="1299900"/>
+            <a:off x="3197997" y="2702952"/>
+            <a:ext cx="2268900" cy="1299900"/>
           </a:xfrm>
           <a:prstGeom prst="roundRect">
             <a:avLst>
@@ -23492,8 +23520,8 @@
         </p:nvSpPr>
         <p:spPr>
           <a:xfrm>
-            <a:off x="3550000" y="2852956"/>
-            <a:ext cx="399900" cy="399900"/>
+            <a:off x="4093606" y="2852952"/>
+            <a:ext cx="477600" cy="399900"/>
           </a:xfrm>
           <a:prstGeom prst="ellipse">
             <a:avLst/>
@@ -23552,8 +23580,8 @@
         </p:nvSpPr>
         <p:spPr>
           <a:xfrm>
-            <a:off x="2800000" y="3322956"/>
-            <a:ext cx="1899900" cy="300000"/>
+            <a:off x="3197997" y="3322951"/>
+            <a:ext cx="2268900" cy="300000"/>
           </a:xfrm>
           <a:prstGeom prst="rect">
             <a:avLst/>
@@ -23610,8 +23638,8 @@
         </p:nvSpPr>
         <p:spPr>
           <a:xfrm>
-            <a:off x="2900000" y="3622956"/>
-            <a:ext cx="1700100" cy="399900"/>
+            <a:off x="3317412" y="3622951"/>
+            <a:ext cx="2030100" cy="399900"/>
           </a:xfrm>
           <a:prstGeom prst="rect">
             <a:avLst/>
@@ -23668,8 +23696,8 @@
         </p:nvSpPr>
         <p:spPr>
           <a:xfrm>
-            <a:off x="4850000" y="2702956"/>
-            <a:ext cx="1899900" cy="1299900"/>
+            <a:off x="5645994" y="2702952"/>
+            <a:ext cx="2268900" cy="1299900"/>
           </a:xfrm>
           <a:prstGeom prst="roundRect">
             <a:avLst>
@@ -23724,8 +23752,8 @@
         </p:nvSpPr>
         <p:spPr>
           <a:xfrm>
-            <a:off x="5600000" y="2852956"/>
-            <a:ext cx="399900" cy="399900"/>
+            <a:off x="6541603" y="2852952"/>
+            <a:ext cx="477600" cy="399900"/>
           </a:xfrm>
           <a:prstGeom prst="ellipse">
             <a:avLst/>
@@ -23784,8 +23812,8 @@
         </p:nvSpPr>
         <p:spPr>
           <a:xfrm>
-            <a:off x="4850000" y="3322956"/>
-            <a:ext cx="1899900" cy="300000"/>
+            <a:off x="5645994" y="3322951"/>
+            <a:ext cx="2268900" cy="300000"/>
           </a:xfrm>
           <a:prstGeom prst="rect">
             <a:avLst/>
@@ -23842,8 +23870,8 @@
         </p:nvSpPr>
         <p:spPr>
           <a:xfrm>
-            <a:off x="4950000" y="3622956"/>
-            <a:ext cx="1700100" cy="399900"/>
+            <a:off x="5765409" y="3622951"/>
+            <a:ext cx="2030100" cy="399900"/>
           </a:xfrm>
           <a:prstGeom prst="rect">
             <a:avLst/>
@@ -23900,8 +23928,8 @@
         </p:nvSpPr>
         <p:spPr>
           <a:xfrm>
-            <a:off x="750005" y="905100"/>
-            <a:ext cx="1500000" cy="54900"/>
+            <a:off x="750006" y="905099"/>
+            <a:ext cx="1791300" cy="54900"/>
           </a:xfrm>
           <a:prstGeom prst="rect">
             <a:avLst/>
@@ -24261,8 +24289,8 @@
         </p:nvSpPr>
         <p:spPr>
           <a:xfrm>
-            <a:off x="750000" y="500000"/>
-            <a:ext cx="5950000" cy="900000"/>
+            <a:off x="750019" y="500000"/>
+            <a:ext cx="7135800" cy="900000"/>
           </a:xfrm>
           <a:prstGeom prst="rect">
             <a:avLst/>
@@ -24319,8 +24347,8 @@
         </p:nvSpPr>
         <p:spPr>
           <a:xfrm>
-            <a:off x="750000" y="1126150"/>
-            <a:ext cx="6965400" cy="399900"/>
+            <a:off x="750019" y="1126150"/>
+            <a:ext cx="7135800" cy="399900"/>
           </a:xfrm>
           <a:prstGeom prst="rect">
             <a:avLst/>
@@ -24377,8 +24405,8 @@
         </p:nvSpPr>
         <p:spPr>
           <a:xfrm>
-            <a:off x="750000" y="1546150"/>
-            <a:ext cx="6965400" cy="699900"/>
+            <a:off x="750019" y="1546150"/>
+            <a:ext cx="7135800" cy="699900"/>
           </a:xfrm>
           <a:prstGeom prst="roundRect">
             <a:avLst>
@@ -24433,8 +24461,8 @@
         </p:nvSpPr>
         <p:spPr>
           <a:xfrm>
-            <a:off x="925597" y="1616150"/>
-            <a:ext cx="1755900" cy="300000"/>
+            <a:off x="929909" y="1616150"/>
+            <a:ext cx="1798800" cy="300000"/>
           </a:xfrm>
           <a:prstGeom prst="rect">
             <a:avLst/>
@@ -24491,8 +24519,8 @@
         </p:nvSpPr>
         <p:spPr>
           <a:xfrm>
-            <a:off x="925597" y="1876150"/>
-            <a:ext cx="6614100" cy="350100"/>
+            <a:off x="929909" y="1876150"/>
+            <a:ext cx="6775800" cy="350100"/>
           </a:xfrm>
           <a:prstGeom prst="rect">
             <a:avLst/>
@@ -24549,8 +24577,8 @@
         </p:nvSpPr>
         <p:spPr>
           <a:xfrm>
-            <a:off x="750000" y="2346150"/>
-            <a:ext cx="6965400" cy="849900"/>
+            <a:off x="750019" y="2346150"/>
+            <a:ext cx="7135800" cy="849900"/>
           </a:xfrm>
           <a:prstGeom prst="roundRect">
             <a:avLst>
@@ -24605,8 +24633,8 @@
         </p:nvSpPr>
         <p:spPr>
           <a:xfrm>
-            <a:off x="925597" y="2416150"/>
-            <a:ext cx="3160800" cy="300000"/>
+            <a:off x="929909" y="2416150"/>
+            <a:ext cx="3238200" cy="300000"/>
           </a:xfrm>
           <a:prstGeom prst="rect">
             <a:avLst/>
@@ -24663,8 +24691,8 @@
         </p:nvSpPr>
         <p:spPr>
           <a:xfrm>
-            <a:off x="925597" y="2666150"/>
-            <a:ext cx="6614100" cy="519900"/>
+            <a:off x="929909" y="2666150"/>
+            <a:ext cx="6775800" cy="519900"/>
           </a:xfrm>
           <a:prstGeom prst="rect">
             <a:avLst/>
@@ -24721,8 +24749,8 @@
         </p:nvSpPr>
         <p:spPr>
           <a:xfrm>
-            <a:off x="750000" y="3346150"/>
-            <a:ext cx="3160800" cy="300000"/>
+            <a:off x="750019" y="3346150"/>
+            <a:ext cx="3238200" cy="300000"/>
           </a:xfrm>
           <a:prstGeom prst="rect">
             <a:avLst/>
@@ -24779,8 +24807,8 @@
         </p:nvSpPr>
         <p:spPr>
           <a:xfrm>
-            <a:off x="750000" y="3666150"/>
-            <a:ext cx="6965400" cy="900000"/>
+            <a:off x="750019" y="3666150"/>
+            <a:ext cx="7135800" cy="900000"/>
           </a:xfrm>
           <a:prstGeom prst="rect">
             <a:avLst/>
@@ -24933,8 +24961,8 @@
         </p:nvSpPr>
         <p:spPr>
           <a:xfrm>
-            <a:off x="750005" y="905100"/>
-            <a:ext cx="1500000" cy="54900"/>
+            <a:off x="749025" y="953307"/>
+            <a:ext cx="1821900" cy="54300"/>
           </a:xfrm>
           <a:prstGeom prst="rect">
             <a:avLst/>
@@ -25029,8 +25057,8 @@
         </p:nvSpPr>
         <p:spPr>
           <a:xfrm>
-            <a:off x="750000" y="500000"/>
-            <a:ext cx="5950000" cy="900000"/>
+            <a:off x="750013" y="500000"/>
+            <a:ext cx="7150200" cy="900000"/>
           </a:xfrm>
           <a:prstGeom prst="rect">
             <a:avLst/>
@@ -25087,8 +25115,8 @@
         </p:nvSpPr>
         <p:spPr>
           <a:xfrm>
-            <a:off x="750000" y="1149675"/>
-            <a:ext cx="7020000" cy="399900"/>
+            <a:off x="750013" y="1149675"/>
+            <a:ext cx="7150200" cy="399900"/>
           </a:xfrm>
           <a:prstGeom prst="rect">
             <a:avLst/>
@@ -25145,8 +25173,8 @@
         </p:nvSpPr>
         <p:spPr>
           <a:xfrm>
-            <a:off x="750000" y="1569675"/>
-            <a:ext cx="7020000" cy="699900"/>
+            <a:off x="750013" y="1569675"/>
+            <a:ext cx="7150200" cy="699900"/>
           </a:xfrm>
           <a:prstGeom prst="roundRect">
             <a:avLst>
@@ -25201,8 +25229,8 @@
         </p:nvSpPr>
         <p:spPr>
           <a:xfrm>
-            <a:off x="926981" y="1639675"/>
-            <a:ext cx="1769700" cy="300000"/>
+            <a:off x="930277" y="1639675"/>
+            <a:ext cx="1802400" cy="300000"/>
           </a:xfrm>
           <a:prstGeom prst="rect">
             <a:avLst/>
@@ -25259,8 +25287,8 @@
         </p:nvSpPr>
         <p:spPr>
           <a:xfrm>
-            <a:off x="926981" y="1899675"/>
-            <a:ext cx="6666300" cy="350100"/>
+            <a:off x="930277" y="1899675"/>
+            <a:ext cx="6789900" cy="350100"/>
           </a:xfrm>
           <a:prstGeom prst="rect">
             <a:avLst/>
@@ -25317,8 +25345,8 @@
         </p:nvSpPr>
         <p:spPr>
           <a:xfrm>
-            <a:off x="750000" y="2369675"/>
-            <a:ext cx="7020000" cy="849900"/>
+            <a:off x="750013" y="2369675"/>
+            <a:ext cx="7150200" cy="849900"/>
           </a:xfrm>
           <a:prstGeom prst="roundRect">
             <a:avLst>
@@ -25373,8 +25401,8 @@
         </p:nvSpPr>
         <p:spPr>
           <a:xfrm>
-            <a:off x="926981" y="2439675"/>
-            <a:ext cx="3185700" cy="300000"/>
+            <a:off x="930277" y="2439675"/>
+            <a:ext cx="3244800" cy="300000"/>
           </a:xfrm>
           <a:prstGeom prst="rect">
             <a:avLst/>
@@ -25431,8 +25459,8 @@
         </p:nvSpPr>
         <p:spPr>
           <a:xfrm>
-            <a:off x="926981" y="2689675"/>
-            <a:ext cx="6666300" cy="519900"/>
+            <a:off x="930277" y="2689675"/>
+            <a:ext cx="6789900" cy="519900"/>
           </a:xfrm>
           <a:prstGeom prst="rect">
             <a:avLst/>
@@ -25489,8 +25517,8 @@
         </p:nvSpPr>
         <p:spPr>
           <a:xfrm>
-            <a:off x="750000" y="3369675"/>
-            <a:ext cx="3185700" cy="300000"/>
+            <a:off x="750013" y="3369675"/>
+            <a:ext cx="3244800" cy="300000"/>
           </a:xfrm>
           <a:prstGeom prst="rect">
             <a:avLst/>
@@ -25547,8 +25575,8 @@
         </p:nvSpPr>
         <p:spPr>
           <a:xfrm>
-            <a:off x="750000" y="3689675"/>
-            <a:ext cx="7020000" cy="900000"/>
+            <a:off x="750013" y="3689675"/>
+            <a:ext cx="7150200" cy="900000"/>
           </a:xfrm>
           <a:prstGeom prst="rect">
             <a:avLst/>
@@ -25701,8 +25729,8 @@
         </p:nvSpPr>
         <p:spPr>
           <a:xfrm>
-            <a:off x="750005" y="905100"/>
-            <a:ext cx="1500000" cy="54900"/>
+            <a:off x="749025" y="953307"/>
+            <a:ext cx="1811400" cy="54300"/>
           </a:xfrm>
           <a:prstGeom prst="rect">
             <a:avLst/>
@@ -25797,8 +25825,8 @@
         </p:nvSpPr>
         <p:spPr>
           <a:xfrm>
-            <a:off x="750000" y="500000"/>
-            <a:ext cx="5950000" cy="900000"/>
+            <a:off x="750016" y="500000"/>
+            <a:ext cx="7143000" cy="900000"/>
           </a:xfrm>
           <a:prstGeom prst="rect">
             <a:avLst/>
@@ -25855,8 +25883,8 @@
         </p:nvSpPr>
         <p:spPr>
           <a:xfrm>
-            <a:off x="750000" y="1173175"/>
-            <a:ext cx="6988800" cy="399900"/>
+            <a:off x="750016" y="1173175"/>
+            <a:ext cx="7143000" cy="399900"/>
           </a:xfrm>
           <a:prstGeom prst="rect">
             <a:avLst/>
@@ -25913,8 +25941,8 @@
         </p:nvSpPr>
         <p:spPr>
           <a:xfrm>
-            <a:off x="750000" y="1593175"/>
-            <a:ext cx="6988800" cy="699900"/>
+            <a:off x="750016" y="1593175"/>
+            <a:ext cx="7143000" cy="699900"/>
           </a:xfrm>
           <a:prstGeom prst="roundRect">
             <a:avLst>
@@ -25969,8 +25997,8 @@
         </p:nvSpPr>
         <p:spPr>
           <a:xfrm>
-            <a:off x="926191" y="1663175"/>
-            <a:ext cx="1761900" cy="300000"/>
+            <a:off x="930093" y="1663175"/>
+            <a:ext cx="1800900" cy="300000"/>
           </a:xfrm>
           <a:prstGeom prst="rect">
             <a:avLst/>
@@ -26027,8 +26055,8 @@
         </p:nvSpPr>
         <p:spPr>
           <a:xfrm>
-            <a:off x="926191" y="1923175"/>
-            <a:ext cx="6636300" cy="350100"/>
+            <a:off x="930093" y="1923175"/>
+            <a:ext cx="6782700" cy="350100"/>
           </a:xfrm>
           <a:prstGeom prst="rect">
             <a:avLst/>
@@ -26085,8 +26113,8 @@
         </p:nvSpPr>
         <p:spPr>
           <a:xfrm>
-            <a:off x="750000" y="2393175"/>
-            <a:ext cx="6988800" cy="849900"/>
+            <a:off x="750016" y="2393175"/>
+            <a:ext cx="7143000" cy="849900"/>
           </a:xfrm>
           <a:prstGeom prst="roundRect">
             <a:avLst>
@@ -26141,8 +26169,8 @@
         </p:nvSpPr>
         <p:spPr>
           <a:xfrm>
-            <a:off x="926191" y="2463175"/>
-            <a:ext cx="3171300" cy="300000"/>
+            <a:off x="930093" y="2463175"/>
+            <a:ext cx="3241200" cy="300000"/>
           </a:xfrm>
           <a:prstGeom prst="rect">
             <a:avLst/>
@@ -26199,8 +26227,8 @@
         </p:nvSpPr>
         <p:spPr>
           <a:xfrm>
-            <a:off x="926191" y="2713175"/>
-            <a:ext cx="6636300" cy="519900"/>
+            <a:off x="930093" y="2713175"/>
+            <a:ext cx="6782700" cy="519900"/>
           </a:xfrm>
           <a:prstGeom prst="rect">
             <a:avLst/>
@@ -26257,8 +26285,8 @@
         </p:nvSpPr>
         <p:spPr>
           <a:xfrm>
-            <a:off x="750000" y="3393175"/>
-            <a:ext cx="3171300" cy="300000"/>
+            <a:off x="750016" y="3393175"/>
+            <a:ext cx="3241200" cy="300000"/>
           </a:xfrm>
           <a:prstGeom prst="rect">
             <a:avLst/>
@@ -26315,8 +26343,8 @@
         </p:nvSpPr>
         <p:spPr>
           <a:xfrm>
-            <a:off x="750000" y="3713175"/>
-            <a:ext cx="6988800" cy="900000"/>
+            <a:off x="750016" y="3713175"/>
+            <a:ext cx="7143000" cy="900000"/>
           </a:xfrm>
           <a:prstGeom prst="rect">
             <a:avLst/>
@@ -26469,8 +26497,8 @@
         </p:nvSpPr>
         <p:spPr>
           <a:xfrm>
-            <a:off x="750005" y="905100"/>
-            <a:ext cx="1500000" cy="54900"/>
+            <a:off x="749025" y="953307"/>
+            <a:ext cx="1817700" cy="54300"/>
           </a:xfrm>
           <a:prstGeom prst="rect">
             <a:avLst/>
@@ -26566,7 +26594,7 @@
         <p:spPr>
           <a:xfrm>
             <a:off x="750000" y="500000"/>
-            <a:ext cx="5950000" cy="900000"/>
+            <a:ext cx="7157400" cy="900000"/>
           </a:xfrm>
           <a:prstGeom prst="rect">
             <a:avLst/>
@@ -26624,7 +26652,7 @@
         <p:spPr>
           <a:xfrm>
             <a:off x="750000" y="1330000"/>
-            <a:ext cx="5950000" cy="400000"/>
+            <a:ext cx="7157400" cy="399900"/>
           </a:xfrm>
           <a:prstGeom prst="rect">
             <a:avLst/>
@@ -26681,8 +26709,8 @@
         </p:nvSpPr>
         <p:spPr>
           <a:xfrm>
-            <a:off x="790000" y="1730000"/>
-            <a:ext cx="160000" cy="160000"/>
+            <a:off x="798118" y="1730000"/>
+            <a:ext cx="192600" cy="159900"/>
           </a:xfrm>
           <a:prstGeom prst="ellipse">
             <a:avLst/>
@@ -26735,8 +26763,8 @@
         </p:nvSpPr>
         <p:spPr>
           <a:xfrm>
-            <a:off x="1060000" y="1700000"/>
-            <a:ext cx="1800000" cy="300000"/>
+            <a:off x="1122912" y="1700000"/>
+            <a:ext cx="2165400" cy="300000"/>
           </a:xfrm>
           <a:prstGeom prst="rect">
             <a:avLst/>
@@ -26793,8 +26821,8 @@
         </p:nvSpPr>
         <p:spPr>
           <a:xfrm>
-            <a:off x="2900000" y="1700000"/>
-            <a:ext cx="3700000" cy="500000"/>
+            <a:off x="3336324" y="1700000"/>
+            <a:ext cx="4450800" cy="500100"/>
           </a:xfrm>
           <a:prstGeom prst="rect">
             <a:avLst/>
@@ -26851,8 +26879,8 @@
         </p:nvSpPr>
         <p:spPr>
           <a:xfrm>
-            <a:off x="790000" y="2250000"/>
-            <a:ext cx="160000" cy="160000"/>
+            <a:off x="798118" y="2250000"/>
+            <a:ext cx="192600" cy="159900"/>
           </a:xfrm>
           <a:prstGeom prst="ellipse">
             <a:avLst/>
@@ -26905,8 +26933,8 @@
         </p:nvSpPr>
         <p:spPr>
           <a:xfrm>
-            <a:off x="1060000" y="2220000"/>
-            <a:ext cx="1800000" cy="300000"/>
+            <a:off x="1122912" y="2220000"/>
+            <a:ext cx="2165400" cy="300000"/>
           </a:xfrm>
           <a:prstGeom prst="rect">
             <a:avLst/>
@@ -26963,8 +26991,8 @@
         </p:nvSpPr>
         <p:spPr>
           <a:xfrm>
-            <a:off x="2900000" y="2220000"/>
-            <a:ext cx="3700000" cy="500000"/>
+            <a:off x="3336324" y="2220000"/>
+            <a:ext cx="4450800" cy="500100"/>
           </a:xfrm>
           <a:prstGeom prst="rect">
             <a:avLst/>
@@ -27021,8 +27049,8 @@
         </p:nvSpPr>
         <p:spPr>
           <a:xfrm>
-            <a:off x="790000" y="2770000"/>
-            <a:ext cx="160000" cy="160000"/>
+            <a:off x="798118" y="2770000"/>
+            <a:ext cx="192600" cy="159900"/>
           </a:xfrm>
           <a:prstGeom prst="ellipse">
             <a:avLst/>
@@ -27075,8 +27103,8 @@
         </p:nvSpPr>
         <p:spPr>
           <a:xfrm>
-            <a:off x="1060000" y="2740000"/>
-            <a:ext cx="1800000" cy="300000"/>
+            <a:off x="1122912" y="2740000"/>
+            <a:ext cx="2165400" cy="300000"/>
           </a:xfrm>
           <a:prstGeom prst="rect">
             <a:avLst/>
@@ -27133,8 +27161,8 @@
         </p:nvSpPr>
         <p:spPr>
           <a:xfrm>
-            <a:off x="2900000" y="2740000"/>
-            <a:ext cx="3700000" cy="500000"/>
+            <a:off x="3336324" y="2740000"/>
+            <a:ext cx="4450800" cy="500100"/>
           </a:xfrm>
           <a:prstGeom prst="rect">
             <a:avLst/>
@@ -27191,8 +27219,8 @@
         </p:nvSpPr>
         <p:spPr>
           <a:xfrm>
-            <a:off x="790000" y="3290000"/>
-            <a:ext cx="160000" cy="160000"/>
+            <a:off x="798118" y="3290000"/>
+            <a:ext cx="192600" cy="159900"/>
           </a:xfrm>
           <a:prstGeom prst="ellipse">
             <a:avLst/>
@@ -27245,8 +27273,8 @@
         </p:nvSpPr>
         <p:spPr>
           <a:xfrm>
-            <a:off x="1060000" y="3260000"/>
-            <a:ext cx="1800000" cy="300000"/>
+            <a:off x="1122912" y="3260000"/>
+            <a:ext cx="2165400" cy="300000"/>
           </a:xfrm>
           <a:prstGeom prst="rect">
             <a:avLst/>
@@ -27303,8 +27331,8 @@
         </p:nvSpPr>
         <p:spPr>
           <a:xfrm>
-            <a:off x="2900000" y="3260000"/>
-            <a:ext cx="3700000" cy="500000"/>
+            <a:off x="3336324" y="3260000"/>
+            <a:ext cx="4450800" cy="500100"/>
           </a:xfrm>
           <a:prstGeom prst="rect">
             <a:avLst/>
@@ -27361,8 +27389,8 @@
         </p:nvSpPr>
         <p:spPr>
           <a:xfrm>
-            <a:off x="790000" y="3810000"/>
-            <a:ext cx="160000" cy="160000"/>
+            <a:off x="798118" y="3810000"/>
+            <a:ext cx="192600" cy="159900"/>
           </a:xfrm>
           <a:prstGeom prst="ellipse">
             <a:avLst/>
@@ -27415,8 +27443,8 @@
         </p:nvSpPr>
         <p:spPr>
           <a:xfrm>
-            <a:off x="1060000" y="3780000"/>
-            <a:ext cx="1800000" cy="300000"/>
+            <a:off x="1122912" y="3780000"/>
+            <a:ext cx="2165400" cy="300000"/>
           </a:xfrm>
           <a:prstGeom prst="rect">
             <a:avLst/>
@@ -27473,8 +27501,8 @@
         </p:nvSpPr>
         <p:spPr>
           <a:xfrm>
-            <a:off x="2900000" y="3780000"/>
-            <a:ext cx="3700000" cy="500000"/>
+            <a:off x="3336324" y="3780000"/>
+            <a:ext cx="4450800" cy="500100"/>
           </a:xfrm>
           <a:prstGeom prst="rect">
             <a:avLst/>
@@ -27531,8 +27559,8 @@
         </p:nvSpPr>
         <p:spPr>
           <a:xfrm>
-            <a:off x="750005" y="905100"/>
-            <a:ext cx="1500000" cy="54900"/>
+            <a:off x="750006" y="905100"/>
+            <a:ext cx="1804500" cy="54900"/>
           </a:xfrm>
           <a:prstGeom prst="rect">
             <a:avLst/>
@@ -27627,8 +27655,8 @@
         </p:nvSpPr>
         <p:spPr>
           <a:xfrm>
-            <a:off x="750000" y="500000"/>
-            <a:ext cx="5950000" cy="900000"/>
+            <a:off x="750014" y="500000"/>
+            <a:ext cx="7128600" cy="900000"/>
           </a:xfrm>
           <a:prstGeom prst="rect">
             <a:avLst/>
@@ -27685,8 +27713,8 @@
         </p:nvSpPr>
         <p:spPr>
           <a:xfrm>
-            <a:off x="750000" y="1181025"/>
-            <a:ext cx="6988800" cy="399900"/>
+            <a:off x="750014" y="1181025"/>
+            <a:ext cx="7128600" cy="399900"/>
           </a:xfrm>
           <a:prstGeom prst="rect">
             <a:avLst/>
@@ -27743,8 +27771,8 @@
         </p:nvSpPr>
         <p:spPr>
           <a:xfrm>
-            <a:off x="750000" y="1601025"/>
-            <a:ext cx="6988800" cy="699900"/>
+            <a:off x="750014" y="1601025"/>
+            <a:ext cx="7128600" cy="699900"/>
           </a:xfrm>
           <a:prstGeom prst="roundRect">
             <a:avLst>
@@ -27799,8 +27827,8 @@
         </p:nvSpPr>
         <p:spPr>
           <a:xfrm>
-            <a:off x="926191" y="1671025"/>
-            <a:ext cx="1761900" cy="300000"/>
+            <a:off x="929726" y="1671025"/>
+            <a:ext cx="1797000" cy="300000"/>
           </a:xfrm>
           <a:prstGeom prst="rect">
             <a:avLst/>
@@ -27857,8 +27885,8 @@
         </p:nvSpPr>
         <p:spPr>
           <a:xfrm>
-            <a:off x="926191" y="1931025"/>
-            <a:ext cx="6636300" cy="350100"/>
+            <a:off x="929726" y="1931025"/>
+            <a:ext cx="6768900" cy="350100"/>
           </a:xfrm>
           <a:prstGeom prst="rect">
             <a:avLst/>
@@ -27915,8 +27943,8 @@
         </p:nvSpPr>
         <p:spPr>
           <a:xfrm>
-            <a:off x="750000" y="2401025"/>
-            <a:ext cx="6988800" cy="849900"/>
+            <a:off x="750014" y="2401025"/>
+            <a:ext cx="7128600" cy="849900"/>
           </a:xfrm>
           <a:prstGeom prst="roundRect">
             <a:avLst>
@@ -27971,8 +27999,8 @@
         </p:nvSpPr>
         <p:spPr>
           <a:xfrm>
-            <a:off x="926191" y="2471025"/>
-            <a:ext cx="3171300" cy="300000"/>
+            <a:off x="929726" y="2471025"/>
+            <a:ext cx="3234600" cy="300000"/>
           </a:xfrm>
           <a:prstGeom prst="rect">
             <a:avLst/>
@@ -28029,8 +28057,8 @@
         </p:nvSpPr>
         <p:spPr>
           <a:xfrm>
-            <a:off x="926191" y="2721025"/>
-            <a:ext cx="6636300" cy="519900"/>
+            <a:off x="929726" y="2721025"/>
+            <a:ext cx="6768900" cy="519900"/>
           </a:xfrm>
           <a:prstGeom prst="rect">
             <a:avLst/>
@@ -28087,8 +28115,8 @@
         </p:nvSpPr>
         <p:spPr>
           <a:xfrm>
-            <a:off x="750000" y="3401025"/>
-            <a:ext cx="3171300" cy="300000"/>
+            <a:off x="750014" y="3401025"/>
+            <a:ext cx="3234600" cy="300000"/>
           </a:xfrm>
           <a:prstGeom prst="rect">
             <a:avLst/>
@@ -28145,8 +28173,8 @@
         </p:nvSpPr>
         <p:spPr>
           <a:xfrm>
-            <a:off x="750000" y="3721025"/>
-            <a:ext cx="6988800" cy="900000"/>
+            <a:off x="750014" y="3721025"/>
+            <a:ext cx="7128600" cy="900000"/>
           </a:xfrm>
           <a:prstGeom prst="rect">
             <a:avLst/>
@@ -28299,8 +28327,8 @@
         </p:nvSpPr>
         <p:spPr>
           <a:xfrm>
-            <a:off x="750005" y="905100"/>
-            <a:ext cx="1500000" cy="54900"/>
+            <a:off x="749025" y="953307"/>
+            <a:ext cx="1813800" cy="54300"/>
           </a:xfrm>
           <a:prstGeom prst="rect">
             <a:avLst/>
@@ -28395,8 +28423,8 @@
         </p:nvSpPr>
         <p:spPr>
           <a:xfrm>
-            <a:off x="750000" y="500000"/>
-            <a:ext cx="5950000" cy="900000"/>
+            <a:off x="750028" y="500000"/>
+            <a:ext cx="7135800" cy="900000"/>
           </a:xfrm>
           <a:prstGeom prst="rect">
             <a:avLst/>
@@ -28453,8 +28481,8 @@
         </p:nvSpPr>
         <p:spPr>
           <a:xfrm>
-            <a:off x="750000" y="1173175"/>
-            <a:ext cx="6902400" cy="399900"/>
+            <a:off x="750028" y="1173175"/>
+            <a:ext cx="7135800" cy="399900"/>
           </a:xfrm>
           <a:prstGeom prst="rect">
             <a:avLst/>
@@ -28511,8 +28539,8 @@
         </p:nvSpPr>
         <p:spPr>
           <a:xfrm>
-            <a:off x="750000" y="1593175"/>
-            <a:ext cx="6902400" cy="699900"/>
+            <a:off x="750028" y="1593175"/>
+            <a:ext cx="7135800" cy="699900"/>
           </a:xfrm>
           <a:prstGeom prst="roundRect">
             <a:avLst>
@@ -28567,8 +28595,8 @@
         </p:nvSpPr>
         <p:spPr>
           <a:xfrm>
-            <a:off x="924016" y="1663175"/>
-            <a:ext cx="1740300" cy="300000"/>
+            <a:off x="929925" y="1663175"/>
+            <a:ext cx="1799100" cy="300000"/>
           </a:xfrm>
           <a:prstGeom prst="rect">
             <a:avLst/>
@@ -28625,8 +28653,8 @@
         </p:nvSpPr>
         <p:spPr>
           <a:xfrm>
-            <a:off x="924016" y="1923175"/>
-            <a:ext cx="6554400" cy="350100"/>
+            <a:off x="929925" y="1923175"/>
+            <a:ext cx="6775800" cy="350100"/>
           </a:xfrm>
           <a:prstGeom prst="rect">
             <a:avLst/>
@@ -28683,8 +28711,8 @@
         </p:nvSpPr>
         <p:spPr>
           <a:xfrm>
-            <a:off x="750000" y="2393175"/>
-            <a:ext cx="6902400" cy="849900"/>
+            <a:off x="750028" y="2393175"/>
+            <a:ext cx="7135800" cy="849900"/>
           </a:xfrm>
           <a:prstGeom prst="roundRect">
             <a:avLst>
@@ -28739,8 +28767,8 @@
         </p:nvSpPr>
         <p:spPr>
           <a:xfrm>
-            <a:off x="924016" y="2463175"/>
-            <a:ext cx="3132300" cy="300000"/>
+            <a:off x="929925" y="2463175"/>
+            <a:ext cx="3238200" cy="300000"/>
           </a:xfrm>
           <a:prstGeom prst="rect">
             <a:avLst/>
@@ -28797,8 +28825,8 @@
         </p:nvSpPr>
         <p:spPr>
           <a:xfrm>
-            <a:off x="924016" y="2713175"/>
-            <a:ext cx="6554400" cy="519900"/>
+            <a:off x="929925" y="2713175"/>
+            <a:ext cx="6775800" cy="519900"/>
           </a:xfrm>
           <a:prstGeom prst="rect">
             <a:avLst/>
@@ -28855,8 +28883,8 @@
         </p:nvSpPr>
         <p:spPr>
           <a:xfrm>
-            <a:off x="750000" y="3393175"/>
-            <a:ext cx="3132300" cy="300000"/>
+            <a:off x="750028" y="3393175"/>
+            <a:ext cx="3238200" cy="300000"/>
           </a:xfrm>
           <a:prstGeom prst="rect">
             <a:avLst/>
@@ -28913,8 +28941,8 @@
         </p:nvSpPr>
         <p:spPr>
           <a:xfrm>
-            <a:off x="750000" y="3713175"/>
-            <a:ext cx="6902400" cy="900000"/>
+            <a:off x="750028" y="3713175"/>
+            <a:ext cx="7135800" cy="900000"/>
           </a:xfrm>
           <a:prstGeom prst="rect">
             <a:avLst/>
@@ -29067,8 +29095,8 @@
         </p:nvSpPr>
         <p:spPr>
           <a:xfrm>
-            <a:off x="750005" y="905100"/>
-            <a:ext cx="1500000" cy="54900"/>
+            <a:off x="749025" y="953307"/>
+            <a:ext cx="1838400" cy="54300"/>
           </a:xfrm>
           <a:prstGeom prst="rect">
             <a:avLst/>
@@ -29429,7 +29457,7 @@
         <p:spPr>
           <a:xfrm>
             <a:off x="750000" y="500000"/>
-            <a:ext cx="5950000" cy="900000"/>
+            <a:ext cx="7143000" cy="900000"/>
           </a:xfrm>
           <a:prstGeom prst="rect">
             <a:avLst/>
@@ -29487,7 +29515,7 @@
         <p:spPr>
           <a:xfrm>
             <a:off x="750000" y="1330000"/>
-            <a:ext cx="5950000" cy="400000"/>
+            <a:ext cx="7143000" cy="399900"/>
           </a:xfrm>
           <a:prstGeom prst="rect">
             <a:avLst/>
@@ -29545,7 +29573,7 @@
         <p:spPr>
           <a:xfrm>
             <a:off x="750000" y="1750000"/>
-            <a:ext cx="2850000" cy="650000"/>
+            <a:ext cx="3421500" cy="650100"/>
           </a:xfrm>
           <a:prstGeom prst="roundRect">
             <a:avLst>
@@ -29600,8 +29628,8 @@
         </p:nvSpPr>
         <p:spPr>
           <a:xfrm>
-            <a:off x="900000" y="1830000"/>
-            <a:ext cx="2550000" cy="350000"/>
+            <a:off x="930075" y="1830000"/>
+            <a:ext cx="3061200" cy="350100"/>
           </a:xfrm>
           <a:prstGeom prst="rect">
             <a:avLst/>
@@ -29658,8 +29686,8 @@
         </p:nvSpPr>
         <p:spPr>
           <a:xfrm>
-            <a:off x="900000" y="2170000"/>
-            <a:ext cx="2550000" cy="200000"/>
+            <a:off x="930075" y="2170000"/>
+            <a:ext cx="3061200" cy="200100"/>
           </a:xfrm>
           <a:prstGeom prst="rect">
             <a:avLst/>
@@ -29716,8 +29744,8 @@
         </p:nvSpPr>
         <p:spPr>
           <a:xfrm>
-            <a:off x="3750000" y="1750000"/>
-            <a:ext cx="2850000" cy="650000"/>
+            <a:off x="4351500" y="1750000"/>
+            <a:ext cx="3421500" cy="650100"/>
           </a:xfrm>
           <a:prstGeom prst="roundRect">
             <a:avLst>
@@ -29772,8 +29800,8 @@
         </p:nvSpPr>
         <p:spPr>
           <a:xfrm>
-            <a:off x="3900000" y="1830000"/>
-            <a:ext cx="2550000" cy="350000"/>
+            <a:off x="4531575" y="1830000"/>
+            <a:ext cx="3061200" cy="350100"/>
           </a:xfrm>
           <a:prstGeom prst="rect">
             <a:avLst/>
@@ -29830,8 +29858,8 @@
         </p:nvSpPr>
         <p:spPr>
           <a:xfrm>
-            <a:off x="3900000" y="2170000"/>
-            <a:ext cx="2550000" cy="200000"/>
+            <a:off x="4531575" y="2170000"/>
+            <a:ext cx="3061200" cy="200100"/>
           </a:xfrm>
           <a:prstGeom prst="rect">
             <a:avLst/>
@@ -29889,7 +29917,7 @@
         <p:spPr>
           <a:xfrm>
             <a:off x="750000" y="2500000"/>
-            <a:ext cx="2850000" cy="650000"/>
+            <a:ext cx="3421500" cy="650100"/>
           </a:xfrm>
           <a:prstGeom prst="roundRect">
             <a:avLst>
@@ -29944,8 +29972,8 @@
         </p:nvSpPr>
         <p:spPr>
           <a:xfrm>
-            <a:off x="900000" y="2580000"/>
-            <a:ext cx="2550000" cy="350000"/>
+            <a:off x="930075" y="2580000"/>
+            <a:ext cx="3061200" cy="350100"/>
           </a:xfrm>
           <a:prstGeom prst="rect">
             <a:avLst/>
@@ -30002,8 +30030,8 @@
         </p:nvSpPr>
         <p:spPr>
           <a:xfrm>
-            <a:off x="900000" y="2920000"/>
-            <a:ext cx="2550000" cy="200000"/>
+            <a:off x="930075" y="2920000"/>
+            <a:ext cx="3061200" cy="200100"/>
           </a:xfrm>
           <a:prstGeom prst="rect">
             <a:avLst/>
@@ -30060,8 +30088,8 @@
         </p:nvSpPr>
         <p:spPr>
           <a:xfrm>
-            <a:off x="3750000" y="2500000"/>
-            <a:ext cx="2850000" cy="650000"/>
+            <a:off x="4351500" y="2500000"/>
+            <a:ext cx="3421500" cy="650100"/>
           </a:xfrm>
           <a:prstGeom prst="roundRect">
             <a:avLst>
@@ -30116,8 +30144,8 @@
         </p:nvSpPr>
         <p:spPr>
           <a:xfrm>
-            <a:off x="3900000" y="2580000"/>
-            <a:ext cx="2550000" cy="350000"/>
+            <a:off x="4531575" y="2580000"/>
+            <a:ext cx="3061200" cy="350100"/>
           </a:xfrm>
           <a:prstGeom prst="rect">
             <a:avLst/>
@@ -30174,8 +30202,8 @@
         </p:nvSpPr>
         <p:spPr>
           <a:xfrm>
-            <a:off x="3900000" y="2920000"/>
-            <a:ext cx="2550000" cy="200000"/>
+            <a:off x="4531575" y="2920000"/>
+            <a:ext cx="3061200" cy="200100"/>
           </a:xfrm>
           <a:prstGeom prst="rect">
             <a:avLst/>
@@ -30233,7 +30261,7 @@
         <p:spPr>
           <a:xfrm>
             <a:off x="750000" y="3450000"/>
-            <a:ext cx="5950000" cy="850000"/>
+            <a:ext cx="7143000" cy="849900"/>
           </a:xfrm>
           <a:prstGeom prst="roundRect">
             <a:avLst>
@@ -30288,8 +30316,8 @@
         </p:nvSpPr>
         <p:spPr>
           <a:xfrm>
-            <a:off x="900000" y="3530000"/>
-            <a:ext cx="5650000" cy="720000"/>
+            <a:off x="930075" y="3530000"/>
+            <a:ext cx="6782700" cy="720000"/>
           </a:xfrm>
           <a:prstGeom prst="rect">
             <a:avLst/>
@@ -30358,8 +30386,8 @@
         </p:nvSpPr>
         <p:spPr>
           <a:xfrm>
-            <a:off x="750005" y="905100"/>
-            <a:ext cx="1500000" cy="54900"/>
+            <a:off x="750006" y="905100"/>
+            <a:ext cx="1800600" cy="54900"/>
           </a:xfrm>
           <a:prstGeom prst="rect">
             <a:avLst/>
@@ -30455,7 +30483,7 @@
         <p:spPr>
           <a:xfrm>
             <a:off x="750000" y="500000"/>
-            <a:ext cx="5950000" cy="900000"/>
+            <a:ext cx="7143000" cy="900000"/>
           </a:xfrm>
           <a:prstGeom prst="rect">
             <a:avLst/>
@@ -30513,7 +30541,7 @@
         <p:spPr>
           <a:xfrm>
             <a:off x="750000" y="1330000"/>
-            <a:ext cx="5950000" cy="400000"/>
+            <a:ext cx="7143000" cy="399900"/>
           </a:xfrm>
           <a:prstGeom prst="rect">
             <a:avLst/>
@@ -30571,7 +30599,7 @@
         <p:spPr>
           <a:xfrm>
             <a:off x="750000" y="1780000"/>
-            <a:ext cx="220000" cy="220000"/>
+            <a:ext cx="264000" cy="219900"/>
           </a:xfrm>
           <a:prstGeom prst="ellipse">
             <a:avLst/>
@@ -30624,8 +30652,8 @@
         </p:nvSpPr>
         <p:spPr>
           <a:xfrm>
-            <a:off x="1060000" y="1750000"/>
-            <a:ext cx="2500000" cy="300000"/>
+            <a:off x="1122155" y="1750000"/>
+            <a:ext cx="3001200" cy="300000"/>
           </a:xfrm>
           <a:prstGeom prst="rect">
             <a:avLst/>
@@ -30682,8 +30710,8 @@
         </p:nvSpPr>
         <p:spPr>
           <a:xfrm>
-            <a:off x="1060000" y="2070000"/>
-            <a:ext cx="2500000" cy="450000"/>
+            <a:off x="1122155" y="2070000"/>
+            <a:ext cx="3001200" cy="450000"/>
           </a:xfrm>
           <a:prstGeom prst="rect">
             <a:avLst/>
@@ -30740,8 +30768,8 @@
         </p:nvSpPr>
         <p:spPr>
           <a:xfrm>
-            <a:off x="3750000" y="1780000"/>
-            <a:ext cx="220000" cy="220000"/>
+            <a:off x="4351500" y="1780000"/>
+            <a:ext cx="264000" cy="219900"/>
           </a:xfrm>
           <a:prstGeom prst="ellipse">
             <a:avLst/>
@@ -30794,8 +30822,8 @@
         </p:nvSpPr>
         <p:spPr>
           <a:xfrm>
-            <a:off x="4060000" y="1750000"/>
-            <a:ext cx="2500000" cy="300000"/>
+            <a:off x="4723655" y="1750000"/>
+            <a:ext cx="3001200" cy="300000"/>
           </a:xfrm>
           <a:prstGeom prst="rect">
             <a:avLst/>
@@ -30852,8 +30880,8 @@
         </p:nvSpPr>
         <p:spPr>
           <a:xfrm>
-            <a:off x="4060000" y="2070000"/>
-            <a:ext cx="2500000" cy="450000"/>
+            <a:off x="4723655" y="2070000"/>
+            <a:ext cx="3001200" cy="450000"/>
           </a:xfrm>
           <a:prstGeom prst="rect">
             <a:avLst/>
@@ -30911,7 +30939,7 @@
         <p:spPr>
           <a:xfrm>
             <a:off x="750000" y="2630000"/>
-            <a:ext cx="220000" cy="220000"/>
+            <a:ext cx="264000" cy="219900"/>
           </a:xfrm>
           <a:prstGeom prst="ellipse">
             <a:avLst/>
@@ -30964,8 +30992,8 @@
         </p:nvSpPr>
         <p:spPr>
           <a:xfrm>
-            <a:off x="1060000" y="2600000"/>
-            <a:ext cx="2500000" cy="300000"/>
+            <a:off x="1122155" y="2600000"/>
+            <a:ext cx="3001200" cy="300000"/>
           </a:xfrm>
           <a:prstGeom prst="rect">
             <a:avLst/>
@@ -31022,8 +31050,8 @@
         </p:nvSpPr>
         <p:spPr>
           <a:xfrm>
-            <a:off x="1060000" y="2920000"/>
-            <a:ext cx="2500000" cy="450000"/>
+            <a:off x="1122155" y="2920000"/>
+            <a:ext cx="3001200" cy="450000"/>
           </a:xfrm>
           <a:prstGeom prst="rect">
             <a:avLst/>
@@ -31080,8 +31108,8 @@
         </p:nvSpPr>
         <p:spPr>
           <a:xfrm>
-            <a:off x="3750000" y="2630000"/>
-            <a:ext cx="220000" cy="220000"/>
+            <a:off x="4351500" y="2630000"/>
+            <a:ext cx="264000" cy="219900"/>
           </a:xfrm>
           <a:prstGeom prst="ellipse">
             <a:avLst/>
@@ -31134,8 +31162,8 @@
         </p:nvSpPr>
         <p:spPr>
           <a:xfrm>
-            <a:off x="4060000" y="2600000"/>
-            <a:ext cx="2500000" cy="300000"/>
+            <a:off x="4723655" y="2600000"/>
+            <a:ext cx="3001200" cy="300000"/>
           </a:xfrm>
           <a:prstGeom prst="rect">
             <a:avLst/>
@@ -31192,8 +31220,8 @@
         </p:nvSpPr>
         <p:spPr>
           <a:xfrm>
-            <a:off x="4060000" y="2920000"/>
-            <a:ext cx="2500000" cy="450000"/>
+            <a:off x="4723655" y="2920000"/>
+            <a:ext cx="3001200" cy="450000"/>
           </a:xfrm>
           <a:prstGeom prst="rect">
             <a:avLst/>
@@ -31251,7 +31279,7 @@
         <p:spPr>
           <a:xfrm>
             <a:off x="750000" y="3480000"/>
-            <a:ext cx="220000" cy="220000"/>
+            <a:ext cx="264000" cy="219900"/>
           </a:xfrm>
           <a:prstGeom prst="ellipse">
             <a:avLst/>
@@ -31304,8 +31332,8 @@
         </p:nvSpPr>
         <p:spPr>
           <a:xfrm>
-            <a:off x="1060000" y="3450000"/>
-            <a:ext cx="2500000" cy="300000"/>
+            <a:off x="1122155" y="3450000"/>
+            <a:ext cx="3001200" cy="300000"/>
           </a:xfrm>
           <a:prstGeom prst="rect">
             <a:avLst/>
@@ -31362,8 +31390,8 @@
         </p:nvSpPr>
         <p:spPr>
           <a:xfrm>
-            <a:off x="1060000" y="3770000"/>
-            <a:ext cx="2500000" cy="450000"/>
+            <a:off x="1122155" y="3770000"/>
+            <a:ext cx="3001200" cy="450000"/>
           </a:xfrm>
           <a:prstGeom prst="rect">
             <a:avLst/>
@@ -31420,8 +31448,8 @@
         </p:nvSpPr>
         <p:spPr>
           <a:xfrm>
-            <a:off x="3750000" y="3480000"/>
-            <a:ext cx="220000" cy="220000"/>
+            <a:off x="4351500" y="3480000"/>
+            <a:ext cx="264000" cy="219900"/>
           </a:xfrm>
           <a:prstGeom prst="ellipse">
             <a:avLst/>
@@ -31474,8 +31502,8 @@
         </p:nvSpPr>
         <p:spPr>
           <a:xfrm>
-            <a:off x="4060000" y="3450000"/>
-            <a:ext cx="2500000" cy="300000"/>
+            <a:off x="4723655" y="3450000"/>
+            <a:ext cx="3001200" cy="300000"/>
           </a:xfrm>
           <a:prstGeom prst="rect">
             <a:avLst/>
@@ -31532,8 +31560,8 @@
         </p:nvSpPr>
         <p:spPr>
           <a:xfrm>
-            <a:off x="4060000" y="3770000"/>
-            <a:ext cx="2500000" cy="450000"/>
+            <a:off x="4723655" y="3770000"/>
+            <a:ext cx="3001200" cy="450000"/>
           </a:xfrm>
           <a:prstGeom prst="rect">
             <a:avLst/>
@@ -31590,8 +31618,8 @@
         </p:nvSpPr>
         <p:spPr>
           <a:xfrm>
-            <a:off x="750005" y="905100"/>
-            <a:ext cx="1500000" cy="54900"/>
+            <a:off x="750006" y="905100"/>
+            <a:ext cx="1800600" cy="54900"/>
           </a:xfrm>
           <a:prstGeom prst="rect">
             <a:avLst/>
@@ -31745,7 +31773,7 @@
         <p:spPr>
           <a:xfrm>
             <a:off x="750000" y="1330000"/>
-            <a:ext cx="5950000" cy="400000"/>
+            <a:ext cx="7169100" cy="399900"/>
           </a:xfrm>
           <a:prstGeom prst="rect">
             <a:avLst/>
@@ -31803,7 +31831,7 @@
         <p:spPr>
           <a:xfrm>
             <a:off x="750000" y="1750000"/>
-            <a:ext cx="5950000" cy="490000"/>
+            <a:ext cx="7169100" cy="489900"/>
           </a:xfrm>
           <a:prstGeom prst="roundRect">
             <a:avLst>
@@ -31858,8 +31886,8 @@
         </p:nvSpPr>
         <p:spPr>
           <a:xfrm>
-            <a:off x="900000" y="1840000"/>
-            <a:ext cx="380000" cy="380000"/>
+            <a:off x="930734" y="1840000"/>
+            <a:ext cx="457800" cy="380100"/>
           </a:xfrm>
           <a:prstGeom prst="ellipse">
             <a:avLst/>
@@ -31918,8 +31946,8 @@
         </p:nvSpPr>
         <p:spPr>
           <a:xfrm>
-            <a:off x="1450000" y="1830000"/>
-            <a:ext cx="5100000" cy="300000"/>
+            <a:off x="1593424" y="1830000"/>
+            <a:ext cx="6144900" cy="300000"/>
           </a:xfrm>
           <a:prstGeom prst="rect">
             <a:avLst/>
@@ -31976,8 +32004,8 @@
         </p:nvSpPr>
         <p:spPr>
           <a:xfrm>
-            <a:off x="1450000" y="2100000"/>
-            <a:ext cx="5100000" cy="300000"/>
+            <a:off x="1593424" y="2100000"/>
+            <a:ext cx="6144900" cy="300000"/>
           </a:xfrm>
           <a:prstGeom prst="rect">
             <a:avLst/>
@@ -32035,7 +32063,7 @@
         <p:spPr>
           <a:xfrm>
             <a:off x="750000" y="2290000"/>
-            <a:ext cx="5950000" cy="490000"/>
+            <a:ext cx="7169100" cy="489900"/>
           </a:xfrm>
           <a:prstGeom prst="roundRect">
             <a:avLst>
@@ -32090,8 +32118,8 @@
         </p:nvSpPr>
         <p:spPr>
           <a:xfrm>
-            <a:off x="900000" y="2380000"/>
-            <a:ext cx="380000" cy="380000"/>
+            <a:off x="930734" y="2380000"/>
+            <a:ext cx="457800" cy="380100"/>
           </a:xfrm>
           <a:prstGeom prst="ellipse">
             <a:avLst/>
@@ -32150,8 +32178,8 @@
         </p:nvSpPr>
         <p:spPr>
           <a:xfrm>
-            <a:off x="1450000" y="2370000"/>
-            <a:ext cx="5100000" cy="300000"/>
+            <a:off x="1593424" y="2370000"/>
+            <a:ext cx="6144900" cy="300000"/>
           </a:xfrm>
           <a:prstGeom prst="rect">
             <a:avLst/>
@@ -32208,8 +32236,8 @@
         </p:nvSpPr>
         <p:spPr>
           <a:xfrm>
-            <a:off x="1450000" y="2640000"/>
-            <a:ext cx="5100000" cy="300000"/>
+            <a:off x="1593424" y="2640000"/>
+            <a:ext cx="6144900" cy="300000"/>
           </a:xfrm>
           <a:prstGeom prst="rect">
             <a:avLst/>
@@ -32267,7 +32295,7 @@
         <p:spPr>
           <a:xfrm>
             <a:off x="750000" y="2830000"/>
-            <a:ext cx="5950000" cy="490000"/>
+            <a:ext cx="7169100" cy="489900"/>
           </a:xfrm>
           <a:prstGeom prst="roundRect">
             <a:avLst>
@@ -32322,8 +32350,8 @@
         </p:nvSpPr>
         <p:spPr>
           <a:xfrm>
-            <a:off x="900000" y="2920000"/>
-            <a:ext cx="380000" cy="380000"/>
+            <a:off x="930734" y="2920000"/>
+            <a:ext cx="457800" cy="380100"/>
           </a:xfrm>
           <a:prstGeom prst="ellipse">
             <a:avLst/>
@@ -32382,8 +32410,8 @@
         </p:nvSpPr>
         <p:spPr>
           <a:xfrm>
-            <a:off x="1450000" y="2910000"/>
-            <a:ext cx="5100000" cy="300000"/>
+            <a:off x="1593424" y="2910000"/>
+            <a:ext cx="6144900" cy="300000"/>
           </a:xfrm>
           <a:prstGeom prst="rect">
             <a:avLst/>
@@ -32440,8 +32468,8 @@
         </p:nvSpPr>
         <p:spPr>
           <a:xfrm>
-            <a:off x="1450000" y="3180000"/>
-            <a:ext cx="5100000" cy="300000"/>
+            <a:off x="1593424" y="3180000"/>
+            <a:ext cx="6144900" cy="300000"/>
           </a:xfrm>
           <a:prstGeom prst="rect">
             <a:avLst/>
@@ -32499,7 +32527,7 @@
         <p:spPr>
           <a:xfrm>
             <a:off x="750000" y="3370000"/>
-            <a:ext cx="5950000" cy="490000"/>
+            <a:ext cx="7169100" cy="489900"/>
           </a:xfrm>
           <a:prstGeom prst="roundRect">
             <a:avLst>
@@ -32554,8 +32582,8 @@
         </p:nvSpPr>
         <p:spPr>
           <a:xfrm>
-            <a:off x="900000" y="3460000"/>
-            <a:ext cx="380000" cy="380000"/>
+            <a:off x="930734" y="3460000"/>
+            <a:ext cx="457800" cy="380100"/>
           </a:xfrm>
           <a:prstGeom prst="ellipse">
             <a:avLst/>
@@ -32614,8 +32642,8 @@
         </p:nvSpPr>
         <p:spPr>
           <a:xfrm>
-            <a:off x="1450000" y="3450000"/>
-            <a:ext cx="5100000" cy="300000"/>
+            <a:off x="1593424" y="3450000"/>
+            <a:ext cx="6144900" cy="300000"/>
           </a:xfrm>
           <a:prstGeom prst="rect">
             <a:avLst/>
@@ -32672,8 +32700,8 @@
         </p:nvSpPr>
         <p:spPr>
           <a:xfrm>
-            <a:off x="1450000" y="3720000"/>
-            <a:ext cx="5100000" cy="300000"/>
+            <a:off x="1593424" y="3720000"/>
+            <a:ext cx="6144900" cy="300000"/>
           </a:xfrm>
           <a:prstGeom prst="rect">
             <a:avLst/>
@@ -33092,7 +33120,7 @@
         <p:spPr>
           <a:xfrm>
             <a:off x="750000" y="500000"/>
-            <a:ext cx="5950000" cy="900000"/>
+            <a:ext cx="7172100" cy="900000"/>
           </a:xfrm>
           <a:prstGeom prst="rect">
             <a:avLst/>
@@ -33150,7 +33178,7 @@
         <p:spPr>
           <a:xfrm>
             <a:off x="750000" y="1188875"/>
-            <a:ext cx="6738000" cy="429300"/>
+            <a:ext cx="7172100" cy="429300"/>
           </a:xfrm>
           <a:prstGeom prst="rect">
             <a:avLst/>
@@ -33208,7 +33236,7 @@
         <p:spPr>
           <a:xfrm>
             <a:off x="750000" y="1639776"/>
-            <a:ext cx="6738000" cy="805200"/>
+            <a:ext cx="7172100" cy="805200"/>
           </a:xfrm>
           <a:prstGeom prst="roundRect">
             <a:avLst>
@@ -33263,8 +33291,8 @@
         </p:nvSpPr>
         <p:spPr>
           <a:xfrm>
-            <a:off x="919865" y="1747134"/>
-            <a:ext cx="2265000" cy="322200"/>
+            <a:off x="930806" y="1747134"/>
+            <a:ext cx="2410800" cy="322200"/>
           </a:xfrm>
           <a:prstGeom prst="rect">
             <a:avLst/>
@@ -33321,8 +33349,8 @@
         </p:nvSpPr>
         <p:spPr>
           <a:xfrm>
-            <a:off x="919865" y="2047734"/>
-            <a:ext cx="6398100" cy="429300"/>
+            <a:off x="930806" y="2047734"/>
+            <a:ext cx="6810300" cy="429300"/>
           </a:xfrm>
           <a:prstGeom prst="rect">
             <a:avLst/>
@@ -33380,7 +33408,7 @@
         <p:spPr>
           <a:xfrm>
             <a:off x="750000" y="2498635"/>
-            <a:ext cx="6738000" cy="805200"/>
+            <a:ext cx="7172100" cy="805200"/>
           </a:xfrm>
           <a:prstGeom prst="roundRect">
             <a:avLst>
@@ -33435,8 +33463,8 @@
         </p:nvSpPr>
         <p:spPr>
           <a:xfrm>
-            <a:off x="919865" y="2605993"/>
-            <a:ext cx="2265000" cy="322200"/>
+            <a:off x="930806" y="2605993"/>
+            <a:ext cx="2410800" cy="322200"/>
           </a:xfrm>
           <a:prstGeom prst="rect">
             <a:avLst/>
@@ -33493,8 +33521,8 @@
         </p:nvSpPr>
         <p:spPr>
           <a:xfrm>
-            <a:off x="919865" y="2906593"/>
-            <a:ext cx="6398100" cy="429300"/>
+            <a:off x="930806" y="2906593"/>
+            <a:ext cx="6810300" cy="429300"/>
           </a:xfrm>
           <a:prstGeom prst="rect">
             <a:avLst/>
@@ -33552,7 +33580,7 @@
         <p:spPr>
           <a:xfrm>
             <a:off x="750000" y="3357495"/>
-            <a:ext cx="6738000" cy="805200"/>
+            <a:ext cx="7172100" cy="805200"/>
           </a:xfrm>
           <a:prstGeom prst="roundRect">
             <a:avLst>
@@ -33607,8 +33635,8 @@
         </p:nvSpPr>
         <p:spPr>
           <a:xfrm>
-            <a:off x="919865" y="3464852"/>
-            <a:ext cx="2265000" cy="322200"/>
+            <a:off x="930806" y="3464852"/>
+            <a:ext cx="2410800" cy="322200"/>
           </a:xfrm>
           <a:prstGeom prst="rect">
             <a:avLst/>
@@ -33665,8 +33693,8 @@
         </p:nvSpPr>
         <p:spPr>
           <a:xfrm>
-            <a:off x="919865" y="3765453"/>
-            <a:ext cx="6398100" cy="429300"/>
+            <a:off x="930806" y="3765453"/>
+            <a:ext cx="6810300" cy="429300"/>
           </a:xfrm>
           <a:prstGeom prst="rect">
             <a:avLst/>
@@ -33724,7 +33752,7 @@
         <p:spPr>
           <a:xfrm>
             <a:off x="750000" y="4350000"/>
-            <a:ext cx="5950000" cy="300000"/>
+            <a:ext cx="6333300" cy="300000"/>
           </a:xfrm>
           <a:prstGeom prst="rect">
             <a:avLst/>
@@ -33782,7 +33810,7 @@
         <p:spPr>
           <a:xfrm>
             <a:off x="750005" y="905100"/>
-            <a:ext cx="1500000" cy="54900"/>
+            <a:ext cx="1596600" cy="54900"/>
           </a:xfrm>
           <a:prstGeom prst="rect">
             <a:avLst/>
@@ -33878,7 +33906,7 @@
         <p:spPr>
           <a:xfrm>
             <a:off x="750000" y="500000"/>
-            <a:ext cx="5949900" cy="900000"/>
+            <a:ext cx="6960600" cy="900000"/>
           </a:xfrm>
           <a:prstGeom prst="rect">
             <a:avLst/>
@@ -33936,7 +33964,7 @@
         <p:spPr>
           <a:xfrm>
             <a:off x="750000" y="1102612"/>
-            <a:ext cx="6847800" cy="399900"/>
+            <a:ext cx="6960600" cy="399900"/>
           </a:xfrm>
           <a:prstGeom prst="rect">
             <a:avLst/>
@@ -33994,7 +34022,7 @@
         <p:spPr>
           <a:xfrm>
             <a:off x="750000" y="1522612"/>
-            <a:ext cx="6847800" cy="800100"/>
+            <a:ext cx="6960600" cy="800100"/>
           </a:xfrm>
           <a:prstGeom prst="roundRect">
             <a:avLst>
@@ -34049,8 +34077,8 @@
         </p:nvSpPr>
         <p:spPr>
           <a:xfrm>
-            <a:off x="922633" y="1592612"/>
-            <a:ext cx="6502500" cy="660000"/>
+            <a:off x="925479" y="1592612"/>
+            <a:ext cx="6609600" cy="660000"/>
           </a:xfrm>
           <a:prstGeom prst="rect">
             <a:avLst/>
@@ -34086,7 +34114,7 @@
             <a:r>
               <a:rPr b="1" i="0" lang="en-US" sz="1700" u="none" cap="none" strike="noStrike">
                 <a:solidFill>
-                  <a:srgbClr val="E8A317"/>
+                  <a:schemeClr val="lt1"/>
                 </a:solidFill>
                 <a:latin typeface="Arial Black"/>
                 <a:ea typeface="Arial Black"/>
@@ -34095,7 +34123,11 @@
               </a:rPr>
               <a:t>Identificar perguntas jurimétricas no caso XY&amp;A</a:t>
             </a:r>
-            <a:endParaRPr/>
+            <a:endParaRPr>
+              <a:solidFill>
+                <a:schemeClr val="lt1"/>
+              </a:solidFill>
+            </a:endParaRPr>
           </a:p>
         </p:txBody>
       </p:sp>
@@ -34108,7 +34140,7 @@
         <p:spPr>
           <a:xfrm>
             <a:off x="750000" y="2472612"/>
-            <a:ext cx="6847800" cy="300000"/>
+            <a:ext cx="6960600" cy="300000"/>
           </a:xfrm>
           <a:prstGeom prst="rect">
             <a:avLst/>
@@ -34166,7 +34198,7 @@
         <p:spPr>
           <a:xfrm>
             <a:off x="750000" y="2772600"/>
-            <a:ext cx="7020000" cy="1861200"/>
+            <a:ext cx="7135800" cy="1861200"/>
           </a:xfrm>
           <a:prstGeom prst="rect">
             <a:avLst/>
@@ -34329,7 +34361,7 @@
         <p:spPr>
           <a:xfrm>
             <a:off x="750005" y="905100"/>
-            <a:ext cx="1500000" cy="54900"/>
+            <a:ext cx="1524600" cy="54900"/>
           </a:xfrm>
           <a:prstGeom prst="rect">
             <a:avLst/>
@@ -34425,7 +34457,7 @@
         <p:spPr>
           <a:xfrm>
             <a:off x="750000" y="500000"/>
-            <a:ext cx="5950000" cy="900000"/>
+            <a:ext cx="7021500" cy="900000"/>
           </a:xfrm>
           <a:prstGeom prst="rect">
             <a:avLst/>
@@ -35227,7 +35259,7 @@
         <p:spPr>
           <a:xfrm>
             <a:off x="750000" y="500000"/>
-            <a:ext cx="5950000" cy="900000"/>
+            <a:ext cx="7083600" cy="900000"/>
           </a:xfrm>
           <a:prstGeom prst="rect">
             <a:avLst/>
@@ -35285,7 +35317,7 @@
         <p:spPr>
           <a:xfrm>
             <a:off x="750000" y="1330000"/>
-            <a:ext cx="5950000" cy="400000"/>
+            <a:ext cx="7083600" cy="399900"/>
           </a:xfrm>
           <a:prstGeom prst="rect">
             <a:avLst/>
@@ -35343,7 +35375,7 @@
         <p:spPr>
           <a:xfrm>
             <a:off x="750000" y="1750000"/>
-            <a:ext cx="5950000" cy="400000"/>
+            <a:ext cx="7083600" cy="399900"/>
           </a:xfrm>
           <a:prstGeom prst="rect">
             <a:avLst/>
@@ -35401,7 +35433,7 @@
         <p:spPr>
           <a:xfrm>
             <a:off x="750000" y="2400000"/>
-            <a:ext cx="1900000" cy="1850000"/>
+            <a:ext cx="2262000" cy="1850100"/>
           </a:xfrm>
           <a:prstGeom prst="roundRect">
             <a:avLst>
@@ -35456,8 +35488,8 @@
         </p:nvSpPr>
         <p:spPr>
           <a:xfrm>
-            <a:off x="900000" y="2550000"/>
-            <a:ext cx="1600000" cy="300000"/>
+            <a:off x="928574" y="2550000"/>
+            <a:ext cx="1904700" cy="300000"/>
           </a:xfrm>
           <a:prstGeom prst="rect">
             <a:avLst/>
@@ -35514,8 +35546,8 @@
         </p:nvSpPr>
         <p:spPr>
           <a:xfrm>
-            <a:off x="900000" y="2860000"/>
-            <a:ext cx="1600000" cy="500000"/>
+            <a:off x="928574" y="2860000"/>
+            <a:ext cx="1904700" cy="500100"/>
           </a:xfrm>
           <a:prstGeom prst="rect">
             <a:avLst/>
@@ -35572,8 +35604,8 @@
         </p:nvSpPr>
         <p:spPr>
           <a:xfrm>
-            <a:off x="900000" y="3400000"/>
-            <a:ext cx="1600000" cy="800000"/>
+            <a:off x="928574" y="3400000"/>
+            <a:ext cx="1904700" cy="800100"/>
           </a:xfrm>
           <a:prstGeom prst="rect">
             <a:avLst/>
@@ -35630,8 +35662,8 @@
         </p:nvSpPr>
         <p:spPr>
           <a:xfrm>
-            <a:off x="2800000" y="2400000"/>
-            <a:ext cx="1900000" cy="1850000"/>
+            <a:off x="3190516" y="2400000"/>
+            <a:ext cx="2262000" cy="1850100"/>
           </a:xfrm>
           <a:prstGeom prst="roundRect">
             <a:avLst>
@@ -35686,8 +35718,8 @@
         </p:nvSpPr>
         <p:spPr>
           <a:xfrm>
-            <a:off x="2950000" y="2550000"/>
-            <a:ext cx="1600000" cy="300000"/>
+            <a:off x="3369091" y="2550000"/>
+            <a:ext cx="1904700" cy="300000"/>
           </a:xfrm>
           <a:prstGeom prst="rect">
             <a:avLst/>
@@ -35744,8 +35776,8 @@
         </p:nvSpPr>
         <p:spPr>
           <a:xfrm>
-            <a:off x="2950000" y="2860000"/>
-            <a:ext cx="1600000" cy="500000"/>
+            <a:off x="3369091" y="2860000"/>
+            <a:ext cx="1904700" cy="500100"/>
           </a:xfrm>
           <a:prstGeom prst="rect">
             <a:avLst/>
@@ -35802,8 +35834,8 @@
         </p:nvSpPr>
         <p:spPr>
           <a:xfrm>
-            <a:off x="2950000" y="3400000"/>
-            <a:ext cx="1600000" cy="800000"/>
+            <a:off x="3369091" y="3400000"/>
+            <a:ext cx="1904700" cy="800100"/>
           </a:xfrm>
           <a:prstGeom prst="rect">
             <a:avLst/>
@@ -35860,8 +35892,8 @@
         </p:nvSpPr>
         <p:spPr>
           <a:xfrm>
-            <a:off x="4850000" y="2400000"/>
-            <a:ext cx="1900000" cy="1850000"/>
+            <a:off x="5631033" y="2400000"/>
+            <a:ext cx="2262000" cy="1850100"/>
           </a:xfrm>
           <a:prstGeom prst="roundRect">
             <a:avLst>
@@ -35916,8 +35948,8 @@
         </p:nvSpPr>
         <p:spPr>
           <a:xfrm>
-            <a:off x="5000000" y="2550000"/>
-            <a:ext cx="1600000" cy="300000"/>
+            <a:off x="5809607" y="2550000"/>
+            <a:ext cx="1904700" cy="300000"/>
           </a:xfrm>
           <a:prstGeom prst="rect">
             <a:avLst/>
@@ -35974,8 +36006,8 @@
         </p:nvSpPr>
         <p:spPr>
           <a:xfrm>
-            <a:off x="5000000" y="2860000"/>
-            <a:ext cx="1600000" cy="500000"/>
+            <a:off x="5809607" y="2860000"/>
+            <a:ext cx="1904700" cy="500100"/>
           </a:xfrm>
           <a:prstGeom prst="rect">
             <a:avLst/>
@@ -36032,8 +36064,8 @@
         </p:nvSpPr>
         <p:spPr>
           <a:xfrm>
-            <a:off x="5000000" y="3400000"/>
-            <a:ext cx="1600000" cy="800000"/>
+            <a:off x="5809607" y="3400000"/>
+            <a:ext cx="1904700" cy="800100"/>
           </a:xfrm>
           <a:prstGeom prst="rect">
             <a:avLst/>
@@ -36090,8 +36122,8 @@
         </p:nvSpPr>
         <p:spPr>
           <a:xfrm>
-            <a:off x="750005" y="905100"/>
-            <a:ext cx="1500000" cy="54900"/>
+            <a:off x="750006" y="905100"/>
+            <a:ext cx="1785600" cy="54900"/>
           </a:xfrm>
           <a:prstGeom prst="rect">
             <a:avLst/>
@@ -36187,7 +36219,7 @@
         <p:spPr>
           <a:xfrm>
             <a:off x="750000" y="500000"/>
-            <a:ext cx="5950000" cy="900000"/>
+            <a:ext cx="7157400" cy="900000"/>
           </a:xfrm>
           <a:prstGeom prst="rect">
             <a:avLst/>
@@ -36244,8 +36276,8 @@
         </p:nvSpPr>
         <p:spPr>
           <a:xfrm>
-            <a:off x="750000" y="1251593"/>
-            <a:ext cx="5949900" cy="399900"/>
+            <a:off x="750000" y="1251594"/>
+            <a:ext cx="7157400" cy="399900"/>
           </a:xfrm>
           <a:prstGeom prst="rect">
             <a:avLst/>
@@ -36302,8 +36334,8 @@
         </p:nvSpPr>
         <p:spPr>
           <a:xfrm>
-            <a:off x="750000" y="1671593"/>
-            <a:ext cx="1500000" cy="699900"/>
+            <a:off x="750000" y="1671595"/>
+            <a:ext cx="1804500" cy="699900"/>
           </a:xfrm>
           <a:prstGeom prst="rect">
             <a:avLst/>
@@ -36360,8 +36392,8 @@
         </p:nvSpPr>
         <p:spPr>
           <a:xfrm>
-            <a:off x="2200000" y="1701593"/>
-            <a:ext cx="4500000" cy="399900"/>
+            <a:off x="2494265" y="1701595"/>
+            <a:ext cx="5413200" cy="399900"/>
           </a:xfrm>
           <a:prstGeom prst="rect">
             <a:avLst/>
@@ -36418,8 +36450,8 @@
         </p:nvSpPr>
         <p:spPr>
           <a:xfrm>
-            <a:off x="2200000" y="2071593"/>
-            <a:ext cx="4500000" cy="399900"/>
+            <a:off x="2494265" y="2071596"/>
+            <a:ext cx="5413200" cy="399900"/>
           </a:xfrm>
           <a:prstGeom prst="rect">
             <a:avLst/>
@@ -36476,8 +36508,8 @@
         </p:nvSpPr>
         <p:spPr>
           <a:xfrm>
-            <a:off x="790000" y="2771593"/>
-            <a:ext cx="180000" cy="180000"/>
+            <a:off x="798118" y="2771597"/>
+            <a:ext cx="216600" cy="180000"/>
           </a:xfrm>
           <a:prstGeom prst="ellipse">
             <a:avLst/>
@@ -36530,8 +36562,8 @@
         </p:nvSpPr>
         <p:spPr>
           <a:xfrm>
-            <a:off x="1050000" y="2721593"/>
-            <a:ext cx="1800000" cy="300000"/>
+            <a:off x="1110882" y="2721597"/>
+            <a:ext cx="2165400" cy="300000"/>
           </a:xfrm>
           <a:prstGeom prst="rect">
             <a:avLst/>
@@ -36588,8 +36620,8 @@
         </p:nvSpPr>
         <p:spPr>
           <a:xfrm>
-            <a:off x="2950000" y="2721593"/>
-            <a:ext cx="3699900" cy="300000"/>
+            <a:off x="3396471" y="2721597"/>
+            <a:ext cx="4450800" cy="300000"/>
           </a:xfrm>
           <a:prstGeom prst="rect">
             <a:avLst/>
@@ -36646,8 +36678,8 @@
         </p:nvSpPr>
         <p:spPr>
           <a:xfrm>
-            <a:off x="790000" y="3181593"/>
-            <a:ext cx="180000" cy="180000"/>
+            <a:off x="798118" y="3181598"/>
+            <a:ext cx="216600" cy="180000"/>
           </a:xfrm>
           <a:prstGeom prst="ellipse">
             <a:avLst/>
@@ -36700,8 +36732,8 @@
         </p:nvSpPr>
         <p:spPr>
           <a:xfrm>
-            <a:off x="1050000" y="3131593"/>
-            <a:ext cx="1800000" cy="300000"/>
+            <a:off x="1110882" y="3131598"/>
+            <a:ext cx="2165400" cy="300000"/>
           </a:xfrm>
           <a:prstGeom prst="rect">
             <a:avLst/>
@@ -36758,8 +36790,8 @@
         </p:nvSpPr>
         <p:spPr>
           <a:xfrm>
-            <a:off x="2950000" y="3131593"/>
-            <a:ext cx="3699900" cy="300000"/>
+            <a:off x="3396471" y="3131598"/>
+            <a:ext cx="4450800" cy="300000"/>
           </a:xfrm>
           <a:prstGeom prst="rect">
             <a:avLst/>
@@ -36816,8 +36848,8 @@
         </p:nvSpPr>
         <p:spPr>
           <a:xfrm>
-            <a:off x="790000" y="3591593"/>
-            <a:ext cx="180000" cy="180000"/>
+            <a:off x="798118" y="3591599"/>
+            <a:ext cx="216600" cy="180000"/>
           </a:xfrm>
           <a:prstGeom prst="ellipse">
             <a:avLst/>
@@ -36870,8 +36902,8 @@
         </p:nvSpPr>
         <p:spPr>
           <a:xfrm>
-            <a:off x="1050000" y="3541593"/>
-            <a:ext cx="1800000" cy="300000"/>
+            <a:off x="1110882" y="3541599"/>
+            <a:ext cx="2165400" cy="300000"/>
           </a:xfrm>
           <a:prstGeom prst="rect">
             <a:avLst/>
@@ -36928,8 +36960,8 @@
         </p:nvSpPr>
         <p:spPr>
           <a:xfrm>
-            <a:off x="2950000" y="3541593"/>
-            <a:ext cx="3699900" cy="300000"/>
+            <a:off x="3396471" y="3541599"/>
+            <a:ext cx="4450800" cy="300000"/>
           </a:xfrm>
           <a:prstGeom prst="rect">
             <a:avLst/>
@@ -36986,8 +37018,8 @@
         </p:nvSpPr>
         <p:spPr>
           <a:xfrm>
-            <a:off x="790000" y="4001593"/>
-            <a:ext cx="180000" cy="180000"/>
+            <a:off x="798118" y="4001600"/>
+            <a:ext cx="216600" cy="180000"/>
           </a:xfrm>
           <a:prstGeom prst="ellipse">
             <a:avLst/>
@@ -37040,8 +37072,8 @@
         </p:nvSpPr>
         <p:spPr>
           <a:xfrm>
-            <a:off x="1050000" y="3951593"/>
-            <a:ext cx="1800000" cy="300000"/>
+            <a:off x="1110882" y="3951599"/>
+            <a:ext cx="2165400" cy="300000"/>
           </a:xfrm>
           <a:prstGeom prst="rect">
             <a:avLst/>
@@ -37098,8 +37130,8 @@
         </p:nvSpPr>
         <p:spPr>
           <a:xfrm>
-            <a:off x="2950000" y="3951593"/>
-            <a:ext cx="3699900" cy="300000"/>
+            <a:off x="3396471" y="3951599"/>
+            <a:ext cx="4450800" cy="300000"/>
           </a:xfrm>
           <a:prstGeom prst="rect">
             <a:avLst/>
@@ -37156,8 +37188,8 @@
         </p:nvSpPr>
         <p:spPr>
           <a:xfrm>
-            <a:off x="750005" y="905100"/>
-            <a:ext cx="1500000" cy="54900"/>
+            <a:off x="750006" y="905101"/>
+            <a:ext cx="1804500" cy="54900"/>
           </a:xfrm>
           <a:prstGeom prst="rect">
             <a:avLst/>
@@ -37253,7 +37285,7 @@
         <p:spPr>
           <a:xfrm>
             <a:off x="750000" y="500000"/>
-            <a:ext cx="5950000" cy="900000"/>
+            <a:ext cx="7164900" cy="900000"/>
           </a:xfrm>
           <a:prstGeom prst="rect">
             <a:avLst/>
@@ -37311,7 +37343,7 @@
         <p:spPr>
           <a:xfrm>
             <a:off x="750000" y="1330000"/>
-            <a:ext cx="5950000" cy="400000"/>
+            <a:ext cx="7164900" cy="399900"/>
           </a:xfrm>
           <a:prstGeom prst="rect">
             <a:avLst/>
@@ -37369,7 +37401,7 @@
         <p:spPr>
           <a:xfrm>
             <a:off x="750000" y="1750000"/>
-            <a:ext cx="5950000" cy="2700000"/>
+            <a:ext cx="7164900" cy="2700000"/>
           </a:xfrm>
           <a:prstGeom prst="rect">
             <a:avLst/>
@@ -37618,8 +37650,8 @@
         </p:nvSpPr>
         <p:spPr>
           <a:xfrm>
-            <a:off x="750005" y="905100"/>
-            <a:ext cx="1500000" cy="54900"/>
+            <a:off x="750006" y="905100"/>
+            <a:ext cx="1806300" cy="54900"/>
           </a:xfrm>
           <a:prstGeom prst="rect">
             <a:avLst/>
@@ -38344,7 +38376,7 @@
         <p:spPr>
           <a:xfrm>
             <a:off x="750000" y="500000"/>
-            <a:ext cx="5950000" cy="900000"/>
+            <a:ext cx="7121100" cy="900000"/>
           </a:xfrm>
           <a:prstGeom prst="rect">
             <a:avLst/>
@@ -38401,8 +38433,8 @@
         </p:nvSpPr>
         <p:spPr>
           <a:xfrm>
-            <a:off x="750000" y="1063416"/>
-            <a:ext cx="5949900" cy="399900"/>
+            <a:off x="750000" y="1063421"/>
+            <a:ext cx="7121100" cy="399900"/>
           </a:xfrm>
           <a:prstGeom prst="rect">
             <a:avLst/>
@@ -38460,7 +38492,7 @@
         <p:spPr>
           <a:xfrm>
             <a:off x="750000" y="1323650"/>
-            <a:ext cx="6816300" cy="920700"/>
+            <a:ext cx="7121100" cy="920700"/>
           </a:xfrm>
           <a:prstGeom prst="roundRect">
             <a:avLst>
@@ -38497,7 +38529,7 @@
             </a:r>
             <a:endParaRPr b="0" i="0" sz="1400" u="none" cap="none" strike="noStrike">
               <a:solidFill>
-                <a:srgbClr val="000000"/>
+                <a:schemeClr val="lt1"/>
               </a:solidFill>
               <a:latin typeface="Arial"/>
               <a:ea typeface="Arial"/>
@@ -38515,8 +38547,8 @@
         </p:nvSpPr>
         <p:spPr>
           <a:xfrm>
-            <a:off x="921842" y="1523646"/>
-            <a:ext cx="549900" cy="480000"/>
+            <a:off x="929526" y="1523646"/>
+            <a:ext cx="574500" cy="480000"/>
           </a:xfrm>
           <a:prstGeom prst="ellipse">
             <a:avLst/>
@@ -38554,7 +38586,7 @@
             <a:r>
               <a:rPr b="1" i="0" lang="en-US" sz="2000" u="none" cap="none" strike="noStrike">
                 <a:solidFill>
-                  <a:srgbClr val="E8A317"/>
+                  <a:schemeClr val="lt1"/>
                 </a:solidFill>
                 <a:latin typeface="Arial Black"/>
                 <a:ea typeface="Arial Black"/>
@@ -38563,7 +38595,11 @@
               </a:rPr>
               <a:t>1</a:t>
             </a:r>
-            <a:endParaRPr/>
+            <a:endParaRPr>
+              <a:solidFill>
+                <a:schemeClr val="lt1"/>
+              </a:solidFill>
+            </a:endParaRPr>
           </a:p>
         </p:txBody>
       </p:sp>
@@ -38575,8 +38611,8 @@
         </p:nvSpPr>
         <p:spPr>
           <a:xfrm>
-            <a:off x="1609209" y="1337398"/>
-            <a:ext cx="1031100" cy="300000"/>
+            <a:off x="1647629" y="1337398"/>
+            <a:ext cx="1077300" cy="300000"/>
           </a:xfrm>
           <a:prstGeom prst="rect">
             <a:avLst/>
@@ -38633,8 +38669,8 @@
         </p:nvSpPr>
         <p:spPr>
           <a:xfrm>
-            <a:off x="1609209" y="1554672"/>
-            <a:ext cx="5613300" cy="300000"/>
+            <a:off x="1647629" y="1554672"/>
+            <a:ext cx="5864400" cy="300000"/>
           </a:xfrm>
           <a:prstGeom prst="rect">
             <a:avLst/>
@@ -38691,8 +38727,8 @@
         </p:nvSpPr>
         <p:spPr>
           <a:xfrm>
-            <a:off x="1609209" y="1825474"/>
-            <a:ext cx="5785200" cy="227700"/>
+            <a:off x="1647629" y="1825474"/>
+            <a:ext cx="6043800" cy="227700"/>
           </a:xfrm>
           <a:prstGeom prst="rect">
             <a:avLst/>
@@ -38750,7 +38786,7 @@
         <p:spPr>
           <a:xfrm>
             <a:off x="750000" y="2244225"/>
-            <a:ext cx="6816300" cy="800100"/>
+            <a:ext cx="7121100" cy="800100"/>
           </a:xfrm>
           <a:prstGeom prst="roundRect">
             <a:avLst>
@@ -38787,7 +38823,7 @@
             </a:r>
             <a:endParaRPr b="0" i="0" sz="1400" u="none" cap="none" strike="noStrike">
               <a:solidFill>
-                <a:srgbClr val="000000"/>
+                <a:schemeClr val="lt1"/>
               </a:solidFill>
               <a:latin typeface="Arial"/>
               <a:ea typeface="Arial"/>
@@ -38805,8 +38841,8 @@
         </p:nvSpPr>
         <p:spPr>
           <a:xfrm>
-            <a:off x="921842" y="2444225"/>
-            <a:ext cx="549900" cy="480000"/>
+            <a:off x="929527" y="2444225"/>
+            <a:ext cx="574500" cy="480000"/>
           </a:xfrm>
           <a:prstGeom prst="ellipse">
             <a:avLst/>
@@ -38844,7 +38880,7 @@
             <a:r>
               <a:rPr b="1" i="0" lang="en-US" sz="2000" u="none" cap="none" strike="noStrike">
                 <a:solidFill>
-                  <a:srgbClr val="E8A317"/>
+                  <a:schemeClr val="lt1"/>
                 </a:solidFill>
                 <a:latin typeface="Arial Black"/>
                 <a:ea typeface="Arial Black"/>
@@ -38853,7 +38889,11 @@
               </a:rPr>
               <a:t>2</a:t>
             </a:r>
-            <a:endParaRPr/>
+            <a:endParaRPr>
+              <a:solidFill>
+                <a:schemeClr val="lt1"/>
+              </a:solidFill>
+            </a:endParaRPr>
           </a:p>
         </p:txBody>
       </p:sp>
@@ -38865,8 +38905,8 @@
         </p:nvSpPr>
         <p:spPr>
           <a:xfrm>
-            <a:off x="1609212" y="2344225"/>
-            <a:ext cx="1031100" cy="300000"/>
+            <a:off x="1647633" y="2344225"/>
+            <a:ext cx="1077300" cy="300000"/>
           </a:xfrm>
           <a:prstGeom prst="rect">
             <a:avLst/>
@@ -38923,8 +38963,8 @@
         </p:nvSpPr>
         <p:spPr>
           <a:xfrm>
-            <a:off x="1609212" y="2569339"/>
-            <a:ext cx="5613300" cy="300000"/>
+            <a:off x="1647633" y="2569339"/>
+            <a:ext cx="5864400" cy="300000"/>
           </a:xfrm>
           <a:prstGeom prst="rect">
             <a:avLst/>
@@ -38981,8 +39021,8 @@
         </p:nvSpPr>
         <p:spPr>
           <a:xfrm>
-            <a:off x="1609212" y="2847976"/>
-            <a:ext cx="5785200" cy="399900"/>
+            <a:off x="1647633" y="2847976"/>
+            <a:ext cx="6043800" cy="399900"/>
           </a:xfrm>
           <a:prstGeom prst="rect">
             <a:avLst/>
@@ -39040,7 +39080,7 @@
         <p:spPr>
           <a:xfrm>
             <a:off x="750000" y="3133425"/>
-            <a:ext cx="6816300" cy="1050600"/>
+            <a:ext cx="7121100" cy="1050600"/>
           </a:xfrm>
           <a:prstGeom prst="roundRect">
             <a:avLst>
@@ -39077,7 +39117,7 @@
             </a:r>
             <a:endParaRPr b="0" i="0" sz="1400" u="none" cap="none" strike="noStrike">
               <a:solidFill>
-                <a:srgbClr val="000000"/>
+                <a:schemeClr val="lt1"/>
               </a:solidFill>
               <a:latin typeface="Arial"/>
               <a:ea typeface="Arial"/>
@@ -39095,8 +39135,8 @@
         </p:nvSpPr>
         <p:spPr>
           <a:xfrm>
-            <a:off x="921842" y="3333416"/>
-            <a:ext cx="549900" cy="480000"/>
+            <a:off x="929527" y="3333416"/>
+            <a:ext cx="574500" cy="480000"/>
           </a:xfrm>
           <a:prstGeom prst="ellipse">
             <a:avLst/>
@@ -39134,7 +39174,7 @@
             <a:r>
               <a:rPr b="1" i="0" lang="en-US" sz="2000" u="none" cap="none" strike="noStrike">
                 <a:solidFill>
-                  <a:srgbClr val="E8A317"/>
+                  <a:schemeClr val="lt1"/>
                 </a:solidFill>
                 <a:latin typeface="Arial Black"/>
                 <a:ea typeface="Arial Black"/>
@@ -39143,7 +39183,11 @@
               </a:rPr>
               <a:t>3</a:t>
             </a:r>
-            <a:endParaRPr/>
+            <a:endParaRPr>
+              <a:solidFill>
+                <a:schemeClr val="lt1"/>
+              </a:solidFill>
+            </a:endParaRPr>
           </a:p>
         </p:txBody>
       </p:sp>
@@ -39155,8 +39199,8 @@
         </p:nvSpPr>
         <p:spPr>
           <a:xfrm>
-            <a:off x="1609212" y="3233415"/>
-            <a:ext cx="1031100" cy="300000"/>
+            <a:off x="1647633" y="3233415"/>
+            <a:ext cx="1077300" cy="300000"/>
           </a:xfrm>
           <a:prstGeom prst="rect">
             <a:avLst/>
@@ -39213,8 +39257,8 @@
         </p:nvSpPr>
         <p:spPr>
           <a:xfrm>
-            <a:off x="1609212" y="3513419"/>
-            <a:ext cx="5613300" cy="300000"/>
+            <a:off x="1647633" y="3513419"/>
+            <a:ext cx="5864400" cy="300000"/>
           </a:xfrm>
           <a:prstGeom prst="rect">
             <a:avLst/>
@@ -39271,8 +39315,8 @@
         </p:nvSpPr>
         <p:spPr>
           <a:xfrm>
-            <a:off x="1609212" y="3784219"/>
-            <a:ext cx="5785200" cy="399900"/>
+            <a:off x="1647633" y="3784219"/>
+            <a:ext cx="6043800" cy="399900"/>
           </a:xfrm>
           <a:prstGeom prst="rect">
             <a:avLst/>
@@ -39330,7 +39374,7 @@
         <p:spPr>
           <a:xfrm>
             <a:off x="750000" y="4400000"/>
-            <a:ext cx="5950000" cy="250000"/>
+            <a:ext cx="6216000" cy="249900"/>
           </a:xfrm>
           <a:prstGeom prst="rect">
             <a:avLst/>
@@ -39387,8 +39431,8 @@
         </p:nvSpPr>
         <p:spPr>
           <a:xfrm>
-            <a:off x="750005" y="905100"/>
-            <a:ext cx="1500000" cy="54900"/>
+            <a:off x="749030" y="953307"/>
+            <a:ext cx="1778400" cy="54300"/>
           </a:xfrm>
           <a:prstGeom prst="rect">
             <a:avLst/>
@@ -39484,7 +39528,7 @@
         <p:spPr>
           <a:xfrm>
             <a:off x="750000" y="500000"/>
-            <a:ext cx="5950000" cy="900000"/>
+            <a:ext cx="6967200" cy="900000"/>
           </a:xfrm>
           <a:prstGeom prst="rect">
             <a:avLst/>
@@ -39542,7 +39586,7 @@
         <p:spPr>
           <a:xfrm>
             <a:off x="750000" y="1330000"/>
-            <a:ext cx="5950000" cy="400000"/>
+            <a:ext cx="6967200" cy="399900"/>
           </a:xfrm>
           <a:prstGeom prst="rect">
             <a:avLst/>
@@ -39600,7 +39644,7 @@
         <p:spPr>
           <a:xfrm>
             <a:off x="750000" y="1750000"/>
-            <a:ext cx="2900000" cy="2400000"/>
+            <a:ext cx="3395700" cy="2400000"/>
           </a:xfrm>
           <a:prstGeom prst="roundRect">
             <a:avLst>
@@ -39655,8 +39699,8 @@
         </p:nvSpPr>
         <p:spPr>
           <a:xfrm>
-            <a:off x="900000" y="1850000"/>
-            <a:ext cx="2700000" cy="350000"/>
+            <a:off x="925647" y="1850000"/>
+            <a:ext cx="3161700" cy="350100"/>
           </a:xfrm>
           <a:prstGeom prst="rect">
             <a:avLst/>
@@ -39713,8 +39757,8 @@
         </p:nvSpPr>
         <p:spPr>
           <a:xfrm>
-            <a:off x="900000" y="2200000"/>
-            <a:ext cx="2700000" cy="1900000"/>
+            <a:off x="925647" y="2200000"/>
+            <a:ext cx="3161700" cy="1899900"/>
           </a:xfrm>
           <a:prstGeom prst="rect">
             <a:avLst/>
@@ -39771,8 +39815,8 @@
         </p:nvSpPr>
         <p:spPr>
           <a:xfrm>
-            <a:off x="3850000" y="1750000"/>
-            <a:ext cx="3000000" cy="350000"/>
+            <a:off x="4380036" y="1750000"/>
+            <a:ext cx="3513000" cy="350100"/>
           </a:xfrm>
           <a:prstGeom prst="rect">
             <a:avLst/>
@@ -39829,8 +39873,8 @@
         </p:nvSpPr>
         <p:spPr>
           <a:xfrm>
-            <a:off x="3850000" y="2150000"/>
-            <a:ext cx="3000000" cy="2000000"/>
+            <a:off x="4380036" y="2150000"/>
+            <a:ext cx="3513000" cy="2000100"/>
           </a:xfrm>
           <a:prstGeom prst="rect">
             <a:avLst/>
@@ -40048,7 +40092,7 @@
         <p:spPr>
           <a:xfrm>
             <a:off x="750000" y="4400000"/>
-            <a:ext cx="5950000" cy="250000"/>
+            <a:ext cx="6967200" cy="249900"/>
           </a:xfrm>
           <a:prstGeom prst="rect">
             <a:avLst/>
@@ -40105,8 +40149,8 @@
         </p:nvSpPr>
         <p:spPr>
           <a:xfrm>
-            <a:off x="750005" y="905100"/>
-            <a:ext cx="1500000" cy="54900"/>
+            <a:off x="750006" y="905100"/>
+            <a:ext cx="1756500" cy="54900"/>
           </a:xfrm>
           <a:prstGeom prst="rect">
             <a:avLst/>
@@ -40202,7 +40246,7 @@
         <p:spPr>
           <a:xfrm>
             <a:off x="750000" y="500000"/>
-            <a:ext cx="5950000" cy="900000"/>
+            <a:ext cx="7157400" cy="900000"/>
           </a:xfrm>
           <a:prstGeom prst="rect">
             <a:avLst/>
@@ -40260,7 +40304,7 @@
         <p:spPr>
           <a:xfrm>
             <a:off x="750000" y="1181027"/>
-            <a:ext cx="5949900" cy="399900"/>
+            <a:ext cx="7157400" cy="399900"/>
           </a:xfrm>
           <a:prstGeom prst="rect">
             <a:avLst/>
@@ -40318,7 +40362,7 @@
         <p:spPr>
           <a:xfrm>
             <a:off x="750000" y="1601027"/>
-            <a:ext cx="5949900" cy="800100"/>
+            <a:ext cx="7157400" cy="800100"/>
           </a:xfrm>
           <a:prstGeom prst="roundRect">
             <a:avLst>
@@ -40373,8 +40417,8 @@
         </p:nvSpPr>
         <p:spPr>
           <a:xfrm>
-            <a:off x="850000" y="1671027"/>
-            <a:ext cx="2400000" cy="650100"/>
+            <a:off x="870294" y="1671027"/>
+            <a:ext cx="2887200" cy="650100"/>
           </a:xfrm>
           <a:prstGeom prst="rect">
             <a:avLst/>
@@ -40431,8 +40475,8 @@
         </p:nvSpPr>
         <p:spPr>
           <a:xfrm>
-            <a:off x="3300000" y="1671027"/>
-            <a:ext cx="3300000" cy="650100"/>
+            <a:off x="3817500" y="1671027"/>
+            <a:ext cx="3969600" cy="650100"/>
           </a:xfrm>
           <a:prstGeom prst="rect">
             <a:avLst/>
@@ -40490,7 +40534,7 @@
         <p:spPr>
           <a:xfrm>
             <a:off x="750000" y="2601027"/>
-            <a:ext cx="2850000" cy="759900"/>
+            <a:ext cx="3428400" cy="759900"/>
           </a:xfrm>
           <a:prstGeom prst="roundRect">
             <a:avLst>
@@ -40545,8 +40589,8 @@
         </p:nvSpPr>
         <p:spPr>
           <a:xfrm>
-            <a:off x="880000" y="2881027"/>
-            <a:ext cx="200100" cy="200100"/>
+            <a:off x="906382" y="2881027"/>
+            <a:ext cx="240600" cy="200100"/>
           </a:xfrm>
           <a:prstGeom prst="ellipse">
             <a:avLst/>
@@ -40599,8 +40643,8 @@
         </p:nvSpPr>
         <p:spPr>
           <a:xfrm>
-            <a:off x="1150000" y="2731027"/>
-            <a:ext cx="2349900" cy="300000"/>
+            <a:off x="1231176" y="2731027"/>
+            <a:ext cx="2826900" cy="300000"/>
           </a:xfrm>
           <a:prstGeom prst="rect">
             <a:avLst/>
@@ -40657,8 +40701,8 @@
         </p:nvSpPr>
         <p:spPr>
           <a:xfrm>
-            <a:off x="1150000" y="3021027"/>
-            <a:ext cx="2349900" cy="300000"/>
+            <a:off x="1231176" y="3021027"/>
+            <a:ext cx="2826900" cy="300000"/>
           </a:xfrm>
           <a:prstGeom prst="rect">
             <a:avLst/>
@@ -40715,8 +40759,8 @@
         </p:nvSpPr>
         <p:spPr>
           <a:xfrm>
-            <a:off x="3750000" y="2601027"/>
-            <a:ext cx="2850000" cy="759900"/>
+            <a:off x="4358824" y="2601027"/>
+            <a:ext cx="3428400" cy="759900"/>
           </a:xfrm>
           <a:prstGeom prst="roundRect">
             <a:avLst>
@@ -40771,8 +40815,8 @@
         </p:nvSpPr>
         <p:spPr>
           <a:xfrm>
-            <a:off x="3880000" y="2881027"/>
-            <a:ext cx="200100" cy="200100"/>
+            <a:off x="4515206" y="2881027"/>
+            <a:ext cx="240600" cy="200100"/>
           </a:xfrm>
           <a:prstGeom prst="ellipse">
             <a:avLst/>
@@ -40825,8 +40869,8 @@
         </p:nvSpPr>
         <p:spPr>
           <a:xfrm>
-            <a:off x="4150000" y="2731027"/>
-            <a:ext cx="2349900" cy="300000"/>
+            <a:off x="4840000" y="2731027"/>
+            <a:ext cx="2826900" cy="300000"/>
           </a:xfrm>
           <a:prstGeom prst="rect">
             <a:avLst/>
@@ -40883,8 +40927,8 @@
         </p:nvSpPr>
         <p:spPr>
           <a:xfrm>
-            <a:off x="4150000" y="3021027"/>
-            <a:ext cx="2349900" cy="300000"/>
+            <a:off x="4840000" y="3021027"/>
+            <a:ext cx="2826900" cy="300000"/>
           </a:xfrm>
           <a:prstGeom prst="rect">
             <a:avLst/>
@@ -40942,7 +40986,7 @@
         <p:spPr>
           <a:xfrm>
             <a:off x="750000" y="3451027"/>
-            <a:ext cx="2850000" cy="759900"/>
+            <a:ext cx="3428400" cy="759900"/>
           </a:xfrm>
           <a:prstGeom prst="roundRect">
             <a:avLst>
@@ -40997,8 +41041,8 @@
         </p:nvSpPr>
         <p:spPr>
           <a:xfrm>
-            <a:off x="880000" y="3731027"/>
-            <a:ext cx="200100" cy="200100"/>
+            <a:off x="906382" y="3731027"/>
+            <a:ext cx="240600" cy="200100"/>
           </a:xfrm>
           <a:prstGeom prst="ellipse">
             <a:avLst/>
@@ -41051,8 +41095,8 @@
         </p:nvSpPr>
         <p:spPr>
           <a:xfrm>
-            <a:off x="1150000" y="3581027"/>
-            <a:ext cx="2349900" cy="300000"/>
+            <a:off x="1231176" y="3581027"/>
+            <a:ext cx="2826900" cy="300000"/>
           </a:xfrm>
           <a:prstGeom prst="rect">
             <a:avLst/>
@@ -41109,8 +41153,8 @@
         </p:nvSpPr>
         <p:spPr>
           <a:xfrm>
-            <a:off x="1150000" y="3871027"/>
-            <a:ext cx="2349900" cy="300000"/>
+            <a:off x="1231176" y="3871027"/>
+            <a:ext cx="2826900" cy="300000"/>
           </a:xfrm>
           <a:prstGeom prst="rect">
             <a:avLst/>
@@ -41167,8 +41211,8 @@
         </p:nvSpPr>
         <p:spPr>
           <a:xfrm>
-            <a:off x="3750000" y="3451027"/>
-            <a:ext cx="2850000" cy="759900"/>
+            <a:off x="4358824" y="3451027"/>
+            <a:ext cx="3428400" cy="759900"/>
           </a:xfrm>
           <a:prstGeom prst="roundRect">
             <a:avLst>
@@ -41223,8 +41267,8 @@
         </p:nvSpPr>
         <p:spPr>
           <a:xfrm>
-            <a:off x="3880000" y="3731027"/>
-            <a:ext cx="200100" cy="200100"/>
+            <a:off x="4515206" y="3731027"/>
+            <a:ext cx="240600" cy="200100"/>
           </a:xfrm>
           <a:prstGeom prst="ellipse">
             <a:avLst/>
@@ -41277,8 +41321,8 @@
         </p:nvSpPr>
         <p:spPr>
           <a:xfrm>
-            <a:off x="4150000" y="3581027"/>
-            <a:ext cx="2349900" cy="300000"/>
+            <a:off x="4840000" y="3581027"/>
+            <a:ext cx="2826900" cy="300000"/>
           </a:xfrm>
           <a:prstGeom prst="rect">
             <a:avLst/>
@@ -41335,8 +41379,8 @@
         </p:nvSpPr>
         <p:spPr>
           <a:xfrm>
-            <a:off x="4150000" y="3871027"/>
-            <a:ext cx="2349900" cy="300000"/>
+            <a:off x="4840000" y="3871027"/>
+            <a:ext cx="2826900" cy="300000"/>
           </a:xfrm>
           <a:prstGeom prst="rect">
             <a:avLst/>
@@ -41394,7 +41438,7 @@
         <p:spPr>
           <a:xfrm>
             <a:off x="750000" y="4400000"/>
-            <a:ext cx="5950000" cy="250000"/>
+            <a:ext cx="7157400" cy="249900"/>
           </a:xfrm>
           <a:prstGeom prst="rect">
             <a:avLst/>
@@ -41451,8 +41495,8 @@
         </p:nvSpPr>
         <p:spPr>
           <a:xfrm>
-            <a:off x="750005" y="905100"/>
-            <a:ext cx="1500000" cy="54900"/>
+            <a:off x="750006" y="905100"/>
+            <a:ext cx="1804500" cy="54900"/>
           </a:xfrm>
           <a:prstGeom prst="rect">
             <a:avLst/>
@@ -41548,7 +41592,7 @@
         <p:spPr>
           <a:xfrm>
             <a:off x="750000" y="500000"/>
-            <a:ext cx="5950000" cy="900000"/>
+            <a:ext cx="7143000" cy="900000"/>
           </a:xfrm>
           <a:prstGeom prst="rect">
             <a:avLst/>
@@ -41606,7 +41650,7 @@
         <p:spPr>
           <a:xfrm>
             <a:off x="750000" y="1330000"/>
-            <a:ext cx="6291000" cy="399900"/>
+            <a:ext cx="7143000" cy="399900"/>
           </a:xfrm>
           <a:prstGeom prst="rect">
             <a:avLst/>
@@ -41664,7 +41708,7 @@
         <p:spPr>
           <a:xfrm>
             <a:off x="750000" y="1750000"/>
-            <a:ext cx="5950000" cy="400000"/>
+            <a:ext cx="7143000" cy="399900"/>
           </a:xfrm>
           <a:prstGeom prst="rect">
             <a:avLst/>
@@ -41717,8 +41761,8 @@
         </p:nvSpPr>
         <p:spPr>
           <a:xfrm>
-            <a:off x="830000" y="1810000"/>
-            <a:ext cx="940000" cy="300000"/>
+            <a:off x="846041" y="1810000"/>
+            <a:ext cx="1128600" cy="300000"/>
           </a:xfrm>
           <a:prstGeom prst="rect">
             <a:avLst/>
@@ -41775,8 +41819,8 @@
         </p:nvSpPr>
         <p:spPr>
           <a:xfrm>
-            <a:off x="1930000" y="1810000"/>
-            <a:ext cx="2040000" cy="300000"/>
+            <a:off x="2166610" y="1810000"/>
+            <a:ext cx="2449200" cy="300000"/>
           </a:xfrm>
           <a:prstGeom prst="rect">
             <a:avLst/>
@@ -41833,8 +41877,8 @@
         </p:nvSpPr>
         <p:spPr>
           <a:xfrm>
-            <a:off x="4130000" y="1810000"/>
-            <a:ext cx="2490000" cy="300000"/>
+            <a:off x="4807747" y="1810000"/>
+            <a:ext cx="2989200" cy="300000"/>
           </a:xfrm>
           <a:prstGeom prst="rect">
             <a:avLst/>
@@ -41892,7 +41936,7 @@
         <p:spPr>
           <a:xfrm>
             <a:off x="750000" y="2150000"/>
-            <a:ext cx="5950000" cy="400000"/>
+            <a:ext cx="7143000" cy="399900"/>
           </a:xfrm>
           <a:prstGeom prst="rect">
             <a:avLst/>
@@ -41945,8 +41989,8 @@
         </p:nvSpPr>
         <p:spPr>
           <a:xfrm>
-            <a:off x="830000" y="2210000"/>
-            <a:ext cx="940000" cy="300000"/>
+            <a:off x="846041" y="2210000"/>
+            <a:ext cx="1128600" cy="300000"/>
           </a:xfrm>
           <a:prstGeom prst="rect">
             <a:avLst/>
@@ -42003,8 +42047,8 @@
         </p:nvSpPr>
         <p:spPr>
           <a:xfrm>
-            <a:off x="1930000" y="2210000"/>
-            <a:ext cx="2040000" cy="300000"/>
+            <a:off x="2166610" y="2210000"/>
+            <a:ext cx="2449200" cy="300000"/>
           </a:xfrm>
           <a:prstGeom prst="rect">
             <a:avLst/>
@@ -42061,8 +42105,8 @@
         </p:nvSpPr>
         <p:spPr>
           <a:xfrm>
-            <a:off x="4130000" y="2210000"/>
-            <a:ext cx="2490000" cy="300000"/>
+            <a:off x="4807747" y="2210000"/>
+            <a:ext cx="2989200" cy="300000"/>
           </a:xfrm>
           <a:prstGeom prst="rect">
             <a:avLst/>
@@ -42120,7 +42164,7 @@
         <p:spPr>
           <a:xfrm>
             <a:off x="750000" y="2550000"/>
-            <a:ext cx="5950000" cy="400000"/>
+            <a:ext cx="7143000" cy="399900"/>
           </a:xfrm>
           <a:prstGeom prst="rect">
             <a:avLst/>
@@ -42173,8 +42217,8 @@
         </p:nvSpPr>
         <p:spPr>
           <a:xfrm>
-            <a:off x="830000" y="2610000"/>
-            <a:ext cx="940000" cy="300000"/>
+            <a:off x="846041" y="2610000"/>
+            <a:ext cx="1128600" cy="300000"/>
           </a:xfrm>
           <a:prstGeom prst="rect">
             <a:avLst/>
@@ -42231,8 +42275,8 @@
         </p:nvSpPr>
         <p:spPr>
           <a:xfrm>
-            <a:off x="1930000" y="2610000"/>
-            <a:ext cx="2040000" cy="300000"/>
+            <a:off x="2166610" y="2610000"/>
+            <a:ext cx="2449200" cy="300000"/>
           </a:xfrm>
           <a:prstGeom prst="rect">
             <a:avLst/>
@@ -42289,8 +42333,8 @@
         </p:nvSpPr>
         <p:spPr>
           <a:xfrm>
-            <a:off x="4130000" y="2610000"/>
-            <a:ext cx="2490000" cy="300000"/>
+            <a:off x="4807747" y="2610000"/>
+            <a:ext cx="2989200" cy="300000"/>
           </a:xfrm>
           <a:prstGeom prst="rect">
             <a:avLst/>
@@ -42348,7 +42392,7 @@
         <p:spPr>
           <a:xfrm>
             <a:off x="750000" y="2950000"/>
-            <a:ext cx="5950000" cy="400000"/>
+            <a:ext cx="7143000" cy="399900"/>
           </a:xfrm>
           <a:prstGeom prst="rect">
             <a:avLst/>
@@ -42401,8 +42445,8 @@
         </p:nvSpPr>
         <p:spPr>
           <a:xfrm>
-            <a:off x="830000" y="3010000"/>
-            <a:ext cx="940000" cy="300000"/>
+            <a:off x="846041" y="3010000"/>
+            <a:ext cx="1128600" cy="300000"/>
           </a:xfrm>
           <a:prstGeom prst="rect">
             <a:avLst/>
@@ -42459,8 +42503,8 @@
         </p:nvSpPr>
         <p:spPr>
           <a:xfrm>
-            <a:off x="1930000" y="3010000"/>
-            <a:ext cx="2040000" cy="300000"/>
+            <a:off x="2166610" y="3010000"/>
+            <a:ext cx="2449200" cy="300000"/>
           </a:xfrm>
           <a:prstGeom prst="rect">
             <a:avLst/>
@@ -42517,8 +42561,8 @@
         </p:nvSpPr>
         <p:spPr>
           <a:xfrm>
-            <a:off x="4130000" y="3010000"/>
-            <a:ext cx="2490000" cy="300000"/>
+            <a:off x="4807747" y="3010000"/>
+            <a:ext cx="2989200" cy="300000"/>
           </a:xfrm>
           <a:prstGeom prst="rect">
             <a:avLst/>
@@ -42576,7 +42620,7 @@
         <p:spPr>
           <a:xfrm>
             <a:off x="750000" y="3350000"/>
-            <a:ext cx="5950000" cy="400000"/>
+            <a:ext cx="7143000" cy="399900"/>
           </a:xfrm>
           <a:prstGeom prst="rect">
             <a:avLst/>
@@ -42629,8 +42673,8 @@
         </p:nvSpPr>
         <p:spPr>
           <a:xfrm>
-            <a:off x="830000" y="3410000"/>
-            <a:ext cx="940000" cy="300000"/>
+            <a:off x="846041" y="3410000"/>
+            <a:ext cx="1128600" cy="300000"/>
           </a:xfrm>
           <a:prstGeom prst="rect">
             <a:avLst/>
@@ -42687,8 +42731,8 @@
         </p:nvSpPr>
         <p:spPr>
           <a:xfrm>
-            <a:off x="1930000" y="3410000"/>
-            <a:ext cx="2040000" cy="300000"/>
+            <a:off x="2166610" y="3410000"/>
+            <a:ext cx="2449200" cy="300000"/>
           </a:xfrm>
           <a:prstGeom prst="rect">
             <a:avLst/>
@@ -42745,8 +42789,8 @@
         </p:nvSpPr>
         <p:spPr>
           <a:xfrm>
-            <a:off x="4130000" y="3410000"/>
-            <a:ext cx="2490000" cy="300000"/>
+            <a:off x="4807747" y="3410000"/>
+            <a:ext cx="2989200" cy="300000"/>
           </a:xfrm>
           <a:prstGeom prst="rect">
             <a:avLst/>
@@ -42804,7 +42848,7 @@
         <p:spPr>
           <a:xfrm>
             <a:off x="750000" y="3750000"/>
-            <a:ext cx="5950000" cy="400000"/>
+            <a:ext cx="7143000" cy="399900"/>
           </a:xfrm>
           <a:prstGeom prst="rect">
             <a:avLst/>
@@ -42857,8 +42901,8 @@
         </p:nvSpPr>
         <p:spPr>
           <a:xfrm>
-            <a:off x="830000" y="3810000"/>
-            <a:ext cx="940000" cy="300000"/>
+            <a:off x="846041" y="3810000"/>
+            <a:ext cx="1128600" cy="300000"/>
           </a:xfrm>
           <a:prstGeom prst="rect">
             <a:avLst/>
@@ -42915,8 +42959,8 @@
         </p:nvSpPr>
         <p:spPr>
           <a:xfrm>
-            <a:off x="1930000" y="3810000"/>
-            <a:ext cx="2040000" cy="300000"/>
+            <a:off x="2166610" y="3810000"/>
+            <a:ext cx="2449200" cy="300000"/>
           </a:xfrm>
           <a:prstGeom prst="rect">
             <a:avLst/>
@@ -42973,8 +43017,8 @@
         </p:nvSpPr>
         <p:spPr>
           <a:xfrm>
-            <a:off x="4130000" y="3810000"/>
-            <a:ext cx="2490000" cy="300000"/>
+            <a:off x="4807747" y="3810000"/>
+            <a:ext cx="2989200" cy="300000"/>
           </a:xfrm>
           <a:prstGeom prst="rect">
             <a:avLst/>
@@ -43032,7 +43076,7 @@
         <p:spPr>
           <a:xfrm>
             <a:off x="750000" y="4250000"/>
-            <a:ext cx="5950000" cy="350000"/>
+            <a:ext cx="7143000" cy="350100"/>
           </a:xfrm>
           <a:prstGeom prst="rect">
             <a:avLst/>
@@ -43089,8 +43133,8 @@
         </p:nvSpPr>
         <p:spPr>
           <a:xfrm>
-            <a:off x="750005" y="905100"/>
-            <a:ext cx="1500000" cy="54900"/>
+            <a:off x="750006" y="905100"/>
+            <a:ext cx="1800600" cy="54900"/>
           </a:xfrm>
           <a:prstGeom prst="rect">
             <a:avLst/>
